--- a/validation-artifacts/governance-validation.pptx
+++ b/validation-artifacts/governance-validation.pptx
@@ -108,6 +108,490 @@
     </a:lvl9pPr>
   </p:defaultTextStyle>
 </p:presentation>
+</file>
+
+<file path=ppt/charts/chart1.xml><?xml version="1.0" encoding="utf-8"?>
+<c:chartSpace xmlns:c="http://schemas.openxmlformats.org/drawingml/2006/chart" xmlns:a="http://schemas.openxmlformats.org/drawingml/2006/main" xmlns:r="http://schemas.openxmlformats.org/officeDocument/2006/relationships">
+  <c:date1904 val="0"/>
+  <c:roundedCorners val="1"/>
+  <c:chart>
+    <c:autoTitleDeleted val="1"/>
+    <c:plotArea>
+      <c:layout/>
+      <c:lineChart>
+        <c:varyColors val="0"/>
+        <c:ser>
+          <c:idx val="0"/>
+          <c:order val="0"/>
+          <c:tx>
+            <c:strRef>
+              <c:f>Sheet1!$B$1</c:f>
+              <c:strCache>
+                <c:ptCount val="1"/>
+                <c:pt idx="0">
+                  <c:v>Planned</c:v>
+                </c:pt>
+              </c:strCache>
+            </c:strRef>
+          </c:tx>
+          <c:spPr>
+            <a:solidFill>
+              <a:srgbClr val="9CA3AF"/>
+            </a:solidFill>
+            <a:ln w="25400" cap="flat">
+              <a:solidFill>
+                <a:srgbClr val="9CA3AF"/>
+              </a:solidFill>
+              <a:prstDash val="solid"/>
+              <a:round/>
+            </a:ln>
+            <a:effectLst/>
+          </c:spPr>
+          <c:invertIfNegative val="0"/>
+          <c:dLbls>
+            <c:numFmt formatCode="#,##0" sourceLinked="0"/>
+            <c:txPr>
+              <a:bodyPr/>
+              <a:lstStyle/>
+              <a:p>
+                <a:pPr>
+                  <a:defRPr b="0" i="0" strike="noStrike" sz="1200" u="none">
+                    <a:solidFill>
+                      <a:srgbClr val="000000"/>
+                    </a:solidFill>
+                    <a:latin typeface="Arial"/>
+                  </a:defRPr>
+                </a:pPr>
+              </a:p>
+            </c:txPr>
+            <c:showLegendKey val="0"/>
+            <c:showVal val="0"/>
+            <c:showCatName val="0"/>
+            <c:showSerName val="0"/>
+            <c:showPercent val="0"/>
+            <c:showBubbleSize val="0"/>
+            <c:showLeaderLines val="0"/>
+          </c:dLbls>
+          <c:marker>
+            <c:symbol val="circle"/>
+            <c:size val="6"/>
+            <c:spPr>
+              <a:solidFill>
+                <a:srgbClr val="9CA3AF"/>
+              </a:solidFill>
+              <a:ln w="9525" cap="flat">
+                <a:solidFill>
+                  <a:srgbClr val="9CA3AF"/>
+                </a:solidFill>
+                <a:prstDash val="solid"/>
+                <a:round/>
+              </a:ln>
+              <a:effectLst/>
+            </c:spPr>
+          </c:marker>
+          <c:cat>
+            <c:multiLvlStrRef>
+              <c:f>Sheet1!$A$2:$A$13</c:f>
+              <c:multiLvlStrCache>
+                <c:ptCount val="12"/>
+                <c:lvl>
+                  <c:pt idx="0">
+                    <c:v>1/25</c:v>
+                  </c:pt>
+                  <c:pt idx="1">
+                    <c:v>2/25</c:v>
+                  </c:pt>
+                  <c:pt idx="2">
+                    <c:v>3/25</c:v>
+                  </c:pt>
+                  <c:pt idx="3">
+                    <c:v>4/25</c:v>
+                  </c:pt>
+                  <c:pt idx="4">
+                    <c:v>5/25</c:v>
+                  </c:pt>
+                  <c:pt idx="5">
+                    <c:v>6/25</c:v>
+                  </c:pt>
+                  <c:pt idx="6">
+                    <c:v>7/25</c:v>
+                  </c:pt>
+                  <c:pt idx="7">
+                    <c:v>8/25</c:v>
+                  </c:pt>
+                  <c:pt idx="8">
+                    <c:v>9/25</c:v>
+                  </c:pt>
+                  <c:pt idx="9">
+                    <c:v>10/25</c:v>
+                  </c:pt>
+                  <c:pt idx="10">
+                    <c:v>11/25</c:v>
+                  </c:pt>
+                  <c:pt idx="11">
+                    <c:v>12/25</c:v>
+                  </c:pt>
+                </c:lvl>
+              </c:multiLvlStrCache>
+            </c:multiLvlStrRef>
+          </c:cat>
+          <c:val>
+            <c:numRef>
+              <c:f>Sheet1!$B$2:$B$13</c:f>
+              <c:numCache>
+                <c:formatCode>General</c:formatCode>
+                <c:ptCount val="12"/>
+                <c:pt idx="0">
+                  <c:v>11</c:v>
+                </c:pt>
+                <c:pt idx="1">
+                  <c:v>22</c:v>
+                </c:pt>
+                <c:pt idx="2">
+                  <c:v>33</c:v>
+                </c:pt>
+                <c:pt idx="3">
+                  <c:v>33</c:v>
+                </c:pt>
+                <c:pt idx="4">
+                  <c:v>40</c:v>
+                </c:pt>
+                <c:pt idx="5">
+                  <c:v>40</c:v>
+                </c:pt>
+                <c:pt idx="6">
+                  <c:v>40</c:v>
+                </c:pt>
+                <c:pt idx="7">
+                  <c:v>40</c:v>
+                </c:pt>
+                <c:pt idx="8">
+                  <c:v>40</c:v>
+                </c:pt>
+                <c:pt idx="9">
+                  <c:v>40</c:v>
+                </c:pt>
+                <c:pt idx="10">
+                  <c:v>40</c:v>
+                </c:pt>
+                <c:pt idx="11">
+                  <c:v>40</c:v>
+                </c:pt>
+              </c:numCache>
+            </c:numRef>
+          </c:val>
+          <c:smooth val="0"/>
+        </c:ser>
+        <c:ser>
+          <c:idx val="1"/>
+          <c:order val="1"/>
+          <c:tx>
+            <c:strRef>
+              <c:f>Sheet1!$C$1</c:f>
+              <c:strCache>
+                <c:ptCount val="1"/>
+                <c:pt idx="0">
+                  <c:v>Actual</c:v>
+                </c:pt>
+              </c:strCache>
+            </c:strRef>
+          </c:tx>
+          <c:spPr>
+            <a:solidFill>
+              <a:srgbClr val="22C55E"/>
+            </a:solidFill>
+            <a:ln w="25400" cap="flat">
+              <a:solidFill>
+                <a:srgbClr val="22C55E"/>
+              </a:solidFill>
+              <a:prstDash val="solid"/>
+              <a:round/>
+            </a:ln>
+            <a:effectLst/>
+          </c:spPr>
+          <c:invertIfNegative val="0"/>
+          <c:dLbls>
+            <c:numFmt formatCode="#,##0" sourceLinked="0"/>
+            <c:txPr>
+              <a:bodyPr/>
+              <a:lstStyle/>
+              <a:p>
+                <a:pPr>
+                  <a:defRPr b="0" i="0" strike="noStrike" sz="1200" u="none">
+                    <a:solidFill>
+                      <a:srgbClr val="000000"/>
+                    </a:solidFill>
+                    <a:latin typeface="Arial"/>
+                  </a:defRPr>
+                </a:pPr>
+              </a:p>
+            </c:txPr>
+            <c:showLegendKey val="0"/>
+            <c:showVal val="0"/>
+            <c:showCatName val="0"/>
+            <c:showSerName val="0"/>
+            <c:showPercent val="0"/>
+            <c:showBubbleSize val="0"/>
+            <c:showLeaderLines val="0"/>
+          </c:dLbls>
+          <c:marker>
+            <c:symbol val="circle"/>
+            <c:size val="6"/>
+            <c:spPr>
+              <a:solidFill>
+                <a:srgbClr val="22C55E"/>
+              </a:solidFill>
+              <a:ln w="9525" cap="flat">
+                <a:solidFill>
+                  <a:srgbClr val="22C55E"/>
+                </a:solidFill>
+                <a:prstDash val="solid"/>
+                <a:round/>
+              </a:ln>
+              <a:effectLst/>
+            </c:spPr>
+          </c:marker>
+          <c:cat>
+            <c:multiLvlStrRef>
+              <c:f>Sheet1!$A$2:$A$13</c:f>
+              <c:multiLvlStrCache>
+                <c:ptCount val="12"/>
+                <c:lvl>
+                  <c:pt idx="0">
+                    <c:v>1/25</c:v>
+                  </c:pt>
+                  <c:pt idx="1">
+                    <c:v>2/25</c:v>
+                  </c:pt>
+                  <c:pt idx="2">
+                    <c:v>3/25</c:v>
+                  </c:pt>
+                  <c:pt idx="3">
+                    <c:v>4/25</c:v>
+                  </c:pt>
+                  <c:pt idx="4">
+                    <c:v>5/25</c:v>
+                  </c:pt>
+                  <c:pt idx="5">
+                    <c:v>6/25</c:v>
+                  </c:pt>
+                  <c:pt idx="6">
+                    <c:v>7/25</c:v>
+                  </c:pt>
+                  <c:pt idx="7">
+                    <c:v>8/25</c:v>
+                  </c:pt>
+                  <c:pt idx="8">
+                    <c:v>9/25</c:v>
+                  </c:pt>
+                  <c:pt idx="9">
+                    <c:v>10/25</c:v>
+                  </c:pt>
+                  <c:pt idx="10">
+                    <c:v>11/25</c:v>
+                  </c:pt>
+                  <c:pt idx="11">
+                    <c:v>12/25</c:v>
+                  </c:pt>
+                </c:lvl>
+              </c:multiLvlStrCache>
+            </c:multiLvlStrRef>
+          </c:cat>
+          <c:val>
+            <c:numRef>
+              <c:f>Sheet1!$C$2:$C$13</c:f>
+              <c:numCache>
+                <c:formatCode>General</c:formatCode>
+                <c:ptCount val="12"/>
+                <c:pt idx="0">
+                  <c:v>11</c:v>
+                </c:pt>
+                <c:pt idx="1">
+                  <c:v>22</c:v>
+                </c:pt>
+                <c:pt idx="2">
+                  <c:v>33</c:v>
+                </c:pt>
+                <c:pt idx="3">
+                  <c:v>33</c:v>
+                </c:pt>
+                <c:pt idx="4">
+                  <c:v>44</c:v>
+                </c:pt>
+                <c:pt idx="5">
+                  <c:v>44</c:v>
+                </c:pt>
+                <c:pt idx="6">
+                  <c:v>44</c:v>
+                </c:pt>
+                <c:pt idx="7">
+                  <c:v>44</c:v>
+                </c:pt>
+                <c:pt idx="8">
+                  <c:v>44</c:v>
+                </c:pt>
+                <c:pt idx="9">
+                  <c:v>44</c:v>
+                </c:pt>
+                <c:pt idx="10">
+                  <c:v>44</c:v>
+                </c:pt>
+                <c:pt idx="11">
+                  <c:v>44</c:v>
+                </c:pt>
+              </c:numCache>
+            </c:numRef>
+          </c:val>
+          <c:smooth val="0"/>
+        </c:ser>
+        <c:dLbls>
+          <c:numFmt formatCode="#,##0" sourceLinked="0"/>
+          <c:txPr>
+            <a:bodyPr/>
+            <a:lstStyle/>
+            <a:p>
+              <a:pPr>
+                <a:defRPr b="0" i="0" strike="noStrike" sz="1200" u="none">
+                  <a:solidFill>
+                    <a:srgbClr val="000000"/>
+                  </a:solidFill>
+                  <a:latin typeface="Arial"/>
+                </a:defRPr>
+              </a:pPr>
+            </a:p>
+          </c:txPr>
+          <c:showLegendKey val="0"/>
+          <c:showVal val="0"/>
+          <c:showCatName val="0"/>
+          <c:showSerName val="0"/>
+          <c:showPercent val="0"/>
+          <c:showBubbleSize val="0"/>
+          <c:showLeaderLines val="0"/>
+        </c:dLbls>
+        <c:marker val="1"/>
+        <c:axId val="2094734554"/>
+        <c:axId val="2094734552"/>
+        <c:axId val="2094734556"/>
+      </c:lineChart>
+      <c:catAx>
+        <c:axId val="2094734554"/>
+        <c:scaling>
+          <c:orientation val="minMax"/>
+        </c:scaling>
+        <c:delete val="0"/>
+        <c:axPos val="b"/>
+        <c:numFmt formatCode="General" sourceLinked="1"/>
+        <c:majorTickMark val="out"/>
+        <c:minorTickMark val="none"/>
+        <c:tickLblPos val="low"/>
+        <c:spPr>
+          <a:ln w="12700" cap="flat">
+            <a:solidFill>
+              <a:srgbClr val="888888"/>
+            </a:solidFill>
+            <a:prstDash val="solid"/>
+            <a:round/>
+          </a:ln>
+        </c:spPr>
+        <c:txPr>
+          <a:bodyPr/>
+          <a:lstStyle/>
+          <a:p>
+            <a:pPr>
+              <a:defRPr sz="800" b="0" i="0" u="none" strike="noStrike">
+                <a:solidFill>
+                  <a:srgbClr val="595959"/>
+                </a:solidFill>
+                <a:latin typeface="Arial"/>
+              </a:defRPr>
+            </a:pPr>
+            <a:endParaRPr lang="en-US"/>
+          </a:p>
+        </c:txPr>
+        <c:crossAx val="2094734552"/>
+        <c:crosses val="autoZero"/>
+        <c:auto val="1"/>
+        <c:lblAlgn val="ctr"/>
+        <c:noMultiLvlLbl val="1"/>
+      </c:catAx>
+      <c:valAx>
+        <c:axId val="2094734552"/>
+        <c:scaling>
+          <c:orientation val="minMax"/>
+          <c:max val="100"/>
+          <c:min val="0"/>
+        </c:scaling>
+        <c:delete val="0"/>
+        <c:axPos val="l"/>
+        <c:majorGridlines>
+          <c:spPr>
+            <a:ln w="12700" cap="flat">
+              <a:solidFill>
+                <a:srgbClr val="888888"/>
+              </a:solidFill>
+              <a:prstDash val="solid"/>
+              <a:round/>
+            </a:ln>
+          </c:spPr>
+        </c:majorGridlines>
+        <c:numFmt formatCode="General" sourceLinked="0"/>
+        <c:majorTickMark val="out"/>
+        <c:minorTickMark val="none"/>
+        <c:tickLblPos val="nextTo"/>
+        <c:spPr>
+          <a:ln w="12700" cap="flat">
+            <a:solidFill>
+              <a:srgbClr val="888888"/>
+            </a:solidFill>
+            <a:prstDash val="solid"/>
+            <a:round/>
+          </a:ln>
+        </c:spPr>
+        <c:txPr>
+          <a:bodyPr/>
+          <a:lstStyle/>
+          <a:p>
+            <a:pPr>
+              <a:defRPr sz="800" b="0" i="0" u="none" strike="noStrike">
+                <a:solidFill>
+                  <a:srgbClr val="595959"/>
+                </a:solidFill>
+                <a:latin typeface="Arial"/>
+              </a:defRPr>
+            </a:pPr>
+            <a:endParaRPr lang="en-US"/>
+          </a:p>
+        </c:txPr>
+        <c:crossAx val="2094734554"/>
+        <c:crosses val="autoZero"/>
+        <c:crossBetween val="between"/>
+      </c:valAx>
+      <c:spPr>
+        <a:noFill/>
+        <a:ln>
+          <a:noFill/>
+        </a:ln>
+        <a:effectLst/>
+      </c:spPr>
+    </c:plotArea>
+    <c:legend>
+      <c:legendPos val="b"/>
+      <c:overlay val="0"/>
+    </c:legend>
+    <c:plotVisOnly val="1"/>
+    <c:dispBlanksAs val="span"/>
+  </c:chart>
+  <c:spPr>
+    <a:noFill/>
+    <a:ln>
+      <a:noFill/>
+    </a:ln>
+    <a:effectLst/>
+  </c:spPr>
+  <c:externalData r:id="rId1">
+    <c:autoUpdate val="0"/>
+  </c:externalData>
+</c:chartSpace>
 </file>
 
 <file path=ppt/notesMasters/notesMaster1.xml><?xml version="1.0" encoding="utf-8"?>
@@ -505,7 +989,7 @@
           <a:p>
             <a:r>
               <a:rPr lang="en-US" dirty="0"/>
-              <a:t/>
+              <a:t>Executive title slide</a:t>
             </a:r>
             <a:endParaRPr lang="en-US" dirty="0"/>
           </a:p>
@@ -593,7 +1077,7 @@
           <a:p>
             <a:r>
               <a:rPr lang="en-US" dirty="0"/>
-              <a:t/>
+              <a:t>Consolidated S-curve with actual line chart</a:t>
             </a:r>
             <a:endParaRPr lang="en-US" dirty="0"/>
           </a:p>
@@ -681,7 +1165,7 @@
           <a:p>
             <a:r>
               <a:rPr lang="en-US" dirty="0"/>
-              <a:t/>
+              <a:t>Four facility S-curves in 2x2 grid</a:t>
             </a:r>
             <a:endParaRPr lang="en-US" dirty="0"/>
           </a:p>
@@ -769,7 +1253,7 @@
           <a:p>
             <a:r>
               <a:rPr lang="en-US" dirty="0"/>
-              <a:t/>
+              <a:t>Deliverables compliance matrix</a:t>
             </a:r>
             <a:endParaRPr lang="en-US" dirty="0"/>
           </a:p>
@@ -1145,7 +1629,7 @@
       <p:sp>
         <p:nvSpPr>
           <p:cNvPr id="2" name="Text 0"/>
-          <p:cNvSpPr/>
+          <p:cNvSpPr txBox="1"/>
           <p:nvPr/>
         </p:nvSpPr>
         <p:spPr>
@@ -1156,32 +1640,45 @@
           <a:prstGeom prst="rect">
             <a:avLst/>
           </a:prstGeom>
-          <a:noFill/>
-          <a:ln/>
+          <a:solidFill>
+            <a:srgbClr val="FFFFFF">
+              <a:alpha val="0"/>
+            </a:srgbClr>
+          </a:solidFill>
+          <a:ln>
+            <a:solidFill>
+              <a:srgbClr val="FFFFFF">
+                <a:alpha val="0"/>
+              </a:srgbClr>
+            </a:solidFill>
+          </a:ln>
         </p:spPr>
         <p:txBody>
-          <a:bodyPr wrap="square" rtlCol="0" anchor="ctr"/>
+          <a:bodyPr wrap="square" lIns="44450" tIns="63500" rIns="63500" bIns="44450" rtlCol="0" anchor="t"/>
           <a:lstStyle/>
           <a:p>
-            <a:pPr indent="0" marL="0">
+            <a:pPr algn="l" indent="0" marL="0">
               <a:buNone/>
             </a:pPr>
             <a:r>
-              <a:rPr lang="en-US" sz="3600" b="1" dirty="0">
+              <a:rPr lang="en-US" sz="3200" b="1" dirty="0">
                 <a:solidFill>
-                  <a:srgbClr val="1E3A5F"/>
+                  <a:srgbClr val="081C3D"/>
                 </a:solidFill>
+                <a:latin typeface="Aptos" pitchFamily="34" charset="0"/>
+                <a:ea typeface="Aptos" pitchFamily="34" charset="-122"/>
+                <a:cs typeface="Aptos" pitchFamily="34" charset="-120"/>
               </a:rPr>
               <a:t>New Facilities Onboarding</a:t>
             </a:r>
-            <a:endParaRPr lang="en-US" sz="3600" dirty="0"/>
+            <a:endParaRPr lang="en-US" sz="3200" dirty="0"/>
           </a:p>
         </p:txBody>
       </p:sp>
       <p:sp>
         <p:nvSpPr>
           <p:cNvPr id="3" name="Text 1"/>
-          <p:cNvSpPr/>
+          <p:cNvSpPr txBox="1"/>
           <p:nvPr/>
         </p:nvSpPr>
         <p:spPr>
@@ -1192,32 +1689,45 @@
           <a:prstGeom prst="rect">
             <a:avLst/>
           </a:prstGeom>
-          <a:noFill/>
-          <a:ln/>
+          <a:solidFill>
+            <a:srgbClr val="FFFFFF">
+              <a:alpha val="0"/>
+            </a:srgbClr>
+          </a:solidFill>
+          <a:ln>
+            <a:solidFill>
+              <a:srgbClr val="FFFFFF">
+                <a:alpha val="0"/>
+              </a:srgbClr>
+            </a:solidFill>
+          </a:ln>
         </p:spPr>
         <p:txBody>
-          <a:bodyPr wrap="square" rtlCol="0" anchor="ctr"/>
+          <a:bodyPr wrap="square" lIns="44450" tIns="63500" rIns="63500" bIns="44450" rtlCol="0" anchor="t"/>
           <a:lstStyle/>
           <a:p>
-            <a:pPr indent="0" marL="0">
+            <a:pPr algn="l" indent="0" marL="0">
               <a:buNone/>
             </a:pPr>
             <a:r>
-              <a:rPr lang="en-US" sz="1800" dirty="0">
+              <a:rPr lang="en-US" sz="1400" dirty="0">
                 <a:solidFill>
-                  <a:srgbClr val="4B5563"/>
+                  <a:srgbClr val="595959"/>
                 </a:solidFill>
+                <a:latin typeface="Aptos" pitchFamily="34" charset="0"/>
+                <a:ea typeface="Aptos" pitchFamily="34" charset="-122"/>
+                <a:cs typeface="Aptos" pitchFamily="34" charset="-120"/>
               </a:rPr>
               <a:t>AGLIPAY STP • HTT STP • EASTBAY PH-2 TP • KAYSAKAT TP</a:t>
             </a:r>
-            <a:endParaRPr lang="en-US" sz="1800" dirty="0"/>
+            <a:endParaRPr lang="en-US" sz="1400" dirty="0"/>
           </a:p>
         </p:txBody>
       </p:sp>
       <p:sp>
         <p:nvSpPr>
           <p:cNvPr id="4" name="Text 2"/>
-          <p:cNvSpPr/>
+          <p:cNvSpPr txBox="1"/>
           <p:nvPr/>
         </p:nvSpPr>
         <p:spPr>
@@ -1228,14 +1738,24 @@
           <a:prstGeom prst="rect">
             <a:avLst/>
           </a:prstGeom>
-          <a:noFill/>
-          <a:ln/>
+          <a:solidFill>
+            <a:srgbClr val="FFFFFF">
+              <a:alpha val="0"/>
+            </a:srgbClr>
+          </a:solidFill>
+          <a:ln>
+            <a:solidFill>
+              <a:srgbClr val="FFFFFF">
+                <a:alpha val="0"/>
+              </a:srgbClr>
+            </a:solidFill>
+          </a:ln>
         </p:spPr>
         <p:txBody>
-          <a:bodyPr wrap="square" rtlCol="0" anchor="ctr"/>
+          <a:bodyPr wrap="square" lIns="44450" tIns="63500" rIns="63500" bIns="44450" rtlCol="0" anchor="t"/>
           <a:lstStyle/>
           <a:p>
-            <a:pPr indent="0" marL="0">
+            <a:pPr algn="l" indent="0" marL="0">
               <a:buNone/>
             </a:pPr>
             <a:r>
@@ -1243,6 +1763,9 @@
                 <a:solidFill>
                   <a:srgbClr val="595959"/>
                 </a:solidFill>
+                <a:latin typeface="Aptos" pitchFamily="34" charset="0"/>
+                <a:ea typeface="Aptos" pitchFamily="34" charset="-122"/>
+                <a:cs typeface="Aptos" pitchFamily="34" charset="-120"/>
               </a:rPr>
               <a:t>July 25, 2026</a:t>
             </a:r>
@@ -1253,72 +1776,98 @@
       <p:sp>
         <p:nvSpPr>
           <p:cNvPr id="5" name="Text 3"/>
-          <p:cNvSpPr/>
+          <p:cNvSpPr txBox="1"/>
           <p:nvPr/>
         </p:nvSpPr>
         <p:spPr>
           <a:xfrm>
-            <a:off x="576072" y="6217920"/>
-            <a:ext cx="9144000" cy="365760"/>
+            <a:off x="576072" y="6574536"/>
+            <a:ext cx="9144000" cy="192024"/>
           </a:xfrm>
           <a:prstGeom prst="rect">
             <a:avLst/>
           </a:prstGeom>
-          <a:noFill/>
-          <a:ln/>
+          <a:solidFill>
+            <a:srgbClr val="FFFFFF">
+              <a:alpha val="0"/>
+            </a:srgbClr>
+          </a:solidFill>
+          <a:ln>
+            <a:solidFill>
+              <a:srgbClr val="FFFFFF">
+                <a:alpha val="0"/>
+              </a:srgbClr>
+            </a:solidFill>
+          </a:ln>
         </p:spPr>
         <p:txBody>
-          <a:bodyPr wrap="square" rtlCol="0" anchor="ctr"/>
+          <a:bodyPr wrap="square" lIns="44450" tIns="63500" rIns="63500" bIns="44450" rtlCol="0" anchor="t"/>
           <a:lstStyle/>
           <a:p>
-            <a:pPr indent="0" marL="0">
+            <a:pPr algn="l" indent="0" marL="0">
               <a:buNone/>
             </a:pPr>
             <a:r>
-              <a:rPr lang="en-US" sz="900" dirty="0">
+              <a:rPr lang="en-US" sz="1400" dirty="0">
                 <a:solidFill>
-                  <a:srgbClr val="666666"/>
+                  <a:srgbClr val="595959"/>
                 </a:solidFill>
+                <a:latin typeface="Aptos" pitchFamily="34" charset="0"/>
+                <a:ea typeface="Aptos" pitchFamily="34" charset="-122"/>
+                <a:cs typeface="Aptos" pitchFamily="34" charset="-120"/>
               </a:rPr>
               <a:t>Source: O&amp;M Manual Governance module • July 25, 2026</a:t>
             </a:r>
-            <a:endParaRPr lang="en-US" sz="900" dirty="0"/>
+            <a:endParaRPr lang="en-US" sz="1400" dirty="0"/>
           </a:p>
         </p:txBody>
       </p:sp>
       <p:sp>
         <p:nvSpPr>
           <p:cNvPr id="6" name="Text 4"/>
-          <p:cNvSpPr/>
+          <p:cNvSpPr txBox="1"/>
           <p:nvPr/>
         </p:nvSpPr>
         <p:spPr>
           <a:xfrm>
-            <a:off x="10972800" y="6217920"/>
-            <a:ext cx="731520" cy="365760"/>
+            <a:off x="11430000" y="6574536"/>
+            <a:ext cx="731520" cy="192024"/>
           </a:xfrm>
           <a:prstGeom prst="rect">
             <a:avLst/>
           </a:prstGeom>
-          <a:noFill/>
-          <a:ln/>
+          <a:solidFill>
+            <a:srgbClr val="FFFFFF">
+              <a:alpha val="0"/>
+            </a:srgbClr>
+          </a:solidFill>
+          <a:ln>
+            <a:solidFill>
+              <a:srgbClr val="FFFFFF">
+                <a:alpha val="0"/>
+              </a:srgbClr>
+            </a:solidFill>
+          </a:ln>
         </p:spPr>
         <p:txBody>
-          <a:bodyPr wrap="square" rtlCol="0" anchor="ctr"/>
+          <a:bodyPr wrap="square" lIns="44450" tIns="63500" rIns="63500" bIns="44450" rtlCol="0" anchor="t"/>
           <a:lstStyle/>
           <a:p>
             <a:pPr algn="r" indent="0" marL="0">
               <a:buNone/>
             </a:pPr>
             <a:r>
-              <a:rPr lang="en-US" sz="900" dirty="0">
+              <a:rPr lang="en-US" sz="1400" dirty="0">
                 <a:solidFill>
-                  <a:srgbClr val="666666"/>
+                  <a:srgbClr val="595959"/>
                 </a:solidFill>
+                <a:latin typeface="Aptos" pitchFamily="34" charset="0"/>
+                <a:ea typeface="Aptos" pitchFamily="34" charset="-122"/>
+                <a:cs typeface="Aptos" pitchFamily="34" charset="-120"/>
               </a:rPr>
               <a:t>1 / 4</a:t>
             </a:r>
-            <a:endParaRPr lang="en-US" sz="900" dirty="0"/>
+            <a:endParaRPr lang="en-US" sz="1400" dirty="0"/>
           </a:p>
         </p:txBody>
       </p:sp>
@@ -1363,21 +1912,28 @@
         <p:spPr>
           <a:xfrm>
             <a:off x="0" y="0"/>
-            <a:ext cx="12191695" cy="640080"/>
+            <a:ext cx="12191695" cy="658368"/>
           </a:xfrm>
           <a:prstGeom prst="rect">
             <a:avLst/>
           </a:prstGeom>
           <a:solidFill>
-            <a:srgbClr val="1E3A5F"/>
-          </a:solidFill>
-          <a:ln/>
+            <a:srgbClr val="081C3D"/>
+          </a:solidFill>
+          <a:ln w="12700">
+            <a:solidFill>
+              <a:srgbClr val="FFFFFF">
+                <a:alpha val="0"/>
+              </a:srgbClr>
+            </a:solidFill>
+            <a:prstDash val="solid"/>
+          </a:ln>
         </p:spPr>
       </p:sp>
       <p:sp>
         <p:nvSpPr>
           <p:cNvPr id="3" name="Text 1"/>
-          <p:cNvSpPr/>
+          <p:cNvSpPr txBox="1"/>
           <p:nvPr/>
         </p:nvSpPr>
         <p:spPr>
@@ -1388,50 +1944,89 @@
           <a:prstGeom prst="rect">
             <a:avLst/>
           </a:prstGeom>
-          <a:noFill/>
-          <a:ln/>
+          <a:solidFill>
+            <a:srgbClr val="FFFFFF">
+              <a:alpha val="0"/>
+            </a:srgbClr>
+          </a:solidFill>
+          <a:ln>
+            <a:solidFill>
+              <a:srgbClr val="FFFFFF">
+                <a:alpha val="0"/>
+              </a:srgbClr>
+            </a:solidFill>
+          </a:ln>
         </p:spPr>
         <p:txBody>
-          <a:bodyPr wrap="square" rtlCol="0" anchor="ctr"/>
+          <a:bodyPr wrap="square" lIns="44450" tIns="63500" rIns="63500" bIns="44450" rtlCol="0" anchor="t"/>
           <a:lstStyle/>
           <a:p>
-            <a:pPr indent="0" marL="0">
+            <a:pPr algn="l" indent="0" marL="0">
               <a:buNone/>
             </a:pPr>
             <a:r>
-              <a:rPr lang="en-US" sz="2400" b="1" dirty="0">
+              <a:rPr lang="en-US" sz="2800" b="1" dirty="0">
                 <a:solidFill>
                   <a:srgbClr val="FFFFFF"/>
                 </a:solidFill>
+                <a:latin typeface="Aptos" pitchFamily="34" charset="0"/>
+                <a:ea typeface="Aptos" pitchFamily="34" charset="-122"/>
+                <a:cs typeface="Aptos" pitchFamily="34" charset="-120"/>
               </a:rPr>
               <a:t>Governance Overview</a:t>
             </a:r>
-            <a:endParaRPr lang="en-US" sz="2400" dirty="0"/>
+            <a:endParaRPr lang="en-US" sz="2800" dirty="0"/>
           </a:p>
         </p:txBody>
       </p:sp>
-      <p:sp>
-        <p:nvSpPr>
-          <p:cNvPr id="4" name="Text 2"/>
-          <p:cNvSpPr/>
+      <p:graphicFrame>
+        <p:nvGraphicFramePr>
+          <p:cNvPr id="4" name="Chart 0" descr=""/>
+          <p:cNvGraphicFramePr/>
+          <p:nvPr/>
+        </p:nvGraphicFramePr>
+        <p:xfrm>
+          <a:off x="576072" y="950976"/>
+          <a:ext cx="7725766" cy="3840480"/>
+        </p:xfrm>
+        <a:graphic xmlns:a="http://schemas.openxmlformats.org/drawingml/2006/main">
+          <a:graphicData uri="http://schemas.openxmlformats.org/drawingml/2006/chart">
+            <c:chart xmlns:c="http://schemas.openxmlformats.org/drawingml/2006/chart" r:id="rId1"/>
+          </a:graphicData>
+        </a:graphic>
+      </p:graphicFrame>
+      <p:sp>
+        <p:nvSpPr>
+          <p:cNvPr id="5" name="Text 2"/>
+          <p:cNvSpPr txBox="1"/>
           <p:nvPr/>
         </p:nvSpPr>
         <p:spPr>
           <a:xfrm>
-            <a:off x="576072" y="1097280"/>
-            <a:ext cx="9144000" cy="365760"/>
+            <a:off x="8522574" y="1042416"/>
+            <a:ext cx="3017520" cy="274320"/>
           </a:xfrm>
           <a:prstGeom prst="rect">
             <a:avLst/>
           </a:prstGeom>
-          <a:noFill/>
-          <a:ln/>
+          <a:solidFill>
+            <a:srgbClr val="FFFFFF">
+              <a:alpha val="0"/>
+            </a:srgbClr>
+          </a:solidFill>
+          <a:ln>
+            <a:solidFill>
+              <a:srgbClr val="FFFFFF">
+                <a:alpha val="0"/>
+              </a:srgbClr>
+            </a:solidFill>
+          </a:ln>
         </p:spPr>
         <p:txBody>
-          <a:bodyPr wrap="square" rtlCol="0" anchor="ctr"/>
+          <a:bodyPr wrap="square" lIns="44450" tIns="63500" rIns="63500" bIns="44450" rtlCol="0" anchor="t"/>
           <a:lstStyle/>
           <a:p>
-            <a:pPr indent="0" marL="0">
+            <a:pPr algn="l" indent="0" marL="0">
               <a:buNone/>
             </a:pPr>
             <a:r>
@@ -1439,8 +2034,11 @@
                 <a:solidFill>
                   <a:srgbClr val="0C0C0C"/>
                 </a:solidFill>
+                <a:latin typeface="Aptos" pitchFamily="34" charset="0"/>
+                <a:ea typeface="Aptos" pitchFamily="34" charset="-122"/>
+                <a:cs typeface="Aptos" pitchFamily="34" charset="-120"/>
               </a:rPr>
-              <a:t>Consolidated Planned vs Actual S-Curve</a:t>
+              <a:t>Portfolio Summary</a:t>
             </a:r>
             <a:endParaRPr lang="en-US" sz="1400" dirty="0"/>
           </a:p>
@@ -1448,109 +2046,199 @@
       </p:sp>
       <p:sp>
         <p:nvSpPr>
-          <p:cNvPr id="5" name="Text 3"/>
-          <p:cNvSpPr/>
+          <p:cNvPr id="6" name="Text 3"/>
+          <p:cNvSpPr txBox="1"/>
           <p:nvPr/>
         </p:nvSpPr>
         <p:spPr>
           <a:xfrm>
-            <a:off x="576072" y="1554480"/>
-            <a:ext cx="10972800" cy="274320"/>
+            <a:off x="8522574" y="1408176"/>
+            <a:ext cx="3017520" cy="1371600"/>
           </a:xfrm>
           <a:prstGeom prst="rect">
             <a:avLst/>
           </a:prstGeom>
-          <a:noFill/>
-          <a:ln/>
+          <a:solidFill>
+            <a:srgbClr val="FFFFFF">
+              <a:alpha val="0"/>
+            </a:srgbClr>
+          </a:solidFill>
+          <a:ln>
+            <a:solidFill>
+              <a:srgbClr val="FFFFFF">
+                <a:alpha val="0"/>
+              </a:srgbClr>
+            </a:solidFill>
+          </a:ln>
         </p:spPr>
         <p:txBody>
-          <a:bodyPr wrap="square" rtlCol="0" anchor="ctr"/>
+          <a:bodyPr wrap="square" lIns="44450" tIns="63500" rIns="63500" bIns="44450" rtlCol="0" anchor="t"/>
           <a:lstStyle/>
           <a:p>
-            <a:pPr indent="0" marL="0">
+            <a:pPr algn="l" indent="0" marL="0">
               <a:buNone/>
             </a:pPr>
             <a:r>
-              <a:rPr lang="en-US" sz="1100" dirty="0">
+              <a:rPr lang="en-US" sz="1400" dirty="0">
                 <a:solidFill>
                   <a:srgbClr val="4B5563"/>
                 </a:solidFill>
+                <a:latin typeface="Aptos" pitchFamily="34" charset="0"/>
+                <a:ea typeface="Aptos" pitchFamily="34" charset="-122"/>
+                <a:cs typeface="Aptos" pitchFamily="34" charset="-120"/>
               </a:rPr>
-              <a:t>Current Planned: 40% | Current Actual: 44% | Variance: +4% | Status: On Track</a:t>
+              <a:t>Current Planned: 40%</a:t>
             </a:r>
-            <a:endParaRPr lang="en-US" sz="1100" dirty="0"/>
+            <a:endParaRPr lang="en-US" sz="1400" dirty="0"/>
+          </a:p>
+          <a:p>
+            <a:pPr algn="l" indent="0" marL="0">
+              <a:buNone/>
+            </a:pPr>
+            <a:r>
+              <a:rPr lang="en-US" sz="1400" dirty="0">
+                <a:solidFill>
+                  <a:srgbClr val="4B5563"/>
+                </a:solidFill>
+                <a:latin typeface="Aptos" pitchFamily="34" charset="0"/>
+                <a:ea typeface="Aptos" pitchFamily="34" charset="-122"/>
+                <a:cs typeface="Aptos" pitchFamily="34" charset="-120"/>
+              </a:rPr>
+              <a:t>Current Actual: 44%</a:t>
+            </a:r>
+            <a:endParaRPr lang="en-US" sz="1400" dirty="0"/>
+          </a:p>
+          <a:p>
+            <a:pPr algn="l" indent="0" marL="0">
+              <a:buNone/>
+            </a:pPr>
+            <a:r>
+              <a:rPr lang="en-US" sz="1400" dirty="0">
+                <a:solidFill>
+                  <a:srgbClr val="4B5563"/>
+                </a:solidFill>
+                <a:latin typeface="Aptos" pitchFamily="34" charset="0"/>
+                <a:ea typeface="Aptos" pitchFamily="34" charset="-122"/>
+                <a:cs typeface="Aptos" pitchFamily="34" charset="-120"/>
+              </a:rPr>
+              <a:t>Variance: +4%</a:t>
+            </a:r>
+            <a:endParaRPr lang="en-US" sz="1400" dirty="0"/>
+          </a:p>
+          <a:p>
+            <a:pPr algn="l" indent="0" marL="0">
+              <a:buNone/>
+            </a:pPr>
+            <a:r>
+              <a:rPr lang="en-US" sz="1400" dirty="0">
+                <a:solidFill>
+                  <a:srgbClr val="4B5563"/>
+                </a:solidFill>
+                <a:latin typeface="Aptos" pitchFamily="34" charset="0"/>
+                <a:ea typeface="Aptos" pitchFamily="34" charset="-122"/>
+                <a:cs typeface="Aptos" pitchFamily="34" charset="-120"/>
+              </a:rPr>
+              <a:t>Status: On Track</a:t>
+            </a:r>
+            <a:endParaRPr lang="en-US" sz="1400" dirty="0"/>
           </a:p>
         </p:txBody>
       </p:sp>
       <p:sp>
         <p:nvSpPr>
-          <p:cNvPr id="6" name="Text 4"/>
-          <p:cNvSpPr/>
+          <p:cNvPr id="7" name="Text 4"/>
+          <p:cNvSpPr txBox="1"/>
           <p:nvPr/>
         </p:nvSpPr>
         <p:spPr>
           <a:xfrm>
-            <a:off x="576072" y="6217920"/>
-            <a:ext cx="9144000" cy="365760"/>
+            <a:off x="576072" y="6574536"/>
+            <a:ext cx="9144000" cy="192024"/>
           </a:xfrm>
           <a:prstGeom prst="rect">
             <a:avLst/>
           </a:prstGeom>
-          <a:noFill/>
-          <a:ln/>
+          <a:solidFill>
+            <a:srgbClr val="FFFFFF">
+              <a:alpha val="0"/>
+            </a:srgbClr>
+          </a:solidFill>
+          <a:ln>
+            <a:solidFill>
+              <a:srgbClr val="FFFFFF">
+                <a:alpha val="0"/>
+              </a:srgbClr>
+            </a:solidFill>
+          </a:ln>
         </p:spPr>
         <p:txBody>
-          <a:bodyPr wrap="square" rtlCol="0" anchor="ctr"/>
+          <a:bodyPr wrap="square" lIns="44450" tIns="63500" rIns="63500" bIns="44450" rtlCol="0" anchor="t"/>
           <a:lstStyle/>
           <a:p>
-            <a:pPr indent="0" marL="0">
+            <a:pPr algn="l" indent="0" marL="0">
               <a:buNone/>
             </a:pPr>
             <a:r>
-              <a:rPr lang="en-US" sz="900" dirty="0">
+              <a:rPr lang="en-US" sz="1400" dirty="0">
                 <a:solidFill>
-                  <a:srgbClr val="666666"/>
+                  <a:srgbClr val="595959"/>
                 </a:solidFill>
+                <a:latin typeface="Aptos" pitchFamily="34" charset="0"/>
+                <a:ea typeface="Aptos" pitchFamily="34" charset="-122"/>
+                <a:cs typeface="Aptos" pitchFamily="34" charset="-120"/>
               </a:rPr>
               <a:t>Source: O&amp;M Manual Governance module • July 25, 2026</a:t>
             </a:r>
-            <a:endParaRPr lang="en-US" sz="900" dirty="0"/>
+            <a:endParaRPr lang="en-US" sz="1400" dirty="0"/>
           </a:p>
         </p:txBody>
       </p:sp>
       <p:sp>
         <p:nvSpPr>
-          <p:cNvPr id="7" name="Text 5"/>
-          <p:cNvSpPr/>
+          <p:cNvPr id="8" name="Text 5"/>
+          <p:cNvSpPr txBox="1"/>
           <p:nvPr/>
         </p:nvSpPr>
         <p:spPr>
           <a:xfrm>
-            <a:off x="10972800" y="6217920"/>
-            <a:ext cx="731520" cy="365760"/>
+            <a:off x="11430000" y="6574536"/>
+            <a:ext cx="731520" cy="192024"/>
           </a:xfrm>
           <a:prstGeom prst="rect">
             <a:avLst/>
           </a:prstGeom>
-          <a:noFill/>
-          <a:ln/>
+          <a:solidFill>
+            <a:srgbClr val="FFFFFF">
+              <a:alpha val="0"/>
+            </a:srgbClr>
+          </a:solidFill>
+          <a:ln>
+            <a:solidFill>
+              <a:srgbClr val="FFFFFF">
+                <a:alpha val="0"/>
+              </a:srgbClr>
+            </a:solidFill>
+          </a:ln>
         </p:spPr>
         <p:txBody>
-          <a:bodyPr wrap="square" rtlCol="0" anchor="ctr"/>
+          <a:bodyPr wrap="square" lIns="44450" tIns="63500" rIns="63500" bIns="44450" rtlCol="0" anchor="t"/>
           <a:lstStyle/>
           <a:p>
             <a:pPr algn="r" indent="0" marL="0">
               <a:buNone/>
             </a:pPr>
             <a:r>
-              <a:rPr lang="en-US" sz="900" dirty="0">
+              <a:rPr lang="en-US" sz="1400" dirty="0">
                 <a:solidFill>
-                  <a:srgbClr val="666666"/>
+                  <a:srgbClr val="595959"/>
                 </a:solidFill>
+                <a:latin typeface="Aptos" pitchFamily="34" charset="0"/>
+                <a:ea typeface="Aptos" pitchFamily="34" charset="-122"/>
+                <a:cs typeface="Aptos" pitchFamily="34" charset="-120"/>
               </a:rPr>
               <a:t>2 / 4</a:t>
             </a:r>
-            <a:endParaRPr lang="en-US" sz="900" dirty="0"/>
+            <a:endParaRPr lang="en-US" sz="1400" dirty="0"/>
           </a:p>
         </p:txBody>
       </p:sp>
@@ -1595,21 +2283,28 @@
         <p:spPr>
           <a:xfrm>
             <a:off x="0" y="0"/>
-            <a:ext cx="12191695" cy="640080"/>
+            <a:ext cx="12191695" cy="658368"/>
           </a:xfrm>
           <a:prstGeom prst="rect">
             <a:avLst/>
           </a:prstGeom>
           <a:solidFill>
-            <a:srgbClr val="1E3A5F"/>
-          </a:solidFill>
-          <a:ln/>
+            <a:srgbClr val="081C3D"/>
+          </a:solidFill>
+          <a:ln w="12700">
+            <a:solidFill>
+              <a:srgbClr val="FFFFFF">
+                <a:alpha val="0"/>
+              </a:srgbClr>
+            </a:solidFill>
+            <a:prstDash val="solid"/>
+          </a:ln>
         </p:spPr>
       </p:sp>
       <p:sp>
         <p:nvSpPr>
           <p:cNvPr id="3" name="Text 1"/>
-          <p:cNvSpPr/>
+          <p:cNvSpPr txBox="1"/>
           <p:nvPr/>
         </p:nvSpPr>
         <p:spPr>
@@ -1620,32 +2315,45 @@
           <a:prstGeom prst="rect">
             <a:avLst/>
           </a:prstGeom>
-          <a:noFill/>
-          <a:ln/>
+          <a:solidFill>
+            <a:srgbClr val="FFFFFF">
+              <a:alpha val="0"/>
+            </a:srgbClr>
+          </a:solidFill>
+          <a:ln>
+            <a:solidFill>
+              <a:srgbClr val="FFFFFF">
+                <a:alpha val="0"/>
+              </a:srgbClr>
+            </a:solidFill>
+          </a:ln>
         </p:spPr>
         <p:txBody>
-          <a:bodyPr wrap="square" rtlCol="0" anchor="ctr"/>
+          <a:bodyPr wrap="square" lIns="44450" tIns="63500" rIns="63500" bIns="44450" rtlCol="0" anchor="t"/>
           <a:lstStyle/>
           <a:p>
-            <a:pPr indent="0" marL="0">
+            <a:pPr algn="l" indent="0" marL="0">
               <a:buNone/>
             </a:pPr>
             <a:r>
-              <a:rPr lang="en-US" sz="2400" b="1" dirty="0">
+              <a:rPr lang="en-US" sz="2800" b="1" dirty="0">
                 <a:solidFill>
                   <a:srgbClr val="FFFFFF"/>
                 </a:solidFill>
+                <a:latin typeface="Aptos" pitchFamily="34" charset="0"/>
+                <a:ea typeface="Aptos" pitchFamily="34" charset="-122"/>
+                <a:cs typeface="Aptos" pitchFamily="34" charset="-120"/>
               </a:rPr>
               <a:t>Facility Progress Overview</a:t>
             </a:r>
-            <a:endParaRPr lang="en-US" sz="2400" dirty="0"/>
+            <a:endParaRPr lang="en-US" sz="2800" dirty="0"/>
           </a:p>
         </p:txBody>
       </p:sp>
       <p:sp>
         <p:nvSpPr>
           <p:cNvPr id="4" name="Text 2"/>
-          <p:cNvSpPr/>
+          <p:cNvSpPr txBox="1"/>
           <p:nvPr/>
         </p:nvSpPr>
         <p:spPr>
@@ -1656,493 +2364,1871 @@
           <a:prstGeom prst="rect">
             <a:avLst/>
           </a:prstGeom>
-          <a:noFill/>
-          <a:ln/>
+          <a:solidFill>
+            <a:srgbClr val="FFFFFF">
+              <a:alpha val="0"/>
+            </a:srgbClr>
+          </a:solidFill>
+          <a:ln>
+            <a:solidFill>
+              <a:srgbClr val="FFFFFF">
+                <a:alpha val="0"/>
+              </a:srgbClr>
+            </a:solidFill>
+          </a:ln>
         </p:spPr>
         <p:txBody>
-          <a:bodyPr wrap="square" rtlCol="0" anchor="ctr"/>
+          <a:bodyPr wrap="square" lIns="44450" tIns="63500" rIns="63500" bIns="44450" rtlCol="0" anchor="t"/>
+          <a:lstStyle/>
+          <a:p>
+            <a:pPr algn="l" indent="0" marL="0">
+              <a:buNone/>
+            </a:pPr>
+            <a:r>
+              <a:rPr lang="en-US" sz="1400" b="1" dirty="0">
+                <a:solidFill>
+                  <a:srgbClr val="0C0C0C"/>
+                </a:solidFill>
+                <a:latin typeface="Aptos" pitchFamily="34" charset="0"/>
+                <a:ea typeface="Aptos" pitchFamily="34" charset="-122"/>
+                <a:cs typeface="Aptos" pitchFamily="34" charset="-120"/>
+              </a:rPr>
+              <a:t>AGLIPAY STP</a:t>
+            </a:r>
+            <a:endParaRPr lang="en-US" sz="1400" dirty="0"/>
+          </a:p>
+        </p:txBody>
+      </p:sp>
+      <p:sp>
+        <p:nvSpPr>
+          <p:cNvPr id="5" name="Text 3"/>
+          <p:cNvSpPr txBox="1"/>
+          <p:nvPr/>
+        </p:nvSpPr>
+        <p:spPr>
+          <a:xfrm>
+            <a:off x="576072" y="1508760"/>
+            <a:ext cx="2560320" cy="320040"/>
+          </a:xfrm>
+          <a:prstGeom prst="rect">
+            <a:avLst/>
+          </a:prstGeom>
+          <a:solidFill>
+            <a:srgbClr val="FFFFFF">
+              <a:alpha val="0"/>
+            </a:srgbClr>
+          </a:solidFill>
+          <a:ln>
+            <a:solidFill>
+              <a:srgbClr val="FFFFFF">
+                <a:alpha val="0"/>
+              </a:srgbClr>
+            </a:solidFill>
+          </a:ln>
+        </p:spPr>
+        <p:txBody>
+          <a:bodyPr wrap="square" lIns="44450" tIns="63500" rIns="63500" bIns="44450" rtlCol="0" anchor="t"/>
+          <a:lstStyle/>
+          <a:p>
+            <a:pPr algn="l" indent="0" marL="0">
+              <a:buNone/>
+            </a:pPr>
+            <a:r>
+              <a:rPr lang="en-US" sz="1600" b="1" dirty="0">
+                <a:solidFill>
+                  <a:srgbClr val="0B1D44"/>
+                </a:solidFill>
+                <a:latin typeface="Aptos" pitchFamily="34" charset="0"/>
+                <a:ea typeface="Aptos" pitchFamily="34" charset="-122"/>
+                <a:cs typeface="Aptos" pitchFamily="34" charset="-120"/>
+              </a:rPr>
+              <a:t> </a:t>
+            </a:r>
+            <a:endParaRPr lang="en-US" sz="1600" dirty="0"/>
+          </a:p>
+        </p:txBody>
+      </p:sp>
+      <p:sp>
+        <p:nvSpPr>
+          <p:cNvPr id="6" name="Text 4"/>
+          <p:cNvSpPr txBox="1"/>
+          <p:nvPr/>
+        </p:nvSpPr>
+        <p:spPr>
+          <a:xfrm>
+            <a:off x="576072" y="2011680"/>
+            <a:ext cx="1965960" cy="109728"/>
+          </a:xfrm>
+          <a:prstGeom prst="rect">
+            <a:avLst/>
+          </a:prstGeom>
+          <a:solidFill>
+            <a:srgbClr val="FFFFFF">
+              <a:alpha val="0"/>
+            </a:srgbClr>
+          </a:solidFill>
+          <a:ln>
+            <a:solidFill>
+              <a:srgbClr val="FFFFFF">
+                <a:alpha val="0"/>
+              </a:srgbClr>
+            </a:solidFill>
+          </a:ln>
+        </p:spPr>
+        <p:txBody>
+          <a:bodyPr wrap="square" lIns="44450" tIns="63500" rIns="63500" bIns="44450" rtlCol="0" anchor="t"/>
+          <a:lstStyle/>
+          <a:p>
+            <a:pPr algn="l" indent="0" marL="0">
+              <a:buNone/>
+            </a:pPr>
+            <a:r>
+              <a:rPr lang="en-US" sz="1400" dirty="0">
+                <a:solidFill>
+                  <a:srgbClr val="334155"/>
+                </a:solidFill>
+                <a:latin typeface="Aptos" pitchFamily="34" charset="0"/>
+                <a:ea typeface="Aptos" pitchFamily="34" charset="-122"/>
+                <a:cs typeface="Aptos" pitchFamily="34" charset="-120"/>
+              </a:rPr>
+              <a:t>Planned</a:t>
+            </a:r>
+            <a:endParaRPr lang="en-US" sz="1400" dirty="0"/>
+          </a:p>
+        </p:txBody>
+      </p:sp>
+      <p:sp>
+        <p:nvSpPr>
+          <p:cNvPr id="7" name="Shape 5"/>
+          <p:cNvSpPr/>
+          <p:nvPr/>
+        </p:nvSpPr>
+        <p:spPr>
+          <a:xfrm>
+            <a:off x="2633472" y="2011680"/>
+            <a:ext cx="45720" cy="109728"/>
+          </a:xfrm>
+          <a:prstGeom prst="rect">
+            <a:avLst/>
+          </a:prstGeom>
+          <a:solidFill>
+            <a:srgbClr val="9CA3AF"/>
+          </a:solidFill>
+          <a:ln w="12700">
+            <a:solidFill>
+              <a:srgbClr val="9CA3AF">
+                <a:alpha val="0"/>
+              </a:srgbClr>
+            </a:solidFill>
+            <a:prstDash val="solid"/>
+          </a:ln>
+        </p:spPr>
+      </p:sp>
+      <p:sp>
+        <p:nvSpPr>
+          <p:cNvPr id="8" name="Text 6"/>
+          <p:cNvSpPr txBox="1"/>
+          <p:nvPr/>
+        </p:nvSpPr>
+        <p:spPr>
+          <a:xfrm>
+            <a:off x="2715768" y="2011680"/>
+            <a:ext cx="841248" cy="109728"/>
+          </a:xfrm>
+          <a:prstGeom prst="rect">
+            <a:avLst/>
+          </a:prstGeom>
+          <a:solidFill>
+            <a:srgbClr val="FFFFFF">
+              <a:alpha val="0"/>
+            </a:srgbClr>
+          </a:solidFill>
+          <a:ln>
+            <a:solidFill>
+              <a:srgbClr val="FFFFFF">
+                <a:alpha val="0"/>
+              </a:srgbClr>
+            </a:solidFill>
+          </a:ln>
+        </p:spPr>
+        <p:txBody>
+          <a:bodyPr wrap="square" lIns="0" tIns="0" rIns="0" bIns="0" rtlCol="0" anchor="ctr"/>
           <a:lstStyle/>
           <a:p>
             <a:pPr indent="0" marL="0">
               <a:buNone/>
             </a:pPr>
             <a:r>
-              <a:rPr lang="en-US" sz="1200" b="1" dirty="0">
+              <a:rPr lang="en-US" sz="1400" b="1" dirty="0">
                 <a:solidFill>
-                  <a:srgbClr val="0C0C0C"/>
+                  <a:srgbClr val="1F2937"/>
                 </a:solidFill>
+                <a:latin typeface="Aptos" pitchFamily="34" charset="0"/>
+                <a:ea typeface="Aptos" pitchFamily="34" charset="-122"/>
+                <a:cs typeface="Aptos" pitchFamily="34" charset="-120"/>
               </a:rPr>
-              <a:t>AGLIPAY STP</a:t>
+              <a:t>40.0%</a:t>
             </a:r>
-            <a:endParaRPr lang="en-US" sz="1200" dirty="0"/>
+            <a:endParaRPr lang="en-US" sz="1400" dirty="0"/>
           </a:p>
         </p:txBody>
       </p:sp>
       <p:sp>
         <p:nvSpPr>
-          <p:cNvPr id="5" name="Text 3"/>
-          <p:cNvSpPr/>
+          <p:cNvPr id="9" name="Text 7"/>
+          <p:cNvSpPr txBox="1"/>
           <p:nvPr/>
         </p:nvSpPr>
         <p:spPr>
           <a:xfrm>
-            <a:off x="3657600" y="1188720"/>
-            <a:ext cx="5486400" cy="274320"/>
+            <a:off x="576072" y="2194560"/>
+            <a:ext cx="1965960" cy="109728"/>
           </a:xfrm>
           <a:prstGeom prst="rect">
             <a:avLst/>
           </a:prstGeom>
-          <a:noFill/>
-          <a:ln/>
+          <a:solidFill>
+            <a:srgbClr val="FFFFFF">
+              <a:alpha val="0"/>
+            </a:srgbClr>
+          </a:solidFill>
+          <a:ln>
+            <a:solidFill>
+              <a:srgbClr val="FFFFFF">
+                <a:alpha val="0"/>
+              </a:srgbClr>
+            </a:solidFill>
+          </a:ln>
         </p:spPr>
         <p:txBody>
-          <a:bodyPr wrap="square" rtlCol="0" anchor="ctr"/>
+          <a:bodyPr wrap="square" lIns="44450" tIns="63500" rIns="63500" bIns="44450" rtlCol="0" anchor="t"/>
+          <a:lstStyle/>
+          <a:p>
+            <a:pPr algn="l" indent="0" marL="0">
+              <a:buNone/>
+            </a:pPr>
+            <a:r>
+              <a:rPr lang="en-US" sz="1400" dirty="0">
+                <a:solidFill>
+                  <a:srgbClr val="334155"/>
+                </a:solidFill>
+                <a:latin typeface="Aptos" pitchFamily="34" charset="0"/>
+                <a:ea typeface="Aptos" pitchFamily="34" charset="-122"/>
+                <a:cs typeface="Aptos" pitchFamily="34" charset="-120"/>
+              </a:rPr>
+              <a:t>Actual</a:t>
+            </a:r>
+            <a:endParaRPr lang="en-US" sz="1400" dirty="0"/>
+          </a:p>
+        </p:txBody>
+      </p:sp>
+      <p:sp>
+        <p:nvSpPr>
+          <p:cNvPr id="10" name="Shape 8"/>
+          <p:cNvSpPr/>
+          <p:nvPr/>
+        </p:nvSpPr>
+        <p:spPr>
+          <a:xfrm>
+            <a:off x="2633472" y="2194560"/>
+            <a:ext cx="45720" cy="109728"/>
+          </a:xfrm>
+          <a:prstGeom prst="rect">
+            <a:avLst/>
+          </a:prstGeom>
+          <a:solidFill>
+            <a:srgbClr val="22C55E"/>
+          </a:solidFill>
+          <a:ln w="12700">
+            <a:solidFill>
+              <a:srgbClr val="22C55E">
+                <a:alpha val="0"/>
+              </a:srgbClr>
+            </a:solidFill>
+            <a:prstDash val="solid"/>
+          </a:ln>
+        </p:spPr>
+      </p:sp>
+      <p:sp>
+        <p:nvSpPr>
+          <p:cNvPr id="11" name="Text 9"/>
+          <p:cNvSpPr txBox="1"/>
+          <p:nvPr/>
+        </p:nvSpPr>
+        <p:spPr>
+          <a:xfrm>
+            <a:off x="2715768" y="2194560"/>
+            <a:ext cx="841248" cy="109728"/>
+          </a:xfrm>
+          <a:prstGeom prst="rect">
+            <a:avLst/>
+          </a:prstGeom>
+          <a:solidFill>
+            <a:srgbClr val="FFFFFF">
+              <a:alpha val="0"/>
+            </a:srgbClr>
+          </a:solidFill>
+          <a:ln>
+            <a:solidFill>
+              <a:srgbClr val="FFFFFF">
+                <a:alpha val="0"/>
+              </a:srgbClr>
+            </a:solidFill>
+          </a:ln>
+        </p:spPr>
+        <p:txBody>
+          <a:bodyPr wrap="square" lIns="0" tIns="0" rIns="0" bIns="0" rtlCol="0" anchor="ctr"/>
           <a:lstStyle/>
           <a:p>
             <a:pPr indent="0" marL="0">
               <a:buNone/>
             </a:pPr>
             <a:r>
-              <a:rPr lang="en-US" sz="1000" dirty="0">
+              <a:rPr lang="en-US" sz="1400" b="1" dirty="0">
                 <a:solidFill>
-                  <a:srgbClr val="4B5563"/>
+                  <a:srgbClr val="1F2937"/>
                 </a:solidFill>
+                <a:latin typeface="Aptos" pitchFamily="34" charset="0"/>
+                <a:ea typeface="Aptos" pitchFamily="34" charset="-122"/>
+                <a:cs typeface="Aptos" pitchFamily="34" charset="-120"/>
               </a:rPr>
-              <a:t>Planned: 40% | Actual: 44% | Variance: +4%</a:t>
+              <a:t>44.0%</a:t>
             </a:r>
-            <a:endParaRPr lang="en-US" sz="1000" dirty="0"/>
+            <a:endParaRPr lang="en-US" sz="1400" dirty="0"/>
           </a:p>
         </p:txBody>
       </p:sp>
       <p:sp>
         <p:nvSpPr>
-          <p:cNvPr id="6" name="Text 4"/>
-          <p:cNvSpPr/>
+          <p:cNvPr id="12" name="Text 10"/>
+          <p:cNvSpPr txBox="1"/>
           <p:nvPr/>
         </p:nvSpPr>
         <p:spPr>
           <a:xfrm>
-            <a:off x="9601200" y="1188720"/>
-            <a:ext cx="1828800" cy="274320"/>
+            <a:off x="576072" y="2331720"/>
+            <a:ext cx="2560320" cy="182880"/>
           </a:xfrm>
           <a:prstGeom prst="rect">
             <a:avLst/>
           </a:prstGeom>
-          <a:noFill/>
-          <a:ln/>
+          <a:solidFill>
+            <a:srgbClr val="FFFFFF">
+              <a:alpha val="0"/>
+            </a:srgbClr>
+          </a:solidFill>
+          <a:ln>
+            <a:solidFill>
+              <a:srgbClr val="FFFFFF">
+                <a:alpha val="0"/>
+              </a:srgbClr>
+            </a:solidFill>
+          </a:ln>
         </p:spPr>
         <p:txBody>
-          <a:bodyPr wrap="square" rtlCol="0" anchor="ctr"/>
+          <a:bodyPr wrap="square" lIns="44450" tIns="63500" rIns="63500" bIns="44450" rtlCol="0" anchor="t"/>
+          <a:lstStyle/>
+          <a:p>
+            <a:pPr algn="l" indent="0" marL="0">
+              <a:buNone/>
+            </a:pPr>
+            <a:r>
+              <a:rPr lang="en-US" sz="1400" dirty="0">
+                <a:solidFill>
+                  <a:srgbClr val="4B5563"/>
+                </a:solidFill>
+                <a:latin typeface="Aptos" pitchFamily="34" charset="0"/>
+                <a:ea typeface="Aptos" pitchFamily="34" charset="-122"/>
+                <a:cs typeface="Aptos" pitchFamily="34" charset="-120"/>
+              </a:rPr>
+              <a:t>40% planned | 44% actual</a:t>
+            </a:r>
+            <a:endParaRPr lang="en-US" sz="1400" dirty="0"/>
+          </a:p>
+        </p:txBody>
+      </p:sp>
+      <p:sp>
+        <p:nvSpPr>
+          <p:cNvPr id="13" name="Text 11"/>
+          <p:cNvSpPr txBox="1"/>
+          <p:nvPr/>
+        </p:nvSpPr>
+        <p:spPr>
+          <a:xfrm>
+            <a:off x="2404872" y="2331720"/>
+            <a:ext cx="1371600" cy="182880"/>
+          </a:xfrm>
+          <a:prstGeom prst="rect">
+            <a:avLst/>
+          </a:prstGeom>
+          <a:solidFill>
+            <a:srgbClr val="FFFFFF">
+              <a:alpha val="0"/>
+            </a:srgbClr>
+          </a:solidFill>
+          <a:ln>
+            <a:solidFill>
+              <a:srgbClr val="FFFFFF">
+                <a:alpha val="0"/>
+              </a:srgbClr>
+            </a:solidFill>
+          </a:ln>
+        </p:spPr>
+        <p:txBody>
+          <a:bodyPr wrap="square" lIns="44450" tIns="63500" rIns="63500" bIns="44450" rtlCol="0" anchor="t"/>
+          <a:lstStyle/>
+          <a:p>
+            <a:pPr algn="l" indent="0" marL="0">
+              <a:buNone/>
+            </a:pPr>
+            <a:r>
+              <a:rPr lang="en-US" sz="1400" b="1" dirty="0">
+                <a:solidFill>
+                  <a:srgbClr val="22C55E"/>
+                </a:solidFill>
+                <a:latin typeface="Aptos" pitchFamily="34" charset="0"/>
+                <a:ea typeface="Aptos" pitchFamily="34" charset="-122"/>
+                <a:cs typeface="Aptos" pitchFamily="34" charset="-120"/>
+              </a:rPr>
+              <a:t>On Track (+4%)</a:t>
+            </a:r>
+            <a:endParaRPr lang="en-US" sz="1400" dirty="0"/>
+          </a:p>
+        </p:txBody>
+      </p:sp>
+      <p:sp>
+        <p:nvSpPr>
+          <p:cNvPr id="14" name="Text 12"/>
+          <p:cNvSpPr txBox="1"/>
+          <p:nvPr/>
+        </p:nvSpPr>
+        <p:spPr>
+          <a:xfrm>
+            <a:off x="6309360" y="1188720"/>
+            <a:ext cx="2743200" cy="274320"/>
+          </a:xfrm>
+          <a:prstGeom prst="rect">
+            <a:avLst/>
+          </a:prstGeom>
+          <a:solidFill>
+            <a:srgbClr val="FFFFFF">
+              <a:alpha val="0"/>
+            </a:srgbClr>
+          </a:solidFill>
+          <a:ln>
+            <a:solidFill>
+              <a:srgbClr val="FFFFFF">
+                <a:alpha val="0"/>
+              </a:srgbClr>
+            </a:solidFill>
+          </a:ln>
+        </p:spPr>
+        <p:txBody>
+          <a:bodyPr wrap="square" lIns="44450" tIns="63500" rIns="63500" bIns="44450" rtlCol="0" anchor="t"/>
+          <a:lstStyle/>
+          <a:p>
+            <a:pPr algn="l" indent="0" marL="0">
+              <a:buNone/>
+            </a:pPr>
+            <a:r>
+              <a:rPr lang="en-US" sz="1400" b="1" dirty="0">
+                <a:solidFill>
+                  <a:srgbClr val="0C0C0C"/>
+                </a:solidFill>
+                <a:latin typeface="Aptos" pitchFamily="34" charset="0"/>
+                <a:ea typeface="Aptos" pitchFamily="34" charset="-122"/>
+                <a:cs typeface="Aptos" pitchFamily="34" charset="-120"/>
+              </a:rPr>
+              <a:t>HTT STP</a:t>
+            </a:r>
+            <a:endParaRPr lang="en-US" sz="1400" dirty="0"/>
+          </a:p>
+        </p:txBody>
+      </p:sp>
+      <p:sp>
+        <p:nvSpPr>
+          <p:cNvPr id="15" name="Text 13"/>
+          <p:cNvSpPr txBox="1"/>
+          <p:nvPr/>
+        </p:nvSpPr>
+        <p:spPr>
+          <a:xfrm>
+            <a:off x="6309360" y="1508760"/>
+            <a:ext cx="2560320" cy="320040"/>
+          </a:xfrm>
+          <a:prstGeom prst="rect">
+            <a:avLst/>
+          </a:prstGeom>
+          <a:solidFill>
+            <a:srgbClr val="FFFFFF">
+              <a:alpha val="0"/>
+            </a:srgbClr>
+          </a:solidFill>
+          <a:ln>
+            <a:solidFill>
+              <a:srgbClr val="FFFFFF">
+                <a:alpha val="0"/>
+              </a:srgbClr>
+            </a:solidFill>
+          </a:ln>
+        </p:spPr>
+        <p:txBody>
+          <a:bodyPr wrap="square" lIns="44450" tIns="63500" rIns="63500" bIns="44450" rtlCol="0" anchor="t"/>
+          <a:lstStyle/>
+          <a:p>
+            <a:pPr algn="l" indent="0" marL="0">
+              <a:buNone/>
+            </a:pPr>
+            <a:r>
+              <a:rPr lang="en-US" sz="1600" b="1" dirty="0">
+                <a:solidFill>
+                  <a:srgbClr val="0B1D44"/>
+                </a:solidFill>
+                <a:latin typeface="Aptos" pitchFamily="34" charset="0"/>
+                <a:ea typeface="Aptos" pitchFamily="34" charset="-122"/>
+                <a:cs typeface="Aptos" pitchFamily="34" charset="-120"/>
+              </a:rPr>
+              <a:t> </a:t>
+            </a:r>
+            <a:endParaRPr lang="en-US" sz="1600" dirty="0"/>
+          </a:p>
+        </p:txBody>
+      </p:sp>
+      <p:sp>
+        <p:nvSpPr>
+          <p:cNvPr id="16" name="Text 14"/>
+          <p:cNvSpPr txBox="1"/>
+          <p:nvPr/>
+        </p:nvSpPr>
+        <p:spPr>
+          <a:xfrm>
+            <a:off x="6309360" y="2011680"/>
+            <a:ext cx="1965960" cy="109728"/>
+          </a:xfrm>
+          <a:prstGeom prst="rect">
+            <a:avLst/>
+          </a:prstGeom>
+          <a:solidFill>
+            <a:srgbClr val="FFFFFF">
+              <a:alpha val="0"/>
+            </a:srgbClr>
+          </a:solidFill>
+          <a:ln>
+            <a:solidFill>
+              <a:srgbClr val="FFFFFF">
+                <a:alpha val="0"/>
+              </a:srgbClr>
+            </a:solidFill>
+          </a:ln>
+        </p:spPr>
+        <p:txBody>
+          <a:bodyPr wrap="square" lIns="44450" tIns="63500" rIns="63500" bIns="44450" rtlCol="0" anchor="t"/>
+          <a:lstStyle/>
+          <a:p>
+            <a:pPr algn="l" indent="0" marL="0">
+              <a:buNone/>
+            </a:pPr>
+            <a:r>
+              <a:rPr lang="en-US" sz="1400" dirty="0">
+                <a:solidFill>
+                  <a:srgbClr val="334155"/>
+                </a:solidFill>
+                <a:latin typeface="Aptos" pitchFamily="34" charset="0"/>
+                <a:ea typeface="Aptos" pitchFamily="34" charset="-122"/>
+                <a:cs typeface="Aptos" pitchFamily="34" charset="-120"/>
+              </a:rPr>
+              <a:t>Planned</a:t>
+            </a:r>
+            <a:endParaRPr lang="en-US" sz="1400" dirty="0"/>
+          </a:p>
+        </p:txBody>
+      </p:sp>
+      <p:sp>
+        <p:nvSpPr>
+          <p:cNvPr id="17" name="Shape 15"/>
+          <p:cNvSpPr/>
+          <p:nvPr/>
+        </p:nvSpPr>
+        <p:spPr>
+          <a:xfrm>
+            <a:off x="8366760" y="2011680"/>
+            <a:ext cx="45720" cy="109728"/>
+          </a:xfrm>
+          <a:prstGeom prst="rect">
+            <a:avLst/>
+          </a:prstGeom>
+          <a:solidFill>
+            <a:srgbClr val="9CA3AF"/>
+          </a:solidFill>
+          <a:ln w="12700">
+            <a:solidFill>
+              <a:srgbClr val="9CA3AF">
+                <a:alpha val="0"/>
+              </a:srgbClr>
+            </a:solidFill>
+            <a:prstDash val="solid"/>
+          </a:ln>
+        </p:spPr>
+      </p:sp>
+      <p:sp>
+        <p:nvSpPr>
+          <p:cNvPr id="18" name="Text 16"/>
+          <p:cNvSpPr txBox="1"/>
+          <p:nvPr/>
+        </p:nvSpPr>
+        <p:spPr>
+          <a:xfrm>
+            <a:off x="8449056" y="2011680"/>
+            <a:ext cx="841248" cy="109728"/>
+          </a:xfrm>
+          <a:prstGeom prst="rect">
+            <a:avLst/>
+          </a:prstGeom>
+          <a:solidFill>
+            <a:srgbClr val="FFFFFF">
+              <a:alpha val="0"/>
+            </a:srgbClr>
+          </a:solidFill>
+          <a:ln>
+            <a:solidFill>
+              <a:srgbClr val="FFFFFF">
+                <a:alpha val="0"/>
+              </a:srgbClr>
+            </a:solidFill>
+          </a:ln>
+        </p:spPr>
+        <p:txBody>
+          <a:bodyPr wrap="square" lIns="0" tIns="0" rIns="0" bIns="0" rtlCol="0" anchor="ctr"/>
           <a:lstStyle/>
           <a:p>
             <a:pPr indent="0" marL="0">
               <a:buNone/>
             </a:pPr>
             <a:r>
-              <a:rPr lang="en-US" sz="1000" b="1" dirty="0">
+              <a:rPr lang="en-US" sz="1400" b="1" dirty="0">
                 <a:solidFill>
-                  <a:srgbClr val="22C55E"/>
+                  <a:srgbClr val="1F2937"/>
                 </a:solidFill>
+                <a:latin typeface="Aptos" pitchFamily="34" charset="0"/>
+                <a:ea typeface="Aptos" pitchFamily="34" charset="-122"/>
+                <a:cs typeface="Aptos" pitchFamily="34" charset="-120"/>
               </a:rPr>
-              <a:t>On Track</a:t>
+              <a:t>44.0%</a:t>
             </a:r>
-            <a:endParaRPr lang="en-US" sz="1000" dirty="0"/>
+            <a:endParaRPr lang="en-US" sz="1400" dirty="0"/>
           </a:p>
         </p:txBody>
       </p:sp>
       <p:sp>
         <p:nvSpPr>
-          <p:cNvPr id="7" name="Text 5"/>
-          <p:cNvSpPr/>
+          <p:cNvPr id="19" name="Text 17"/>
+          <p:cNvSpPr txBox="1"/>
           <p:nvPr/>
         </p:nvSpPr>
         <p:spPr>
           <a:xfrm>
-            <a:off x="576072" y="1737360"/>
-            <a:ext cx="2743200" cy="274320"/>
+            <a:off x="6309360" y="2194560"/>
+            <a:ext cx="1965960" cy="109728"/>
           </a:xfrm>
           <a:prstGeom prst="rect">
             <a:avLst/>
           </a:prstGeom>
-          <a:noFill/>
-          <a:ln/>
+          <a:solidFill>
+            <a:srgbClr val="FFFFFF">
+              <a:alpha val="0"/>
+            </a:srgbClr>
+          </a:solidFill>
+          <a:ln>
+            <a:solidFill>
+              <a:srgbClr val="FFFFFF">
+                <a:alpha val="0"/>
+              </a:srgbClr>
+            </a:solidFill>
+          </a:ln>
         </p:spPr>
         <p:txBody>
-          <a:bodyPr wrap="square" rtlCol="0" anchor="ctr"/>
+          <a:bodyPr wrap="square" lIns="44450" tIns="63500" rIns="63500" bIns="44450" rtlCol="0" anchor="t"/>
+          <a:lstStyle/>
+          <a:p>
+            <a:pPr algn="l" indent="0" marL="0">
+              <a:buNone/>
+            </a:pPr>
+            <a:r>
+              <a:rPr lang="en-US" sz="1400" dirty="0">
+                <a:solidFill>
+                  <a:srgbClr val="334155"/>
+                </a:solidFill>
+                <a:latin typeface="Aptos" pitchFamily="34" charset="0"/>
+                <a:ea typeface="Aptos" pitchFamily="34" charset="-122"/>
+                <a:cs typeface="Aptos" pitchFamily="34" charset="-120"/>
+              </a:rPr>
+              <a:t>Actual</a:t>
+            </a:r>
+            <a:endParaRPr lang="en-US" sz="1400" dirty="0"/>
+          </a:p>
+        </p:txBody>
+      </p:sp>
+      <p:sp>
+        <p:nvSpPr>
+          <p:cNvPr id="20" name="Shape 18"/>
+          <p:cNvSpPr/>
+          <p:nvPr/>
+        </p:nvSpPr>
+        <p:spPr>
+          <a:xfrm>
+            <a:off x="8366760" y="2194560"/>
+            <a:ext cx="45720" cy="109728"/>
+          </a:xfrm>
+          <a:prstGeom prst="rect">
+            <a:avLst/>
+          </a:prstGeom>
+          <a:solidFill>
+            <a:srgbClr val="22C55E"/>
+          </a:solidFill>
+          <a:ln w="12700">
+            <a:solidFill>
+              <a:srgbClr val="22C55E">
+                <a:alpha val="0"/>
+              </a:srgbClr>
+            </a:solidFill>
+            <a:prstDash val="solid"/>
+          </a:ln>
+        </p:spPr>
+      </p:sp>
+      <p:sp>
+        <p:nvSpPr>
+          <p:cNvPr id="21" name="Text 19"/>
+          <p:cNvSpPr txBox="1"/>
+          <p:nvPr/>
+        </p:nvSpPr>
+        <p:spPr>
+          <a:xfrm>
+            <a:off x="8449056" y="2194560"/>
+            <a:ext cx="841248" cy="109728"/>
+          </a:xfrm>
+          <a:prstGeom prst="rect">
+            <a:avLst/>
+          </a:prstGeom>
+          <a:solidFill>
+            <a:srgbClr val="FFFFFF">
+              <a:alpha val="0"/>
+            </a:srgbClr>
+          </a:solidFill>
+          <a:ln>
+            <a:solidFill>
+              <a:srgbClr val="FFFFFF">
+                <a:alpha val="0"/>
+              </a:srgbClr>
+            </a:solidFill>
+          </a:ln>
+        </p:spPr>
+        <p:txBody>
+          <a:bodyPr wrap="square" lIns="0" tIns="0" rIns="0" bIns="0" rtlCol="0" anchor="ctr"/>
           <a:lstStyle/>
           <a:p>
             <a:pPr indent="0" marL="0">
               <a:buNone/>
             </a:pPr>
             <a:r>
-              <a:rPr lang="en-US" sz="1200" b="1" dirty="0">
+              <a:rPr lang="en-US" sz="1400" b="1" dirty="0">
                 <a:solidFill>
-                  <a:srgbClr val="0C0C0C"/>
+                  <a:srgbClr val="1F2937"/>
                 </a:solidFill>
+                <a:latin typeface="Aptos" pitchFamily="34" charset="0"/>
+                <a:ea typeface="Aptos" pitchFamily="34" charset="-122"/>
+                <a:cs typeface="Aptos" pitchFamily="34" charset="-120"/>
               </a:rPr>
-              <a:t>HTT STP</a:t>
+              <a:t>44.0%</a:t>
             </a:r>
-            <a:endParaRPr lang="en-US" sz="1200" dirty="0"/>
+            <a:endParaRPr lang="en-US" sz="1400" dirty="0"/>
           </a:p>
         </p:txBody>
       </p:sp>
       <p:sp>
         <p:nvSpPr>
-          <p:cNvPr id="8" name="Text 6"/>
-          <p:cNvSpPr/>
+          <p:cNvPr id="22" name="Text 20"/>
+          <p:cNvSpPr txBox="1"/>
           <p:nvPr/>
         </p:nvSpPr>
         <p:spPr>
           <a:xfrm>
-            <a:off x="3657600" y="1737360"/>
-            <a:ext cx="5486400" cy="274320"/>
+            <a:off x="6309360" y="2331720"/>
+            <a:ext cx="2560320" cy="182880"/>
           </a:xfrm>
           <a:prstGeom prst="rect">
             <a:avLst/>
           </a:prstGeom>
-          <a:noFill/>
-          <a:ln/>
+          <a:solidFill>
+            <a:srgbClr val="FFFFFF">
+              <a:alpha val="0"/>
+            </a:srgbClr>
+          </a:solidFill>
+          <a:ln>
+            <a:solidFill>
+              <a:srgbClr val="FFFFFF">
+                <a:alpha val="0"/>
+              </a:srgbClr>
+            </a:solidFill>
+          </a:ln>
         </p:spPr>
         <p:txBody>
-          <a:bodyPr wrap="square" rtlCol="0" anchor="ctr"/>
+          <a:bodyPr wrap="square" lIns="44450" tIns="63500" rIns="63500" bIns="44450" rtlCol="0" anchor="t"/>
+          <a:lstStyle/>
+          <a:p>
+            <a:pPr algn="l" indent="0" marL="0">
+              <a:buNone/>
+            </a:pPr>
+            <a:r>
+              <a:rPr lang="en-US" sz="1400" dirty="0">
+                <a:solidFill>
+                  <a:srgbClr val="4B5563"/>
+                </a:solidFill>
+                <a:latin typeface="Aptos" pitchFamily="34" charset="0"/>
+                <a:ea typeface="Aptos" pitchFamily="34" charset="-122"/>
+                <a:cs typeface="Aptos" pitchFamily="34" charset="-120"/>
+              </a:rPr>
+              <a:t>44% planned | 44% actual</a:t>
+            </a:r>
+            <a:endParaRPr lang="en-US" sz="1400" dirty="0"/>
+          </a:p>
+        </p:txBody>
+      </p:sp>
+      <p:sp>
+        <p:nvSpPr>
+          <p:cNvPr id="23" name="Text 21"/>
+          <p:cNvSpPr txBox="1"/>
+          <p:nvPr/>
+        </p:nvSpPr>
+        <p:spPr>
+          <a:xfrm>
+            <a:off x="8138160" y="2331720"/>
+            <a:ext cx="1371600" cy="182880"/>
+          </a:xfrm>
+          <a:prstGeom prst="rect">
+            <a:avLst/>
+          </a:prstGeom>
+          <a:solidFill>
+            <a:srgbClr val="FFFFFF">
+              <a:alpha val="0"/>
+            </a:srgbClr>
+          </a:solidFill>
+          <a:ln>
+            <a:solidFill>
+              <a:srgbClr val="FFFFFF">
+                <a:alpha val="0"/>
+              </a:srgbClr>
+            </a:solidFill>
+          </a:ln>
+        </p:spPr>
+        <p:txBody>
+          <a:bodyPr wrap="square" lIns="44450" tIns="63500" rIns="63500" bIns="44450" rtlCol="0" anchor="t"/>
+          <a:lstStyle/>
+          <a:p>
+            <a:pPr algn="l" indent="0" marL="0">
+              <a:buNone/>
+            </a:pPr>
+            <a:r>
+              <a:rPr lang="en-US" sz="1400" b="1" dirty="0">
+                <a:solidFill>
+                  <a:srgbClr val="22C55E"/>
+                </a:solidFill>
+                <a:latin typeface="Aptos" pitchFamily="34" charset="0"/>
+                <a:ea typeface="Aptos" pitchFamily="34" charset="-122"/>
+                <a:cs typeface="Aptos" pitchFamily="34" charset="-120"/>
+              </a:rPr>
+              <a:t>On Track (0%)</a:t>
+            </a:r>
+            <a:endParaRPr lang="en-US" sz="1400" dirty="0"/>
+          </a:p>
+        </p:txBody>
+      </p:sp>
+      <p:sp>
+        <p:nvSpPr>
+          <p:cNvPr id="24" name="Text 22"/>
+          <p:cNvSpPr txBox="1"/>
+          <p:nvPr/>
+        </p:nvSpPr>
+        <p:spPr>
+          <a:xfrm>
+            <a:off x="576072" y="3657600"/>
+            <a:ext cx="2743200" cy="274320"/>
+          </a:xfrm>
+          <a:prstGeom prst="rect">
+            <a:avLst/>
+          </a:prstGeom>
+          <a:solidFill>
+            <a:srgbClr val="FFFFFF">
+              <a:alpha val="0"/>
+            </a:srgbClr>
+          </a:solidFill>
+          <a:ln>
+            <a:solidFill>
+              <a:srgbClr val="FFFFFF">
+                <a:alpha val="0"/>
+              </a:srgbClr>
+            </a:solidFill>
+          </a:ln>
+        </p:spPr>
+        <p:txBody>
+          <a:bodyPr wrap="square" lIns="44450" tIns="63500" rIns="63500" bIns="44450" rtlCol="0" anchor="t"/>
+          <a:lstStyle/>
+          <a:p>
+            <a:pPr algn="l" indent="0" marL="0">
+              <a:buNone/>
+            </a:pPr>
+            <a:r>
+              <a:rPr lang="en-US" sz="1400" b="1" dirty="0">
+                <a:solidFill>
+                  <a:srgbClr val="0C0C0C"/>
+                </a:solidFill>
+                <a:latin typeface="Aptos" pitchFamily="34" charset="0"/>
+                <a:ea typeface="Aptos" pitchFamily="34" charset="-122"/>
+                <a:cs typeface="Aptos" pitchFamily="34" charset="-120"/>
+              </a:rPr>
+              <a:t>EASTBAY PH-2 TP</a:t>
+            </a:r>
+            <a:endParaRPr lang="en-US" sz="1400" dirty="0"/>
+          </a:p>
+        </p:txBody>
+      </p:sp>
+      <p:sp>
+        <p:nvSpPr>
+          <p:cNvPr id="25" name="Text 23"/>
+          <p:cNvSpPr txBox="1"/>
+          <p:nvPr/>
+        </p:nvSpPr>
+        <p:spPr>
+          <a:xfrm>
+            <a:off x="576072" y="3977640"/>
+            <a:ext cx="2560320" cy="320040"/>
+          </a:xfrm>
+          <a:prstGeom prst="rect">
+            <a:avLst/>
+          </a:prstGeom>
+          <a:solidFill>
+            <a:srgbClr val="FFFFFF">
+              <a:alpha val="0"/>
+            </a:srgbClr>
+          </a:solidFill>
+          <a:ln>
+            <a:solidFill>
+              <a:srgbClr val="FFFFFF">
+                <a:alpha val="0"/>
+              </a:srgbClr>
+            </a:solidFill>
+          </a:ln>
+        </p:spPr>
+        <p:txBody>
+          <a:bodyPr wrap="square" lIns="44450" tIns="63500" rIns="63500" bIns="44450" rtlCol="0" anchor="t"/>
+          <a:lstStyle/>
+          <a:p>
+            <a:pPr algn="l" indent="0" marL="0">
+              <a:buNone/>
+            </a:pPr>
+            <a:r>
+              <a:rPr lang="en-US" sz="1600" b="1" dirty="0">
+                <a:solidFill>
+                  <a:srgbClr val="0B1D44"/>
+                </a:solidFill>
+                <a:latin typeface="Aptos" pitchFamily="34" charset="0"/>
+                <a:ea typeface="Aptos" pitchFamily="34" charset="-122"/>
+                <a:cs typeface="Aptos" pitchFamily="34" charset="-120"/>
+              </a:rPr>
+              <a:t> </a:t>
+            </a:r>
+            <a:endParaRPr lang="en-US" sz="1600" dirty="0"/>
+          </a:p>
+        </p:txBody>
+      </p:sp>
+      <p:sp>
+        <p:nvSpPr>
+          <p:cNvPr id="26" name="Text 24"/>
+          <p:cNvSpPr txBox="1"/>
+          <p:nvPr/>
+        </p:nvSpPr>
+        <p:spPr>
+          <a:xfrm>
+            <a:off x="576072" y="4480560"/>
+            <a:ext cx="1965960" cy="109728"/>
+          </a:xfrm>
+          <a:prstGeom prst="rect">
+            <a:avLst/>
+          </a:prstGeom>
+          <a:solidFill>
+            <a:srgbClr val="FFFFFF">
+              <a:alpha val="0"/>
+            </a:srgbClr>
+          </a:solidFill>
+          <a:ln>
+            <a:solidFill>
+              <a:srgbClr val="FFFFFF">
+                <a:alpha val="0"/>
+              </a:srgbClr>
+            </a:solidFill>
+          </a:ln>
+        </p:spPr>
+        <p:txBody>
+          <a:bodyPr wrap="square" lIns="44450" tIns="63500" rIns="63500" bIns="44450" rtlCol="0" anchor="t"/>
+          <a:lstStyle/>
+          <a:p>
+            <a:pPr algn="l" indent="0" marL="0">
+              <a:buNone/>
+            </a:pPr>
+            <a:r>
+              <a:rPr lang="en-US" sz="1400" dirty="0">
+                <a:solidFill>
+                  <a:srgbClr val="334155"/>
+                </a:solidFill>
+                <a:latin typeface="Aptos" pitchFamily="34" charset="0"/>
+                <a:ea typeface="Aptos" pitchFamily="34" charset="-122"/>
+                <a:cs typeface="Aptos" pitchFamily="34" charset="-120"/>
+              </a:rPr>
+              <a:t>Planned</a:t>
+            </a:r>
+            <a:endParaRPr lang="en-US" sz="1400" dirty="0"/>
+          </a:p>
+        </p:txBody>
+      </p:sp>
+      <p:sp>
+        <p:nvSpPr>
+          <p:cNvPr id="27" name="Shape 25"/>
+          <p:cNvSpPr/>
+          <p:nvPr/>
+        </p:nvSpPr>
+        <p:spPr>
+          <a:xfrm>
+            <a:off x="2633472" y="4480560"/>
+            <a:ext cx="45720" cy="109728"/>
+          </a:xfrm>
+          <a:prstGeom prst="rect">
+            <a:avLst/>
+          </a:prstGeom>
+          <a:solidFill>
+            <a:srgbClr val="9CA3AF"/>
+          </a:solidFill>
+          <a:ln w="12700">
+            <a:solidFill>
+              <a:srgbClr val="9CA3AF">
+                <a:alpha val="0"/>
+              </a:srgbClr>
+            </a:solidFill>
+            <a:prstDash val="solid"/>
+          </a:ln>
+        </p:spPr>
+      </p:sp>
+      <p:sp>
+        <p:nvSpPr>
+          <p:cNvPr id="28" name="Text 26"/>
+          <p:cNvSpPr txBox="1"/>
+          <p:nvPr/>
+        </p:nvSpPr>
+        <p:spPr>
+          <a:xfrm>
+            <a:off x="2715768" y="4480560"/>
+            <a:ext cx="841248" cy="109728"/>
+          </a:xfrm>
+          <a:prstGeom prst="rect">
+            <a:avLst/>
+          </a:prstGeom>
+          <a:solidFill>
+            <a:srgbClr val="FFFFFF">
+              <a:alpha val="0"/>
+            </a:srgbClr>
+          </a:solidFill>
+          <a:ln>
+            <a:solidFill>
+              <a:srgbClr val="FFFFFF">
+                <a:alpha val="0"/>
+              </a:srgbClr>
+            </a:solidFill>
+          </a:ln>
+        </p:spPr>
+        <p:txBody>
+          <a:bodyPr wrap="square" lIns="0" tIns="0" rIns="0" bIns="0" rtlCol="0" anchor="ctr"/>
           <a:lstStyle/>
           <a:p>
             <a:pPr indent="0" marL="0">
               <a:buNone/>
             </a:pPr>
             <a:r>
-              <a:rPr lang="en-US" sz="1000" dirty="0">
+              <a:rPr lang="en-US" sz="1400" b="1" dirty="0">
                 <a:solidFill>
-                  <a:srgbClr val="4B5563"/>
+                  <a:srgbClr val="1F2937"/>
                 </a:solidFill>
+                <a:latin typeface="Aptos" pitchFamily="34" charset="0"/>
+                <a:ea typeface="Aptos" pitchFamily="34" charset="-122"/>
+                <a:cs typeface="Aptos" pitchFamily="34" charset="-120"/>
               </a:rPr>
-              <a:t>Planned: 44% | Actual: 44% | Variance: 0%</a:t>
+              <a:t>22.0%</a:t>
             </a:r>
-            <a:endParaRPr lang="en-US" sz="1000" dirty="0"/>
+            <a:endParaRPr lang="en-US" sz="1400" dirty="0"/>
           </a:p>
         </p:txBody>
       </p:sp>
       <p:sp>
         <p:nvSpPr>
-          <p:cNvPr id="9" name="Text 7"/>
-          <p:cNvSpPr/>
+          <p:cNvPr id="29" name="Text 27"/>
+          <p:cNvSpPr txBox="1"/>
           <p:nvPr/>
         </p:nvSpPr>
         <p:spPr>
           <a:xfrm>
-            <a:off x="9601200" y="1737360"/>
-            <a:ext cx="1828800" cy="274320"/>
+            <a:off x="576072" y="4663440"/>
+            <a:ext cx="1965960" cy="109728"/>
           </a:xfrm>
           <a:prstGeom prst="rect">
             <a:avLst/>
           </a:prstGeom>
-          <a:noFill/>
-          <a:ln/>
+          <a:solidFill>
+            <a:srgbClr val="FFFFFF">
+              <a:alpha val="0"/>
+            </a:srgbClr>
+          </a:solidFill>
+          <a:ln>
+            <a:solidFill>
+              <a:srgbClr val="FFFFFF">
+                <a:alpha val="0"/>
+              </a:srgbClr>
+            </a:solidFill>
+          </a:ln>
         </p:spPr>
         <p:txBody>
-          <a:bodyPr wrap="square" rtlCol="0" anchor="ctr"/>
+          <a:bodyPr wrap="square" lIns="44450" tIns="63500" rIns="63500" bIns="44450" rtlCol="0" anchor="t"/>
+          <a:lstStyle/>
+          <a:p>
+            <a:pPr algn="l" indent="0" marL="0">
+              <a:buNone/>
+            </a:pPr>
+            <a:r>
+              <a:rPr lang="en-US" sz="1400" dirty="0">
+                <a:solidFill>
+                  <a:srgbClr val="334155"/>
+                </a:solidFill>
+                <a:latin typeface="Aptos" pitchFamily="34" charset="0"/>
+                <a:ea typeface="Aptos" pitchFamily="34" charset="-122"/>
+                <a:cs typeface="Aptos" pitchFamily="34" charset="-120"/>
+              </a:rPr>
+              <a:t>Actual</a:t>
+            </a:r>
+            <a:endParaRPr lang="en-US" sz="1400" dirty="0"/>
+          </a:p>
+        </p:txBody>
+      </p:sp>
+      <p:sp>
+        <p:nvSpPr>
+          <p:cNvPr id="30" name="Shape 28"/>
+          <p:cNvSpPr/>
+          <p:nvPr/>
+        </p:nvSpPr>
+        <p:spPr>
+          <a:xfrm>
+            <a:off x="2633472" y="4663440"/>
+            <a:ext cx="45720" cy="109728"/>
+          </a:xfrm>
+          <a:prstGeom prst="rect">
+            <a:avLst/>
+          </a:prstGeom>
+          <a:solidFill>
+            <a:srgbClr val="EF4444"/>
+          </a:solidFill>
+          <a:ln w="12700">
+            <a:solidFill>
+              <a:srgbClr val="EF4444">
+                <a:alpha val="0"/>
+              </a:srgbClr>
+            </a:solidFill>
+            <a:prstDash val="solid"/>
+          </a:ln>
+        </p:spPr>
+      </p:sp>
+      <p:sp>
+        <p:nvSpPr>
+          <p:cNvPr id="31" name="Text 29"/>
+          <p:cNvSpPr txBox="1"/>
+          <p:nvPr/>
+        </p:nvSpPr>
+        <p:spPr>
+          <a:xfrm>
+            <a:off x="2715768" y="4663440"/>
+            <a:ext cx="841248" cy="109728"/>
+          </a:xfrm>
+          <a:prstGeom prst="rect">
+            <a:avLst/>
+          </a:prstGeom>
+          <a:solidFill>
+            <a:srgbClr val="FFFFFF">
+              <a:alpha val="0"/>
+            </a:srgbClr>
+          </a:solidFill>
+          <a:ln>
+            <a:solidFill>
+              <a:srgbClr val="FFFFFF">
+                <a:alpha val="0"/>
+              </a:srgbClr>
+            </a:solidFill>
+          </a:ln>
+        </p:spPr>
+        <p:txBody>
+          <a:bodyPr wrap="square" lIns="0" tIns="0" rIns="0" bIns="0" rtlCol="0" anchor="ctr"/>
           <a:lstStyle/>
           <a:p>
             <a:pPr indent="0" marL="0">
               <a:buNone/>
             </a:pPr>
             <a:r>
-              <a:rPr lang="en-US" sz="1000" b="1" dirty="0">
+              <a:rPr lang="en-US" sz="1400" b="1" dirty="0">
                 <a:solidFill>
-                  <a:srgbClr val="22C55E"/>
+                  <a:srgbClr val="1F2937"/>
                 </a:solidFill>
+                <a:latin typeface="Aptos" pitchFamily="34" charset="0"/>
+                <a:ea typeface="Aptos" pitchFamily="34" charset="-122"/>
+                <a:cs typeface="Aptos" pitchFamily="34" charset="-120"/>
               </a:rPr>
-              <a:t>On Track</a:t>
+              <a:t>11.0%</a:t>
             </a:r>
-            <a:endParaRPr lang="en-US" sz="1000" dirty="0"/>
+            <a:endParaRPr lang="en-US" sz="1400" dirty="0"/>
           </a:p>
         </p:txBody>
       </p:sp>
       <p:sp>
         <p:nvSpPr>
-          <p:cNvPr id="10" name="Text 8"/>
-          <p:cNvSpPr/>
+          <p:cNvPr id="32" name="Text 30"/>
+          <p:cNvSpPr txBox="1"/>
           <p:nvPr/>
         </p:nvSpPr>
         <p:spPr>
           <a:xfrm>
-            <a:off x="576072" y="2286000"/>
+            <a:off x="576072" y="4800600"/>
+            <a:ext cx="2560320" cy="182880"/>
+          </a:xfrm>
+          <a:prstGeom prst="rect">
+            <a:avLst/>
+          </a:prstGeom>
+          <a:solidFill>
+            <a:srgbClr val="FFFFFF">
+              <a:alpha val="0"/>
+            </a:srgbClr>
+          </a:solidFill>
+          <a:ln>
+            <a:solidFill>
+              <a:srgbClr val="FFFFFF">
+                <a:alpha val="0"/>
+              </a:srgbClr>
+            </a:solidFill>
+          </a:ln>
+        </p:spPr>
+        <p:txBody>
+          <a:bodyPr wrap="square" lIns="44450" tIns="63500" rIns="63500" bIns="44450" rtlCol="0" anchor="t"/>
+          <a:lstStyle/>
+          <a:p>
+            <a:pPr algn="l" indent="0" marL="0">
+              <a:buNone/>
+            </a:pPr>
+            <a:r>
+              <a:rPr lang="en-US" sz="1400" dirty="0">
+                <a:solidFill>
+                  <a:srgbClr val="4B5563"/>
+                </a:solidFill>
+                <a:latin typeface="Aptos" pitchFamily="34" charset="0"/>
+                <a:ea typeface="Aptos" pitchFamily="34" charset="-122"/>
+                <a:cs typeface="Aptos" pitchFamily="34" charset="-120"/>
+              </a:rPr>
+              <a:t>22% planned | 11% actual</a:t>
+            </a:r>
+            <a:endParaRPr lang="en-US" sz="1400" dirty="0"/>
+          </a:p>
+        </p:txBody>
+      </p:sp>
+      <p:sp>
+        <p:nvSpPr>
+          <p:cNvPr id="33" name="Text 31"/>
+          <p:cNvSpPr txBox="1"/>
+          <p:nvPr/>
+        </p:nvSpPr>
+        <p:spPr>
+          <a:xfrm>
+            <a:off x="2404872" y="4800600"/>
+            <a:ext cx="1371600" cy="182880"/>
+          </a:xfrm>
+          <a:prstGeom prst="rect">
+            <a:avLst/>
+          </a:prstGeom>
+          <a:solidFill>
+            <a:srgbClr val="FFFFFF">
+              <a:alpha val="0"/>
+            </a:srgbClr>
+          </a:solidFill>
+          <a:ln>
+            <a:solidFill>
+              <a:srgbClr val="FFFFFF">
+                <a:alpha val="0"/>
+              </a:srgbClr>
+            </a:solidFill>
+          </a:ln>
+        </p:spPr>
+        <p:txBody>
+          <a:bodyPr wrap="square" lIns="44450" tIns="63500" rIns="63500" bIns="44450" rtlCol="0" anchor="t"/>
+          <a:lstStyle/>
+          <a:p>
+            <a:pPr algn="l" indent="0" marL="0">
+              <a:buNone/>
+            </a:pPr>
+            <a:r>
+              <a:rPr lang="en-US" sz="1400" b="1" dirty="0">
+                <a:solidFill>
+                  <a:srgbClr val="EF4444"/>
+                </a:solidFill>
+                <a:latin typeface="Aptos" pitchFamily="34" charset="0"/>
+                <a:ea typeface="Aptos" pitchFamily="34" charset="-122"/>
+                <a:cs typeface="Aptos" pitchFamily="34" charset="-120"/>
+              </a:rPr>
+              <a:t>Delayed (-11%)</a:t>
+            </a:r>
+            <a:endParaRPr lang="en-US" sz="1400" dirty="0"/>
+          </a:p>
+        </p:txBody>
+      </p:sp>
+      <p:sp>
+        <p:nvSpPr>
+          <p:cNvPr id="34" name="Text 32"/>
+          <p:cNvSpPr txBox="1"/>
+          <p:nvPr/>
+        </p:nvSpPr>
+        <p:spPr>
+          <a:xfrm>
+            <a:off x="6309360" y="3657600"/>
             <a:ext cx="2743200" cy="274320"/>
           </a:xfrm>
           <a:prstGeom prst="rect">
             <a:avLst/>
           </a:prstGeom>
-          <a:noFill/>
-          <a:ln/>
+          <a:solidFill>
+            <a:srgbClr val="FFFFFF">
+              <a:alpha val="0"/>
+            </a:srgbClr>
+          </a:solidFill>
+          <a:ln>
+            <a:solidFill>
+              <a:srgbClr val="FFFFFF">
+                <a:alpha val="0"/>
+              </a:srgbClr>
+            </a:solidFill>
+          </a:ln>
         </p:spPr>
         <p:txBody>
-          <a:bodyPr wrap="square" rtlCol="0" anchor="ctr"/>
+          <a:bodyPr wrap="square" lIns="44450" tIns="63500" rIns="63500" bIns="44450" rtlCol="0" anchor="t"/>
+          <a:lstStyle/>
+          <a:p>
+            <a:pPr algn="l" indent="0" marL="0">
+              <a:buNone/>
+            </a:pPr>
+            <a:r>
+              <a:rPr lang="en-US" sz="1400" b="1" dirty="0">
+                <a:solidFill>
+                  <a:srgbClr val="0C0C0C"/>
+                </a:solidFill>
+                <a:latin typeface="Aptos" pitchFamily="34" charset="0"/>
+                <a:ea typeface="Aptos" pitchFamily="34" charset="-122"/>
+                <a:cs typeface="Aptos" pitchFamily="34" charset="-120"/>
+              </a:rPr>
+              <a:t>KAYSAKAT TP</a:t>
+            </a:r>
+            <a:endParaRPr lang="en-US" sz="1400" dirty="0"/>
+          </a:p>
+        </p:txBody>
+      </p:sp>
+      <p:sp>
+        <p:nvSpPr>
+          <p:cNvPr id="35" name="Text 33"/>
+          <p:cNvSpPr txBox="1"/>
+          <p:nvPr/>
+        </p:nvSpPr>
+        <p:spPr>
+          <a:xfrm>
+            <a:off x="6309360" y="3977640"/>
+            <a:ext cx="2560320" cy="320040"/>
+          </a:xfrm>
+          <a:prstGeom prst="rect">
+            <a:avLst/>
+          </a:prstGeom>
+          <a:solidFill>
+            <a:srgbClr val="FFFFFF">
+              <a:alpha val="0"/>
+            </a:srgbClr>
+          </a:solidFill>
+          <a:ln>
+            <a:solidFill>
+              <a:srgbClr val="FFFFFF">
+                <a:alpha val="0"/>
+              </a:srgbClr>
+            </a:solidFill>
+          </a:ln>
+        </p:spPr>
+        <p:txBody>
+          <a:bodyPr wrap="square" lIns="44450" tIns="63500" rIns="63500" bIns="44450" rtlCol="0" anchor="t"/>
+          <a:lstStyle/>
+          <a:p>
+            <a:pPr algn="l" indent="0" marL="0">
+              <a:buNone/>
+            </a:pPr>
+            <a:r>
+              <a:rPr lang="en-US" sz="1600" b="1" dirty="0">
+                <a:solidFill>
+                  <a:srgbClr val="0B1D44"/>
+                </a:solidFill>
+                <a:latin typeface="Aptos" pitchFamily="34" charset="0"/>
+                <a:ea typeface="Aptos" pitchFamily="34" charset="-122"/>
+                <a:cs typeface="Aptos" pitchFamily="34" charset="-120"/>
+              </a:rPr>
+              <a:t> </a:t>
+            </a:r>
+            <a:endParaRPr lang="en-US" sz="1600" dirty="0"/>
+          </a:p>
+        </p:txBody>
+      </p:sp>
+      <p:sp>
+        <p:nvSpPr>
+          <p:cNvPr id="36" name="Text 34"/>
+          <p:cNvSpPr txBox="1"/>
+          <p:nvPr/>
+        </p:nvSpPr>
+        <p:spPr>
+          <a:xfrm>
+            <a:off x="6309360" y="4480560"/>
+            <a:ext cx="1965960" cy="109728"/>
+          </a:xfrm>
+          <a:prstGeom prst="rect">
+            <a:avLst/>
+          </a:prstGeom>
+          <a:solidFill>
+            <a:srgbClr val="FFFFFF">
+              <a:alpha val="0"/>
+            </a:srgbClr>
+          </a:solidFill>
+          <a:ln>
+            <a:solidFill>
+              <a:srgbClr val="FFFFFF">
+                <a:alpha val="0"/>
+              </a:srgbClr>
+            </a:solidFill>
+          </a:ln>
+        </p:spPr>
+        <p:txBody>
+          <a:bodyPr wrap="square" lIns="44450" tIns="63500" rIns="63500" bIns="44450" rtlCol="0" anchor="t"/>
+          <a:lstStyle/>
+          <a:p>
+            <a:pPr algn="l" indent="0" marL="0">
+              <a:buNone/>
+            </a:pPr>
+            <a:r>
+              <a:rPr lang="en-US" sz="1400" dirty="0">
+                <a:solidFill>
+                  <a:srgbClr val="334155"/>
+                </a:solidFill>
+                <a:latin typeface="Aptos" pitchFamily="34" charset="0"/>
+                <a:ea typeface="Aptos" pitchFamily="34" charset="-122"/>
+                <a:cs typeface="Aptos" pitchFamily="34" charset="-120"/>
+              </a:rPr>
+              <a:t>Planned</a:t>
+            </a:r>
+            <a:endParaRPr lang="en-US" sz="1400" dirty="0"/>
+          </a:p>
+        </p:txBody>
+      </p:sp>
+      <p:sp>
+        <p:nvSpPr>
+          <p:cNvPr id="37" name="Shape 35"/>
+          <p:cNvSpPr/>
+          <p:nvPr/>
+        </p:nvSpPr>
+        <p:spPr>
+          <a:xfrm>
+            <a:off x="8366760" y="4480560"/>
+            <a:ext cx="45720" cy="109728"/>
+          </a:xfrm>
+          <a:prstGeom prst="rect">
+            <a:avLst/>
+          </a:prstGeom>
+          <a:solidFill>
+            <a:srgbClr val="9CA3AF"/>
+          </a:solidFill>
+          <a:ln w="12700">
+            <a:solidFill>
+              <a:srgbClr val="9CA3AF">
+                <a:alpha val="0"/>
+              </a:srgbClr>
+            </a:solidFill>
+            <a:prstDash val="solid"/>
+          </a:ln>
+        </p:spPr>
+      </p:sp>
+      <p:sp>
+        <p:nvSpPr>
+          <p:cNvPr id="38" name="Text 36"/>
+          <p:cNvSpPr txBox="1"/>
+          <p:nvPr/>
+        </p:nvSpPr>
+        <p:spPr>
+          <a:xfrm>
+            <a:off x="8449056" y="4480560"/>
+            <a:ext cx="841248" cy="109728"/>
+          </a:xfrm>
+          <a:prstGeom prst="rect">
+            <a:avLst/>
+          </a:prstGeom>
+          <a:solidFill>
+            <a:srgbClr val="FFFFFF">
+              <a:alpha val="0"/>
+            </a:srgbClr>
+          </a:solidFill>
+          <a:ln>
+            <a:solidFill>
+              <a:srgbClr val="FFFFFF">
+                <a:alpha val="0"/>
+              </a:srgbClr>
+            </a:solidFill>
+          </a:ln>
+        </p:spPr>
+        <p:txBody>
+          <a:bodyPr wrap="square" lIns="0" tIns="0" rIns="0" bIns="0" rtlCol="0" anchor="ctr"/>
           <a:lstStyle/>
           <a:p>
             <a:pPr indent="0" marL="0">
               <a:buNone/>
             </a:pPr>
             <a:r>
-              <a:rPr lang="en-US" sz="1200" b="1" dirty="0">
+              <a:rPr lang="en-US" sz="1400" b="1" dirty="0">
                 <a:solidFill>
-                  <a:srgbClr val="0C0C0C"/>
+                  <a:srgbClr val="1F2937"/>
                 </a:solidFill>
+                <a:latin typeface="Aptos" pitchFamily="34" charset="0"/>
+                <a:ea typeface="Aptos" pitchFamily="34" charset="-122"/>
+                <a:cs typeface="Aptos" pitchFamily="34" charset="-120"/>
               </a:rPr>
-              <a:t>EASTBAY PH-2 TP</a:t>
+              <a:t>11.0%</a:t>
             </a:r>
-            <a:endParaRPr lang="en-US" sz="1200" dirty="0"/>
+            <a:endParaRPr lang="en-US" sz="1400" dirty="0"/>
           </a:p>
         </p:txBody>
       </p:sp>
       <p:sp>
         <p:nvSpPr>
-          <p:cNvPr id="11" name="Text 9"/>
-          <p:cNvSpPr/>
+          <p:cNvPr id="39" name="Text 37"/>
+          <p:cNvSpPr txBox="1"/>
           <p:nvPr/>
         </p:nvSpPr>
         <p:spPr>
           <a:xfrm>
-            <a:off x="3657600" y="2286000"/>
-            <a:ext cx="5486400" cy="274320"/>
+            <a:off x="6309360" y="4663440"/>
+            <a:ext cx="1965960" cy="109728"/>
           </a:xfrm>
           <a:prstGeom prst="rect">
             <a:avLst/>
           </a:prstGeom>
-          <a:noFill/>
-          <a:ln/>
+          <a:solidFill>
+            <a:srgbClr val="FFFFFF">
+              <a:alpha val="0"/>
+            </a:srgbClr>
+          </a:solidFill>
+          <a:ln>
+            <a:solidFill>
+              <a:srgbClr val="FFFFFF">
+                <a:alpha val="0"/>
+              </a:srgbClr>
+            </a:solidFill>
+          </a:ln>
         </p:spPr>
         <p:txBody>
-          <a:bodyPr wrap="square" rtlCol="0" anchor="ctr"/>
+          <a:bodyPr wrap="square" lIns="44450" tIns="63500" rIns="63500" bIns="44450" rtlCol="0" anchor="t"/>
+          <a:lstStyle/>
+          <a:p>
+            <a:pPr algn="l" indent="0" marL="0">
+              <a:buNone/>
+            </a:pPr>
+            <a:r>
+              <a:rPr lang="en-US" sz="1400" dirty="0">
+                <a:solidFill>
+                  <a:srgbClr val="334155"/>
+                </a:solidFill>
+                <a:latin typeface="Aptos" pitchFamily="34" charset="0"/>
+                <a:ea typeface="Aptos" pitchFamily="34" charset="-122"/>
+                <a:cs typeface="Aptos" pitchFamily="34" charset="-120"/>
+              </a:rPr>
+              <a:t>Actual</a:t>
+            </a:r>
+            <a:endParaRPr lang="en-US" sz="1400" dirty="0"/>
+          </a:p>
+        </p:txBody>
+      </p:sp>
+      <p:sp>
+        <p:nvSpPr>
+          <p:cNvPr id="40" name="Shape 38"/>
+          <p:cNvSpPr/>
+          <p:nvPr/>
+        </p:nvSpPr>
+        <p:spPr>
+          <a:xfrm>
+            <a:off x="8366760" y="4663440"/>
+            <a:ext cx="45720" cy="109728"/>
+          </a:xfrm>
+          <a:prstGeom prst="rect">
+            <a:avLst/>
+          </a:prstGeom>
+          <a:solidFill>
+            <a:srgbClr val="22C55E"/>
+          </a:solidFill>
+          <a:ln w="12700">
+            <a:solidFill>
+              <a:srgbClr val="22C55E">
+                <a:alpha val="0"/>
+              </a:srgbClr>
+            </a:solidFill>
+            <a:prstDash val="solid"/>
+          </a:ln>
+        </p:spPr>
+      </p:sp>
+      <p:sp>
+        <p:nvSpPr>
+          <p:cNvPr id="41" name="Text 39"/>
+          <p:cNvSpPr txBox="1"/>
+          <p:nvPr/>
+        </p:nvSpPr>
+        <p:spPr>
+          <a:xfrm>
+            <a:off x="8449056" y="4663440"/>
+            <a:ext cx="841248" cy="109728"/>
+          </a:xfrm>
+          <a:prstGeom prst="rect">
+            <a:avLst/>
+          </a:prstGeom>
+          <a:solidFill>
+            <a:srgbClr val="FFFFFF">
+              <a:alpha val="0"/>
+            </a:srgbClr>
+          </a:solidFill>
+          <a:ln>
+            <a:solidFill>
+              <a:srgbClr val="FFFFFF">
+                <a:alpha val="0"/>
+              </a:srgbClr>
+            </a:solidFill>
+          </a:ln>
+        </p:spPr>
+        <p:txBody>
+          <a:bodyPr wrap="square" lIns="0" tIns="0" rIns="0" bIns="0" rtlCol="0" anchor="ctr"/>
           <a:lstStyle/>
           <a:p>
             <a:pPr indent="0" marL="0">
               <a:buNone/>
             </a:pPr>
             <a:r>
-              <a:rPr lang="en-US" sz="1000" dirty="0">
+              <a:rPr lang="en-US" sz="1400" b="1" dirty="0">
                 <a:solidFill>
-                  <a:srgbClr val="4B5563"/>
+                  <a:srgbClr val="1F2937"/>
                 </a:solidFill>
+                <a:latin typeface="Aptos" pitchFamily="34" charset="0"/>
+                <a:ea typeface="Aptos" pitchFamily="34" charset="-122"/>
+                <a:cs typeface="Aptos" pitchFamily="34" charset="-120"/>
               </a:rPr>
-              <a:t>Planned: 22% | Actual: 11% | Variance: -11%</a:t>
+              <a:t>11.0%</a:t>
             </a:r>
-            <a:endParaRPr lang="en-US" sz="1000" dirty="0"/>
+            <a:endParaRPr lang="en-US" sz="1400" dirty="0"/>
           </a:p>
         </p:txBody>
       </p:sp>
       <p:sp>
         <p:nvSpPr>
-          <p:cNvPr id="12" name="Text 10"/>
-          <p:cNvSpPr/>
+          <p:cNvPr id="42" name="Text 40"/>
+          <p:cNvSpPr txBox="1"/>
           <p:nvPr/>
         </p:nvSpPr>
         <p:spPr>
           <a:xfrm>
-            <a:off x="9601200" y="2286000"/>
-            <a:ext cx="1828800" cy="274320"/>
+            <a:off x="6309360" y="4800600"/>
+            <a:ext cx="2560320" cy="182880"/>
           </a:xfrm>
           <a:prstGeom prst="rect">
             <a:avLst/>
           </a:prstGeom>
-          <a:noFill/>
-          <a:ln/>
+          <a:solidFill>
+            <a:srgbClr val="FFFFFF">
+              <a:alpha val="0"/>
+            </a:srgbClr>
+          </a:solidFill>
+          <a:ln>
+            <a:solidFill>
+              <a:srgbClr val="FFFFFF">
+                <a:alpha val="0"/>
+              </a:srgbClr>
+            </a:solidFill>
+          </a:ln>
         </p:spPr>
         <p:txBody>
-          <a:bodyPr wrap="square" rtlCol="0" anchor="ctr"/>
+          <a:bodyPr wrap="square" lIns="44450" tIns="63500" rIns="63500" bIns="44450" rtlCol="0" anchor="t"/>
           <a:lstStyle/>
           <a:p>
-            <a:pPr indent="0" marL="0">
+            <a:pPr algn="l" indent="0" marL="0">
               <a:buNone/>
             </a:pPr>
             <a:r>
-              <a:rPr lang="en-US" sz="1000" b="1" dirty="0">
+              <a:rPr lang="en-US" sz="1400" dirty="0">
                 <a:solidFill>
-                  <a:srgbClr val="EF4444"/>
+                  <a:srgbClr val="4B5563"/>
                 </a:solidFill>
+                <a:latin typeface="Aptos" pitchFamily="34" charset="0"/>
+                <a:ea typeface="Aptos" pitchFamily="34" charset="-122"/>
+                <a:cs typeface="Aptos" pitchFamily="34" charset="-120"/>
               </a:rPr>
-              <a:t>Delayed</a:t>
+              <a:t>11% planned | 11% actual</a:t>
             </a:r>
-            <a:endParaRPr lang="en-US" sz="1000" dirty="0"/>
+            <a:endParaRPr lang="en-US" sz="1400" dirty="0"/>
           </a:p>
         </p:txBody>
       </p:sp>
       <p:sp>
         <p:nvSpPr>
-          <p:cNvPr id="13" name="Text 11"/>
-          <p:cNvSpPr/>
+          <p:cNvPr id="43" name="Text 41"/>
+          <p:cNvSpPr txBox="1"/>
           <p:nvPr/>
         </p:nvSpPr>
         <p:spPr>
           <a:xfrm>
-            <a:off x="576072" y="2834640"/>
-            <a:ext cx="2743200" cy="274320"/>
+            <a:off x="8138160" y="4800600"/>
+            <a:ext cx="1371600" cy="182880"/>
           </a:xfrm>
           <a:prstGeom prst="rect">
             <a:avLst/>
           </a:prstGeom>
-          <a:noFill/>
-          <a:ln/>
+          <a:solidFill>
+            <a:srgbClr val="FFFFFF">
+              <a:alpha val="0"/>
+            </a:srgbClr>
+          </a:solidFill>
+          <a:ln>
+            <a:solidFill>
+              <a:srgbClr val="FFFFFF">
+                <a:alpha val="0"/>
+              </a:srgbClr>
+            </a:solidFill>
+          </a:ln>
         </p:spPr>
         <p:txBody>
-          <a:bodyPr wrap="square" rtlCol="0" anchor="ctr"/>
+          <a:bodyPr wrap="square" lIns="44450" tIns="63500" rIns="63500" bIns="44450" rtlCol="0" anchor="t"/>
           <a:lstStyle/>
           <a:p>
-            <a:pPr indent="0" marL="0">
+            <a:pPr algn="l" indent="0" marL="0">
               <a:buNone/>
             </a:pPr>
             <a:r>
-              <a:rPr lang="en-US" sz="1200" b="1" dirty="0">
+              <a:rPr lang="en-US" sz="1400" b="1" dirty="0">
                 <a:solidFill>
-                  <a:srgbClr val="0C0C0C"/>
+                  <a:srgbClr val="22C55E"/>
                 </a:solidFill>
+                <a:latin typeface="Aptos" pitchFamily="34" charset="0"/>
+                <a:ea typeface="Aptos" pitchFamily="34" charset="-122"/>
+                <a:cs typeface="Aptos" pitchFamily="34" charset="-120"/>
               </a:rPr>
-              <a:t>KAYSAKAT TP</a:t>
+              <a:t>On Track (0%)</a:t>
             </a:r>
-            <a:endParaRPr lang="en-US" sz="1200" dirty="0"/>
+            <a:endParaRPr lang="en-US" sz="1400" dirty="0"/>
           </a:p>
         </p:txBody>
       </p:sp>
       <p:sp>
         <p:nvSpPr>
-          <p:cNvPr id="14" name="Text 12"/>
-          <p:cNvSpPr/>
+          <p:cNvPr id="44" name="Text 42"/>
+          <p:cNvSpPr txBox="1"/>
           <p:nvPr/>
         </p:nvSpPr>
         <p:spPr>
           <a:xfrm>
-            <a:off x="3657600" y="2834640"/>
-            <a:ext cx="5486400" cy="274320"/>
+            <a:off x="576072" y="6574536"/>
+            <a:ext cx="9144000" cy="192024"/>
           </a:xfrm>
           <a:prstGeom prst="rect">
             <a:avLst/>
           </a:prstGeom>
-          <a:noFill/>
-          <a:ln/>
+          <a:solidFill>
+            <a:srgbClr val="FFFFFF">
+              <a:alpha val="0"/>
+            </a:srgbClr>
+          </a:solidFill>
+          <a:ln>
+            <a:solidFill>
+              <a:srgbClr val="FFFFFF">
+                <a:alpha val="0"/>
+              </a:srgbClr>
+            </a:solidFill>
+          </a:ln>
         </p:spPr>
         <p:txBody>
-          <a:bodyPr wrap="square" rtlCol="0" anchor="ctr"/>
+          <a:bodyPr wrap="square" lIns="44450" tIns="63500" rIns="63500" bIns="44450" rtlCol="0" anchor="t"/>
           <a:lstStyle/>
           <a:p>
-            <a:pPr indent="0" marL="0">
+            <a:pPr algn="l" indent="0" marL="0">
               <a:buNone/>
             </a:pPr>
             <a:r>
-              <a:rPr lang="en-US" sz="1000" dirty="0">
+              <a:rPr lang="en-US" sz="1400" dirty="0">
                 <a:solidFill>
-                  <a:srgbClr val="4B5563"/>
+                  <a:srgbClr val="595959"/>
                 </a:solidFill>
+                <a:latin typeface="Aptos" pitchFamily="34" charset="0"/>
+                <a:ea typeface="Aptos" pitchFamily="34" charset="-122"/>
+                <a:cs typeface="Aptos" pitchFamily="34" charset="-120"/>
               </a:rPr>
-              <a:t>Planned: 11% | Actual: 11% | Variance: 0%</a:t>
+              <a:t>Source: O&amp;M Manual Governance module • July 25, 2026</a:t>
             </a:r>
-            <a:endParaRPr lang="en-US" sz="1000" dirty="0"/>
+            <a:endParaRPr lang="en-US" sz="1400" dirty="0"/>
           </a:p>
         </p:txBody>
       </p:sp>
       <p:sp>
         <p:nvSpPr>
-          <p:cNvPr id="15" name="Text 13"/>
-          <p:cNvSpPr/>
+          <p:cNvPr id="45" name="Text 43"/>
+          <p:cNvSpPr txBox="1"/>
           <p:nvPr/>
         </p:nvSpPr>
         <p:spPr>
           <a:xfrm>
-            <a:off x="9601200" y="2834640"/>
-            <a:ext cx="1828800" cy="274320"/>
+            <a:off x="11430000" y="6574536"/>
+            <a:ext cx="731520" cy="192024"/>
           </a:xfrm>
           <a:prstGeom prst="rect">
             <a:avLst/>
           </a:prstGeom>
-          <a:noFill/>
-          <a:ln/>
+          <a:solidFill>
+            <a:srgbClr val="FFFFFF">
+              <a:alpha val="0"/>
+            </a:srgbClr>
+          </a:solidFill>
+          <a:ln>
+            <a:solidFill>
+              <a:srgbClr val="FFFFFF">
+                <a:alpha val="0"/>
+              </a:srgbClr>
+            </a:solidFill>
+          </a:ln>
         </p:spPr>
         <p:txBody>
-          <a:bodyPr wrap="square" rtlCol="0" anchor="ctr"/>
-          <a:lstStyle/>
-          <a:p>
-            <a:pPr indent="0" marL="0">
-              <a:buNone/>
-            </a:pPr>
-            <a:r>
-              <a:rPr lang="en-US" sz="1000" b="1" dirty="0">
-                <a:solidFill>
-                  <a:srgbClr val="22C55E"/>
-                </a:solidFill>
-              </a:rPr>
-              <a:t>On Track</a:t>
-            </a:r>
-            <a:endParaRPr lang="en-US" sz="1000" dirty="0"/>
-          </a:p>
-        </p:txBody>
-      </p:sp>
-      <p:sp>
-        <p:nvSpPr>
-          <p:cNvPr id="16" name="Text 14"/>
-          <p:cNvSpPr/>
-          <p:nvPr/>
-        </p:nvSpPr>
-        <p:spPr>
-          <a:xfrm>
-            <a:off x="576072" y="6217920"/>
-            <a:ext cx="9144000" cy="365760"/>
-          </a:xfrm>
-          <a:prstGeom prst="rect">
-            <a:avLst/>
-          </a:prstGeom>
-          <a:noFill/>
-          <a:ln/>
-        </p:spPr>
-        <p:txBody>
-          <a:bodyPr wrap="square" rtlCol="0" anchor="ctr"/>
-          <a:lstStyle/>
-          <a:p>
-            <a:pPr indent="0" marL="0">
-              <a:buNone/>
-            </a:pPr>
-            <a:r>
-              <a:rPr lang="en-US" sz="900" dirty="0">
-                <a:solidFill>
-                  <a:srgbClr val="666666"/>
-                </a:solidFill>
-              </a:rPr>
-              <a:t>Source: O&amp;M Manual Governance module • July 25, 2026</a:t>
-            </a:r>
-            <a:endParaRPr lang="en-US" sz="900" dirty="0"/>
-          </a:p>
-        </p:txBody>
-      </p:sp>
-      <p:sp>
-        <p:nvSpPr>
-          <p:cNvPr id="17" name="Text 15"/>
-          <p:cNvSpPr/>
-          <p:nvPr/>
-        </p:nvSpPr>
-        <p:spPr>
-          <a:xfrm>
-            <a:off x="10972800" y="6217920"/>
-            <a:ext cx="731520" cy="365760"/>
-          </a:xfrm>
-          <a:prstGeom prst="rect">
-            <a:avLst/>
-          </a:prstGeom>
-          <a:noFill/>
-          <a:ln/>
-        </p:spPr>
-        <p:txBody>
-          <a:bodyPr wrap="square" rtlCol="0" anchor="ctr"/>
+          <a:bodyPr wrap="square" lIns="44450" tIns="63500" rIns="63500" bIns="44450" rtlCol="0" anchor="t"/>
           <a:lstStyle/>
           <a:p>
             <a:pPr algn="r" indent="0" marL="0">
               <a:buNone/>
             </a:pPr>
             <a:r>
-              <a:rPr lang="en-US" sz="900" dirty="0">
+              <a:rPr lang="en-US" sz="1400" dirty="0">
                 <a:solidFill>
-                  <a:srgbClr val="666666"/>
+                  <a:srgbClr val="595959"/>
                 </a:solidFill>
+                <a:latin typeface="Aptos" pitchFamily="34" charset="0"/>
+                <a:ea typeface="Aptos" pitchFamily="34" charset="-122"/>
+                <a:cs typeface="Aptos" pitchFamily="34" charset="-120"/>
               </a:rPr>
               <a:t>3 / 4</a:t>
             </a:r>
-            <a:endParaRPr lang="en-US" sz="900" dirty="0"/>
+            <a:endParaRPr lang="en-US" sz="1400" dirty="0"/>
           </a:p>
         </p:txBody>
       </p:sp>
@@ -2187,21 +4273,28 @@
         <p:spPr>
           <a:xfrm>
             <a:off x="0" y="0"/>
-            <a:ext cx="12191695" cy="640080"/>
+            <a:ext cx="12191695" cy="658368"/>
           </a:xfrm>
           <a:prstGeom prst="rect">
             <a:avLst/>
           </a:prstGeom>
           <a:solidFill>
-            <a:srgbClr val="1E3A5F"/>
-          </a:solidFill>
-          <a:ln/>
+            <a:srgbClr val="081C3D"/>
+          </a:solidFill>
+          <a:ln w="12700">
+            <a:solidFill>
+              <a:srgbClr val="FFFFFF">
+                <a:alpha val="0"/>
+              </a:srgbClr>
+            </a:solidFill>
+            <a:prstDash val="solid"/>
+          </a:ln>
         </p:spPr>
       </p:sp>
       <p:sp>
         <p:nvSpPr>
           <p:cNvPr id="3" name="Text 1"/>
-          <p:cNvSpPr/>
+          <p:cNvSpPr txBox="1"/>
           <p:nvPr/>
         </p:nvSpPr>
         <p:spPr>
@@ -2212,61 +4305,87 @@
           <a:prstGeom prst="rect">
             <a:avLst/>
           </a:prstGeom>
-          <a:noFill/>
-          <a:ln/>
+          <a:solidFill>
+            <a:srgbClr val="FFFFFF">
+              <a:alpha val="0"/>
+            </a:srgbClr>
+          </a:solidFill>
+          <a:ln>
+            <a:solidFill>
+              <a:srgbClr val="FFFFFF">
+                <a:alpha val="0"/>
+              </a:srgbClr>
+            </a:solidFill>
+          </a:ln>
         </p:spPr>
         <p:txBody>
-          <a:bodyPr wrap="square" rtlCol="0" anchor="ctr"/>
+          <a:bodyPr wrap="square" lIns="44450" tIns="63500" rIns="63500" bIns="44450" rtlCol="0" anchor="t"/>
           <a:lstStyle/>
           <a:p>
-            <a:pPr indent="0" marL="0">
+            <a:pPr algn="l" indent="0" marL="0">
               <a:buNone/>
             </a:pPr>
             <a:r>
-              <a:rPr lang="en-US" sz="2400" b="1" dirty="0">
+              <a:rPr lang="en-US" sz="2800" b="1" dirty="0">
                 <a:solidFill>
                   <a:srgbClr val="FFFFFF"/>
                 </a:solidFill>
+                <a:latin typeface="Aptos" pitchFamily="34" charset="0"/>
+                <a:ea typeface="Aptos" pitchFamily="34" charset="-122"/>
+                <a:cs typeface="Aptos" pitchFamily="34" charset="-120"/>
               </a:rPr>
               <a:t>Deliverables Compliance Summary</a:t>
             </a:r>
-            <a:endParaRPr lang="en-US" sz="2400" dirty="0"/>
+            <a:endParaRPr lang="en-US" sz="2800" dirty="0"/>
           </a:p>
         </p:txBody>
       </p:sp>
       <p:sp>
         <p:nvSpPr>
           <p:cNvPr id="4" name="Text 2"/>
-          <p:cNvSpPr/>
+          <p:cNvSpPr txBox="1"/>
           <p:nvPr/>
         </p:nvSpPr>
         <p:spPr>
           <a:xfrm>
-            <a:off x="576072" y="914400"/>
+            <a:off x="576072" y="768096"/>
             <a:ext cx="10972800" cy="274320"/>
           </a:xfrm>
           <a:prstGeom prst="rect">
             <a:avLst/>
           </a:prstGeom>
-          <a:noFill/>
-          <a:ln/>
+          <a:solidFill>
+            <a:srgbClr val="FFFFFF">
+              <a:alpha val="0"/>
+            </a:srgbClr>
+          </a:solidFill>
+          <a:ln>
+            <a:solidFill>
+              <a:srgbClr val="FFFFFF">
+                <a:alpha val="0"/>
+              </a:srgbClr>
+            </a:solidFill>
+          </a:ln>
         </p:spPr>
         <p:txBody>
-          <a:bodyPr wrap="square" rtlCol="0" anchor="ctr"/>
+          <a:bodyPr wrap="square" lIns="44450" tIns="63500" rIns="63500" bIns="44450" rtlCol="0" anchor="t"/>
           <a:lstStyle/>
           <a:p>
-            <a:pPr indent="0" marL="0">
+            <a:pPr algn="l" indent="0" marL="0">
               <a:buNone/>
             </a:pPr>
             <a:r>
-              <a:rPr lang="en-US" sz="1200" b="1" dirty="0">
+              <a:rPr lang="en-US" sz="1400" b="1" dirty="0">
                 <a:solidFill>
                   <a:srgbClr val="0C0C0C"/>
                 </a:solidFill>
+                <a:latin typeface="Aptos" pitchFamily="34" charset="0"/>
+                <a:ea typeface="Aptos" pitchFamily="34" charset="-122"/>
+                <a:cs typeface="Aptos" pitchFamily="34" charset="-120"/>
               </a:rPr>
               <a:t>Facility Deliverables Status</a:t>
             </a:r>
-            <a:endParaRPr lang="en-US" sz="1200" dirty="0"/>
+            <a:endParaRPr lang="en-US" sz="1400" dirty="0"/>
           </a:p>
         </p:txBody>
       </p:sp>
@@ -2285,23 +4404,23 @@
           </p:nvPr>
         </p:nvGraphicFramePr>
         <p:xfrm>
-          <a:off x="576072" y="1280160"/>
-          <a:ext cx="11039551" cy="2286000"/>
+          <a:off x="576072" y="1133856"/>
+          <a:ext cx="11036808" cy="1828800"/>
         </p:xfrm>
         <a:graphic>
           <a:graphicData uri="http://schemas.openxmlformats.org/drawingml/2006/table">
             <a:tbl>
               <a:tblPr/>
               <a:tblGrid>
-                <a:gridCol w="2743200"/>
-                <a:gridCol w="1371600"/>
-                <a:gridCol w="1371600"/>
-                <a:gridCol w="1371600"/>
-                <a:gridCol w="1371600"/>
-                <a:gridCol w="1645920"/>
-                <a:gridCol w="1645920"/>
+                <a:gridCol w="1576687"/>
+                <a:gridCol w="1576687"/>
+                <a:gridCol w="1576687"/>
+                <a:gridCol w="1576687"/>
+                <a:gridCol w="1576687"/>
+                <a:gridCol w="1576687"/>
+                <a:gridCol w="1576687"/>
               </a:tblGrid>
-              <a:tr h="457200">
+              <a:tr h="365760">
                 <a:tc>
                   <a:txBody>
                     <a:bodyPr/>
@@ -2311,17 +4430,502 @@
                         <a:buNone/>
                       </a:pPr>
                       <a:r>
-                        <a:rPr lang="en-US" sz="900" dirty="0">
+                        <a:rPr lang="en-US" sz="1400" b="1" dirty="0">
                           <a:solidFill>
-                            <a:srgbClr val="000000"/>
+                            <a:srgbClr val="FFFFFF"/>
                           </a:solidFill>
+                          <a:latin typeface="Aptos" pitchFamily="34" charset="0"/>
+                          <a:ea typeface="Aptos" pitchFamily="34" charset="-122"/>
+                          <a:cs typeface="Aptos" pitchFamily="34" charset="-120"/>
                         </a:rPr>
                         <a:t>Facility</a:t>
                       </a:r>
-                      <a:endParaRPr lang="en-US" sz="900" dirty="0"/>
+                      <a:endParaRPr lang="en-US" sz="1400" dirty="0">
+                        <a:latin typeface="Aptos" charset="0"/>
+                        <a:ea typeface="Aptos" charset="0"/>
+                        <a:cs typeface="Aptos" charset="0"/>
+                      </a:endParaRPr>
                     </a:p>
                   </a:txBody>
-                  <a:tcPr marL="91440" marR="91440" marT="45720" marB="45720">
+                  <a:tcPr marL="36576" marR="36576" marT="27432" marB="27432" anchor="ctr">
+                    <a:lnL w="6350" cap="flat" cmpd="sng" algn="ctr">
+                      <a:solidFill>
+                        <a:srgbClr val="E5E7EB"/>
+                      </a:solidFill>
+                      <a:prstDash val="solid"/>
+                      <a:round/>
+                      <a:headEnd type="none" w="med" len="med"/>
+                      <a:tailEnd type="none" w="med" len="med"/>
+                    </a:lnL>
+                    <a:lnR w="6350" cap="flat" cmpd="sng" algn="ctr">
+                      <a:solidFill>
+                        <a:srgbClr val="E5E7EB"/>
+                      </a:solidFill>
+                      <a:prstDash val="solid"/>
+                      <a:round/>
+                      <a:headEnd type="none" w="med" len="med"/>
+                      <a:tailEnd type="none" w="med" len="med"/>
+                    </a:lnR>
+                    <a:lnT w="6350" cap="flat" cmpd="sng" algn="ctr">
+                      <a:solidFill>
+                        <a:srgbClr val="E5E7EB"/>
+                      </a:solidFill>
+                      <a:prstDash val="solid"/>
+                      <a:round/>
+                      <a:headEnd type="none" w="med" len="med"/>
+                      <a:tailEnd type="none" w="med" len="med"/>
+                    </a:lnT>
+                    <a:lnB w="6350" cap="flat" cmpd="sng" algn="ctr">
+                      <a:solidFill>
+                        <a:srgbClr val="E5E7EB"/>
+                      </a:solidFill>
+                      <a:prstDash val="solid"/>
+                      <a:round/>
+                      <a:headEnd type="none" w="med" len="med"/>
+                      <a:tailEnd type="none" w="med" len="med"/>
+                    </a:lnB>
+                    <a:solidFill>
+                      <a:srgbClr val="081C3D"/>
+                    </a:solidFill>
+                  </a:tcPr>
+                </a:tc>
+                <a:tc>
+                  <a:txBody>
+                    <a:bodyPr/>
+                    <a:lstStyle/>
+                    <a:p>
+                      <a:pPr indent="0" marL="0">
+                        <a:buNone/>
+                      </a:pPr>
+                      <a:r>
+                        <a:rPr lang="en-US" sz="1400" b="1" dirty="0">
+                          <a:solidFill>
+                            <a:srgbClr val="FFFFFF"/>
+                          </a:solidFill>
+                          <a:latin typeface="Aptos" pitchFamily="34" charset="0"/>
+                          <a:ea typeface="Aptos" pitchFamily="34" charset="-122"/>
+                          <a:cs typeface="Aptos" pitchFamily="34" charset="-120"/>
+                        </a:rPr>
+                        <a:t>Required</a:t>
+                      </a:r>
+                      <a:endParaRPr lang="en-US" sz="1400" dirty="0">
+                        <a:latin typeface="Aptos" charset="0"/>
+                        <a:ea typeface="Aptos" charset="0"/>
+                        <a:cs typeface="Aptos" charset="0"/>
+                      </a:endParaRPr>
+                    </a:p>
+                  </a:txBody>
+                  <a:tcPr marL="36576" marR="36576" marT="27432" marB="27432" anchor="ctr">
+                    <a:lnL w="6350" cap="flat" cmpd="sng" algn="ctr">
+                      <a:solidFill>
+                        <a:srgbClr val="E5E7EB"/>
+                      </a:solidFill>
+                      <a:prstDash val="solid"/>
+                      <a:round/>
+                      <a:headEnd type="none" w="med" len="med"/>
+                      <a:tailEnd type="none" w="med" len="med"/>
+                    </a:lnL>
+                    <a:lnR w="6350" cap="flat" cmpd="sng" algn="ctr">
+                      <a:solidFill>
+                        <a:srgbClr val="E5E7EB"/>
+                      </a:solidFill>
+                      <a:prstDash val="solid"/>
+                      <a:round/>
+                      <a:headEnd type="none" w="med" len="med"/>
+                      <a:tailEnd type="none" w="med" len="med"/>
+                    </a:lnR>
+                    <a:lnT w="6350" cap="flat" cmpd="sng" algn="ctr">
+                      <a:solidFill>
+                        <a:srgbClr val="E5E7EB"/>
+                      </a:solidFill>
+                      <a:prstDash val="solid"/>
+                      <a:round/>
+                      <a:headEnd type="none" w="med" len="med"/>
+                      <a:tailEnd type="none" w="med" len="med"/>
+                    </a:lnT>
+                    <a:lnB w="6350" cap="flat" cmpd="sng" algn="ctr">
+                      <a:solidFill>
+                        <a:srgbClr val="E5E7EB"/>
+                      </a:solidFill>
+                      <a:prstDash val="solid"/>
+                      <a:round/>
+                      <a:headEnd type="none" w="med" len="med"/>
+                      <a:tailEnd type="none" w="med" len="med"/>
+                    </a:lnB>
+                    <a:solidFill>
+                      <a:srgbClr val="081C3D"/>
+                    </a:solidFill>
+                  </a:tcPr>
+                </a:tc>
+                <a:tc>
+                  <a:txBody>
+                    <a:bodyPr/>
+                    <a:lstStyle/>
+                    <a:p>
+                      <a:pPr indent="0" marL="0">
+                        <a:buNone/>
+                      </a:pPr>
+                      <a:r>
+                        <a:rPr lang="en-US" sz="1400" b="1" dirty="0">
+                          <a:solidFill>
+                            <a:srgbClr val="FFFFFF"/>
+                          </a:solidFill>
+                          <a:latin typeface="Aptos" pitchFamily="34" charset="0"/>
+                          <a:ea typeface="Aptos" pitchFamily="34" charset="-122"/>
+                          <a:cs typeface="Aptos" pitchFamily="34" charset="-120"/>
+                        </a:rPr>
+                        <a:t>Submitted</a:t>
+                      </a:r>
+                      <a:endParaRPr lang="en-US" sz="1400" dirty="0">
+                        <a:latin typeface="Aptos" charset="0"/>
+                        <a:ea typeface="Aptos" charset="0"/>
+                        <a:cs typeface="Aptos" charset="0"/>
+                      </a:endParaRPr>
+                    </a:p>
+                  </a:txBody>
+                  <a:tcPr marL="36576" marR="36576" marT="27432" marB="27432" anchor="ctr">
+                    <a:lnL w="6350" cap="flat" cmpd="sng" algn="ctr">
+                      <a:solidFill>
+                        <a:srgbClr val="E5E7EB"/>
+                      </a:solidFill>
+                      <a:prstDash val="solid"/>
+                      <a:round/>
+                      <a:headEnd type="none" w="med" len="med"/>
+                      <a:tailEnd type="none" w="med" len="med"/>
+                    </a:lnL>
+                    <a:lnR w="6350" cap="flat" cmpd="sng" algn="ctr">
+                      <a:solidFill>
+                        <a:srgbClr val="E5E7EB"/>
+                      </a:solidFill>
+                      <a:prstDash val="solid"/>
+                      <a:round/>
+                      <a:headEnd type="none" w="med" len="med"/>
+                      <a:tailEnd type="none" w="med" len="med"/>
+                    </a:lnR>
+                    <a:lnT w="6350" cap="flat" cmpd="sng" algn="ctr">
+                      <a:solidFill>
+                        <a:srgbClr val="E5E7EB"/>
+                      </a:solidFill>
+                      <a:prstDash val="solid"/>
+                      <a:round/>
+                      <a:headEnd type="none" w="med" len="med"/>
+                      <a:tailEnd type="none" w="med" len="med"/>
+                    </a:lnT>
+                    <a:lnB w="6350" cap="flat" cmpd="sng" algn="ctr">
+                      <a:solidFill>
+                        <a:srgbClr val="E5E7EB"/>
+                      </a:solidFill>
+                      <a:prstDash val="solid"/>
+                      <a:round/>
+                      <a:headEnd type="none" w="med" len="med"/>
+                      <a:tailEnd type="none" w="med" len="med"/>
+                    </a:lnB>
+                    <a:solidFill>
+                      <a:srgbClr val="081C3D"/>
+                    </a:solidFill>
+                  </a:tcPr>
+                </a:tc>
+                <a:tc>
+                  <a:txBody>
+                    <a:bodyPr/>
+                    <a:lstStyle/>
+                    <a:p>
+                      <a:pPr indent="0" marL="0">
+                        <a:buNone/>
+                      </a:pPr>
+                      <a:r>
+                        <a:rPr lang="en-US" sz="1400" b="1" dirty="0">
+                          <a:solidFill>
+                            <a:srgbClr val="FFFFFF"/>
+                          </a:solidFill>
+                          <a:latin typeface="Aptos" pitchFamily="34" charset="0"/>
+                          <a:ea typeface="Aptos" pitchFamily="34" charset="-122"/>
+                          <a:cs typeface="Aptos" pitchFamily="34" charset="-120"/>
+                        </a:rPr>
+                        <a:t>Approved</a:t>
+                      </a:r>
+                      <a:endParaRPr lang="en-US" sz="1400" dirty="0">
+                        <a:latin typeface="Aptos" charset="0"/>
+                        <a:ea typeface="Aptos" charset="0"/>
+                        <a:cs typeface="Aptos" charset="0"/>
+                      </a:endParaRPr>
+                    </a:p>
+                  </a:txBody>
+                  <a:tcPr marL="36576" marR="36576" marT="27432" marB="27432" anchor="ctr">
+                    <a:lnL w="6350" cap="flat" cmpd="sng" algn="ctr">
+                      <a:solidFill>
+                        <a:srgbClr val="E5E7EB"/>
+                      </a:solidFill>
+                      <a:prstDash val="solid"/>
+                      <a:round/>
+                      <a:headEnd type="none" w="med" len="med"/>
+                      <a:tailEnd type="none" w="med" len="med"/>
+                    </a:lnL>
+                    <a:lnR w="6350" cap="flat" cmpd="sng" algn="ctr">
+                      <a:solidFill>
+                        <a:srgbClr val="E5E7EB"/>
+                      </a:solidFill>
+                      <a:prstDash val="solid"/>
+                      <a:round/>
+                      <a:headEnd type="none" w="med" len="med"/>
+                      <a:tailEnd type="none" w="med" len="med"/>
+                    </a:lnR>
+                    <a:lnT w="6350" cap="flat" cmpd="sng" algn="ctr">
+                      <a:solidFill>
+                        <a:srgbClr val="E5E7EB"/>
+                      </a:solidFill>
+                      <a:prstDash val="solid"/>
+                      <a:round/>
+                      <a:headEnd type="none" w="med" len="med"/>
+                      <a:tailEnd type="none" w="med" len="med"/>
+                    </a:lnT>
+                    <a:lnB w="6350" cap="flat" cmpd="sng" algn="ctr">
+                      <a:solidFill>
+                        <a:srgbClr val="E5E7EB"/>
+                      </a:solidFill>
+                      <a:prstDash val="solid"/>
+                      <a:round/>
+                      <a:headEnd type="none" w="med" len="med"/>
+                      <a:tailEnd type="none" w="med" len="med"/>
+                    </a:lnB>
+                    <a:solidFill>
+                      <a:srgbClr val="081C3D"/>
+                    </a:solidFill>
+                  </a:tcPr>
+                </a:tc>
+                <a:tc>
+                  <a:txBody>
+                    <a:bodyPr/>
+                    <a:lstStyle/>
+                    <a:p>
+                      <a:pPr indent="0" marL="0">
+                        <a:buNone/>
+                      </a:pPr>
+                      <a:r>
+                        <a:rPr lang="en-US" sz="1400" b="1" dirty="0">
+                          <a:solidFill>
+                            <a:srgbClr val="FFFFFF"/>
+                          </a:solidFill>
+                          <a:latin typeface="Aptos" pitchFamily="34" charset="0"/>
+                          <a:ea typeface="Aptos" pitchFamily="34" charset="-122"/>
+                          <a:cs typeface="Aptos" pitchFamily="34" charset="-120"/>
+                        </a:rPr>
+                        <a:t>Missing</a:t>
+                      </a:r>
+                      <a:endParaRPr lang="en-US" sz="1400" dirty="0">
+                        <a:latin typeface="Aptos" charset="0"/>
+                        <a:ea typeface="Aptos" charset="0"/>
+                        <a:cs typeface="Aptos" charset="0"/>
+                      </a:endParaRPr>
+                    </a:p>
+                  </a:txBody>
+                  <a:tcPr marL="36576" marR="36576" marT="27432" marB="27432" anchor="ctr">
+                    <a:lnL w="6350" cap="flat" cmpd="sng" algn="ctr">
+                      <a:solidFill>
+                        <a:srgbClr val="E5E7EB"/>
+                      </a:solidFill>
+                      <a:prstDash val="solid"/>
+                      <a:round/>
+                      <a:headEnd type="none" w="med" len="med"/>
+                      <a:tailEnd type="none" w="med" len="med"/>
+                    </a:lnL>
+                    <a:lnR w="6350" cap="flat" cmpd="sng" algn="ctr">
+                      <a:solidFill>
+                        <a:srgbClr val="E5E7EB"/>
+                      </a:solidFill>
+                      <a:prstDash val="solid"/>
+                      <a:round/>
+                      <a:headEnd type="none" w="med" len="med"/>
+                      <a:tailEnd type="none" w="med" len="med"/>
+                    </a:lnR>
+                    <a:lnT w="6350" cap="flat" cmpd="sng" algn="ctr">
+                      <a:solidFill>
+                        <a:srgbClr val="E5E7EB"/>
+                      </a:solidFill>
+                      <a:prstDash val="solid"/>
+                      <a:round/>
+                      <a:headEnd type="none" w="med" len="med"/>
+                      <a:tailEnd type="none" w="med" len="med"/>
+                    </a:lnT>
+                    <a:lnB w="6350" cap="flat" cmpd="sng" algn="ctr">
+                      <a:solidFill>
+                        <a:srgbClr val="E5E7EB"/>
+                      </a:solidFill>
+                      <a:prstDash val="solid"/>
+                      <a:round/>
+                      <a:headEnd type="none" w="med" len="med"/>
+                      <a:tailEnd type="none" w="med" len="med"/>
+                    </a:lnB>
+                    <a:solidFill>
+                      <a:srgbClr val="081C3D"/>
+                    </a:solidFill>
+                  </a:tcPr>
+                </a:tc>
+                <a:tc>
+                  <a:txBody>
+                    <a:bodyPr/>
+                    <a:lstStyle/>
+                    <a:p>
+                      <a:pPr indent="0" marL="0">
+                        <a:buNone/>
+                      </a:pPr>
+                      <a:r>
+                        <a:rPr lang="en-US" sz="1400" b="1" dirty="0">
+                          <a:solidFill>
+                            <a:srgbClr val="FFFFFF"/>
+                          </a:solidFill>
+                          <a:latin typeface="Aptos" pitchFamily="34" charset="0"/>
+                          <a:ea typeface="Aptos" pitchFamily="34" charset="-122"/>
+                          <a:cs typeface="Aptos" pitchFamily="34" charset="-120"/>
+                        </a:rPr>
+                        <a:t>Compliance</a:t>
+                      </a:r>
+                      <a:endParaRPr lang="en-US" sz="1400" dirty="0">
+                        <a:latin typeface="Aptos" charset="0"/>
+                        <a:ea typeface="Aptos" charset="0"/>
+                        <a:cs typeface="Aptos" charset="0"/>
+                      </a:endParaRPr>
+                    </a:p>
+                  </a:txBody>
+                  <a:tcPr marL="36576" marR="36576" marT="27432" marB="27432" anchor="ctr">
+                    <a:lnL w="6350" cap="flat" cmpd="sng" algn="ctr">
+                      <a:solidFill>
+                        <a:srgbClr val="E5E7EB"/>
+                      </a:solidFill>
+                      <a:prstDash val="solid"/>
+                      <a:round/>
+                      <a:headEnd type="none" w="med" len="med"/>
+                      <a:tailEnd type="none" w="med" len="med"/>
+                    </a:lnL>
+                    <a:lnR w="6350" cap="flat" cmpd="sng" algn="ctr">
+                      <a:solidFill>
+                        <a:srgbClr val="E5E7EB"/>
+                      </a:solidFill>
+                      <a:prstDash val="solid"/>
+                      <a:round/>
+                      <a:headEnd type="none" w="med" len="med"/>
+                      <a:tailEnd type="none" w="med" len="med"/>
+                    </a:lnR>
+                    <a:lnT w="6350" cap="flat" cmpd="sng" algn="ctr">
+                      <a:solidFill>
+                        <a:srgbClr val="E5E7EB"/>
+                      </a:solidFill>
+                      <a:prstDash val="solid"/>
+                      <a:round/>
+                      <a:headEnd type="none" w="med" len="med"/>
+                      <a:tailEnd type="none" w="med" len="med"/>
+                    </a:lnT>
+                    <a:lnB w="6350" cap="flat" cmpd="sng" algn="ctr">
+                      <a:solidFill>
+                        <a:srgbClr val="E5E7EB"/>
+                      </a:solidFill>
+                      <a:prstDash val="solid"/>
+                      <a:round/>
+                      <a:headEnd type="none" w="med" len="med"/>
+                      <a:tailEnd type="none" w="med" len="med"/>
+                    </a:lnB>
+                    <a:solidFill>
+                      <a:srgbClr val="081C3D"/>
+                    </a:solidFill>
+                  </a:tcPr>
+                </a:tc>
+                <a:tc>
+                  <a:txBody>
+                    <a:bodyPr/>
+                    <a:lstStyle/>
+                    <a:p>
+                      <a:pPr indent="0" marL="0">
+                        <a:buNone/>
+                      </a:pPr>
+                      <a:r>
+                        <a:rPr lang="en-US" sz="1400" b="1" dirty="0">
+                          <a:solidFill>
+                            <a:srgbClr val="FFFFFF"/>
+                          </a:solidFill>
+                          <a:latin typeface="Aptos" pitchFamily="34" charset="0"/>
+                          <a:ea typeface="Aptos" pitchFamily="34" charset="-122"/>
+                          <a:cs typeface="Aptos" pitchFamily="34" charset="-120"/>
+                        </a:rPr>
+                        <a:t>Status</a:t>
+                      </a:r>
+                      <a:endParaRPr lang="en-US" sz="1400" dirty="0">
+                        <a:latin typeface="Aptos" charset="0"/>
+                        <a:ea typeface="Aptos" charset="0"/>
+                        <a:cs typeface="Aptos" charset="0"/>
+                      </a:endParaRPr>
+                    </a:p>
+                  </a:txBody>
+                  <a:tcPr marL="36576" marR="36576" marT="27432" marB="27432" anchor="ctr">
+                    <a:lnL w="6350" cap="flat" cmpd="sng" algn="ctr">
+                      <a:solidFill>
+                        <a:srgbClr val="E5E7EB"/>
+                      </a:solidFill>
+                      <a:prstDash val="solid"/>
+                      <a:round/>
+                      <a:headEnd type="none" w="med" len="med"/>
+                      <a:tailEnd type="none" w="med" len="med"/>
+                    </a:lnL>
+                    <a:lnR w="6350" cap="flat" cmpd="sng" algn="ctr">
+                      <a:solidFill>
+                        <a:srgbClr val="E5E7EB"/>
+                      </a:solidFill>
+                      <a:prstDash val="solid"/>
+                      <a:round/>
+                      <a:headEnd type="none" w="med" len="med"/>
+                      <a:tailEnd type="none" w="med" len="med"/>
+                    </a:lnR>
+                    <a:lnT w="6350" cap="flat" cmpd="sng" algn="ctr">
+                      <a:solidFill>
+                        <a:srgbClr val="E5E7EB"/>
+                      </a:solidFill>
+                      <a:prstDash val="solid"/>
+                      <a:round/>
+                      <a:headEnd type="none" w="med" len="med"/>
+                      <a:tailEnd type="none" w="med" len="med"/>
+                    </a:lnT>
+                    <a:lnB w="6350" cap="flat" cmpd="sng" algn="ctr">
+                      <a:solidFill>
+                        <a:srgbClr val="E5E7EB"/>
+                      </a:solidFill>
+                      <a:prstDash val="solid"/>
+                      <a:round/>
+                      <a:headEnd type="none" w="med" len="med"/>
+                      <a:tailEnd type="none" w="med" len="med"/>
+                    </a:lnB>
+                    <a:solidFill>
+                      <a:srgbClr val="081C3D"/>
+                    </a:solidFill>
+                  </a:tcPr>
+                </a:tc>
+              </a:tr>
+              <a:tr h="365760">
+                <a:tc>
+                  <a:txBody>
+                    <a:bodyPr/>
+                    <a:lstStyle/>
+                    <a:p>
+                      <a:pPr indent="0" marL="0">
+                        <a:buNone/>
+                      </a:pPr>
+                      <a:r>
+                        <a:rPr lang="en-US" sz="1400" dirty="0">
+                          <a:solidFill>
+                            <a:srgbClr val="1F2937"/>
+                          </a:solidFill>
+                          <a:latin typeface="Aptos" pitchFamily="34" charset="0"/>
+                          <a:ea typeface="Aptos" pitchFamily="34" charset="-122"/>
+                          <a:cs typeface="Aptos" pitchFamily="34" charset="-120"/>
+                        </a:rPr>
+                        <a:t>AGLIPAY STP</a:t>
+                      </a:r>
+                      <a:endParaRPr lang="en-US" sz="1400" dirty="0">
+                        <a:latin typeface="Aptos" charset="0"/>
+                        <a:ea typeface="Aptos" charset="0"/>
+                        <a:cs typeface="Aptos" charset="0"/>
+                      </a:endParaRPr>
+                    </a:p>
+                  </a:txBody>
+                  <a:tcPr marL="36576" marR="36576" marT="27432" marB="27432" anchor="ctr">
                     <a:lnL w="6350" cap="flat" cmpd="sng" algn="ctr">
                       <a:solidFill>
                         <a:srgbClr val="E5E7EB"/>
@@ -2372,17 +4976,24 @@
                         <a:buNone/>
                       </a:pPr>
                       <a:r>
-                        <a:rPr lang="en-US" sz="900" dirty="0">
+                        <a:rPr lang="en-US" sz="1400" dirty="0">
                           <a:solidFill>
-                            <a:srgbClr val="000000"/>
+                            <a:srgbClr val="1F2937"/>
                           </a:solidFill>
+                          <a:latin typeface="Aptos" pitchFamily="34" charset="0"/>
+                          <a:ea typeface="Aptos" pitchFamily="34" charset="-122"/>
+                          <a:cs typeface="Aptos" pitchFamily="34" charset="-120"/>
                         </a:rPr>
-                        <a:t>Required</a:t>
+                        <a:t>14</a:t>
                       </a:r>
-                      <a:endParaRPr lang="en-US" sz="900" dirty="0"/>
+                      <a:endParaRPr lang="en-US" sz="1400" dirty="0">
+                        <a:latin typeface="Aptos" charset="0"/>
+                        <a:ea typeface="Aptos" charset="0"/>
+                        <a:cs typeface="Aptos" charset="0"/>
+                      </a:endParaRPr>
                     </a:p>
                   </a:txBody>
-                  <a:tcPr marL="91440" marR="91440" marT="45720" marB="45720">
+                  <a:tcPr marL="36576" marR="36576" marT="27432" marB="27432" anchor="ctr">
                     <a:lnL w="6350" cap="flat" cmpd="sng" algn="ctr">
                       <a:solidFill>
                         <a:srgbClr val="E5E7EB"/>
@@ -2433,17 +5044,24 @@
                         <a:buNone/>
                       </a:pPr>
                       <a:r>
-                        <a:rPr lang="en-US" sz="900" dirty="0">
+                        <a:rPr lang="en-US" sz="1400" dirty="0">
                           <a:solidFill>
-                            <a:srgbClr val="000000"/>
+                            <a:srgbClr val="1F2937"/>
                           </a:solidFill>
+                          <a:latin typeface="Aptos" pitchFamily="34" charset="0"/>
+                          <a:ea typeface="Aptos" pitchFamily="34" charset="-122"/>
+                          <a:cs typeface="Aptos" pitchFamily="34" charset="-120"/>
                         </a:rPr>
-                        <a:t>Submitted</a:t>
+                        <a:t>3</a:t>
                       </a:r>
-                      <a:endParaRPr lang="en-US" sz="900" dirty="0"/>
+                      <a:endParaRPr lang="en-US" sz="1400" dirty="0">
+                        <a:latin typeface="Aptos" charset="0"/>
+                        <a:ea typeface="Aptos" charset="0"/>
+                        <a:cs typeface="Aptos" charset="0"/>
+                      </a:endParaRPr>
                     </a:p>
                   </a:txBody>
-                  <a:tcPr marL="91440" marR="91440" marT="45720" marB="45720">
+                  <a:tcPr marL="36576" marR="36576" marT="27432" marB="27432" anchor="ctr">
                     <a:lnL w="6350" cap="flat" cmpd="sng" algn="ctr">
                       <a:solidFill>
                         <a:srgbClr val="E5E7EB"/>
@@ -2494,17 +5112,24 @@
                         <a:buNone/>
                       </a:pPr>
                       <a:r>
-                        <a:rPr lang="en-US" sz="900" dirty="0">
+                        <a:rPr lang="en-US" sz="1400" dirty="0">
                           <a:solidFill>
-                            <a:srgbClr val="000000"/>
+                            <a:srgbClr val="1F2937"/>
                           </a:solidFill>
+                          <a:latin typeface="Aptos" pitchFamily="34" charset="0"/>
+                          <a:ea typeface="Aptos" pitchFamily="34" charset="-122"/>
+                          <a:cs typeface="Aptos" pitchFamily="34" charset="-120"/>
                         </a:rPr>
-                        <a:t>Approved</a:t>
+                        <a:t>3</a:t>
                       </a:r>
-                      <a:endParaRPr lang="en-US" sz="900" dirty="0"/>
+                      <a:endParaRPr lang="en-US" sz="1400" dirty="0">
+                        <a:latin typeface="Aptos" charset="0"/>
+                        <a:ea typeface="Aptos" charset="0"/>
+                        <a:cs typeface="Aptos" charset="0"/>
+                      </a:endParaRPr>
                     </a:p>
                   </a:txBody>
-                  <a:tcPr marL="91440" marR="91440" marT="45720" marB="45720">
+                  <a:tcPr marL="36576" marR="36576" marT="27432" marB="27432" anchor="ctr">
                     <a:lnL w="6350" cap="flat" cmpd="sng" algn="ctr">
                       <a:solidFill>
                         <a:srgbClr val="E5E7EB"/>
@@ -2555,17 +5180,24 @@
                         <a:buNone/>
                       </a:pPr>
                       <a:r>
-                        <a:rPr lang="en-US" sz="900" dirty="0">
+                        <a:rPr lang="en-US" sz="1400" dirty="0">
                           <a:solidFill>
-                            <a:srgbClr val="000000"/>
+                            <a:srgbClr val="1F2937"/>
                           </a:solidFill>
+                          <a:latin typeface="Aptos" pitchFamily="34" charset="0"/>
+                          <a:ea typeface="Aptos" pitchFamily="34" charset="-122"/>
+                          <a:cs typeface="Aptos" pitchFamily="34" charset="-120"/>
                         </a:rPr>
-                        <a:t>Missing</a:t>
+                        <a:t>11</a:t>
                       </a:r>
-                      <a:endParaRPr lang="en-US" sz="900" dirty="0"/>
+                      <a:endParaRPr lang="en-US" sz="1400" dirty="0">
+                        <a:latin typeface="Aptos" charset="0"/>
+                        <a:ea typeface="Aptos" charset="0"/>
+                        <a:cs typeface="Aptos" charset="0"/>
+                      </a:endParaRPr>
                     </a:p>
                   </a:txBody>
-                  <a:tcPr marL="91440" marR="91440" marT="45720" marB="45720">
+                  <a:tcPr marL="36576" marR="36576" marT="27432" marB="27432" anchor="ctr">
                     <a:lnL w="6350" cap="flat" cmpd="sng" algn="ctr">
                       <a:solidFill>
                         <a:srgbClr val="E5E7EB"/>
@@ -2616,17 +5248,24 @@
                         <a:buNone/>
                       </a:pPr>
                       <a:r>
-                        <a:rPr lang="en-US" sz="900" dirty="0">
+                        <a:rPr lang="en-US" sz="1400" dirty="0">
                           <a:solidFill>
-                            <a:srgbClr val="000000"/>
+                            <a:srgbClr val="1F2937"/>
                           </a:solidFill>
+                          <a:latin typeface="Aptos" pitchFamily="34" charset="0"/>
+                          <a:ea typeface="Aptos" pitchFamily="34" charset="-122"/>
+                          <a:cs typeface="Aptos" pitchFamily="34" charset="-120"/>
                         </a:rPr>
-                        <a:t>Compliance</a:t>
+                        <a:t>21.4%</a:t>
                       </a:r>
-                      <a:endParaRPr lang="en-US" sz="900" dirty="0"/>
+                      <a:endParaRPr lang="en-US" sz="1400" dirty="0">
+                        <a:latin typeface="Aptos" charset="0"/>
+                        <a:ea typeface="Aptos" charset="0"/>
+                        <a:cs typeface="Aptos" charset="0"/>
+                      </a:endParaRPr>
                     </a:p>
                   </a:txBody>
-                  <a:tcPr marL="91440" marR="91440" marT="45720" marB="45720">
+                  <a:tcPr marL="36576" marR="36576" marT="27432" marB="27432" anchor="ctr">
                     <a:lnL w="6350" cap="flat" cmpd="sng" algn="ctr">
                       <a:solidFill>
                         <a:srgbClr val="E5E7EB"/>
@@ -2677,17 +5316,24 @@
                         <a:buNone/>
                       </a:pPr>
                       <a:r>
-                        <a:rPr lang="en-US" sz="900" dirty="0">
+                        <a:rPr lang="en-US" sz="1400" dirty="0">
                           <a:solidFill>
-                            <a:srgbClr val="000000"/>
+                            <a:srgbClr val="1F2937"/>
                           </a:solidFill>
+                          <a:latin typeface="Aptos" pitchFamily="34" charset="0"/>
+                          <a:ea typeface="Aptos" pitchFamily="34" charset="-122"/>
+                          <a:cs typeface="Aptos" pitchFamily="34" charset="-120"/>
                         </a:rPr>
-                        <a:t>Status</a:t>
+                        <a:t>At Risk</a:t>
                       </a:r>
-                      <a:endParaRPr lang="en-US" sz="900" dirty="0"/>
+                      <a:endParaRPr lang="en-US" sz="1400" dirty="0">
+                        <a:latin typeface="Aptos" charset="0"/>
+                        <a:ea typeface="Aptos" charset="0"/>
+                        <a:cs typeface="Aptos" charset="0"/>
+                      </a:endParaRPr>
                     </a:p>
                   </a:txBody>
-                  <a:tcPr marL="91440" marR="91440" marT="45720" marB="45720">
+                  <a:tcPr marL="36576" marR="36576" marT="27432" marB="27432" anchor="ctr">
                     <a:lnL w="6350" cap="flat" cmpd="sng" algn="ctr">
                       <a:solidFill>
                         <a:srgbClr val="E5E7EB"/>
@@ -2725,12 +5371,12 @@
                       <a:tailEnd type="none" w="med" len="med"/>
                     </a:lnB>
                     <a:solidFill>
-                      <a:srgbClr val="FFFFFF"/>
+                      <a:srgbClr val="FEE2E2"/>
                     </a:solidFill>
                   </a:tcPr>
                 </a:tc>
               </a:tr>
-              <a:tr h="457200">
+              <a:tr h="365760">
                 <a:tc>
                   <a:txBody>
                     <a:bodyPr/>
@@ -2740,17 +5386,24 @@
                         <a:buNone/>
                       </a:pPr>
                       <a:r>
-                        <a:rPr lang="en-US" sz="900" dirty="0">
+                        <a:rPr lang="en-US" sz="1400" dirty="0">
                           <a:solidFill>
-                            <a:srgbClr val="000000"/>
+                            <a:srgbClr val="1F2937"/>
                           </a:solidFill>
+                          <a:latin typeface="Aptos" pitchFamily="34" charset="0"/>
+                          <a:ea typeface="Aptos" pitchFamily="34" charset="-122"/>
+                          <a:cs typeface="Aptos" pitchFamily="34" charset="-120"/>
                         </a:rPr>
-                        <a:t>AGLIPAY STP</a:t>
+                        <a:t>HTT STP</a:t>
                       </a:r>
-                      <a:endParaRPr lang="en-US" sz="900" dirty="0"/>
+                      <a:endParaRPr lang="en-US" sz="1400" dirty="0">
+                        <a:latin typeface="Aptos" charset="0"/>
+                        <a:ea typeface="Aptos" charset="0"/>
+                        <a:cs typeface="Aptos" charset="0"/>
+                      </a:endParaRPr>
                     </a:p>
                   </a:txBody>
-                  <a:tcPr marL="91440" marR="91440" marT="45720" marB="45720">
+                  <a:tcPr marL="36576" marR="36576" marT="27432" marB="27432" anchor="ctr">
                     <a:lnL w="6350" cap="flat" cmpd="sng" algn="ctr">
                       <a:solidFill>
                         <a:srgbClr val="E5E7EB"/>
@@ -2801,17 +5454,24 @@
                         <a:buNone/>
                       </a:pPr>
                       <a:r>
-                        <a:rPr lang="en-US" sz="900" dirty="0">
+                        <a:rPr lang="en-US" sz="1400" dirty="0">
                           <a:solidFill>
-                            <a:srgbClr val="000000"/>
+                            <a:srgbClr val="1F2937"/>
                           </a:solidFill>
+                          <a:latin typeface="Aptos" pitchFamily="34" charset="0"/>
+                          <a:ea typeface="Aptos" pitchFamily="34" charset="-122"/>
+                          <a:cs typeface="Aptos" pitchFamily="34" charset="-120"/>
                         </a:rPr>
                         <a:t>14</a:t>
                       </a:r>
-                      <a:endParaRPr lang="en-US" sz="900" dirty="0"/>
+                      <a:endParaRPr lang="en-US" sz="1400" dirty="0">
+                        <a:latin typeface="Aptos" charset="0"/>
+                        <a:ea typeface="Aptos" charset="0"/>
+                        <a:cs typeface="Aptos" charset="0"/>
+                      </a:endParaRPr>
                     </a:p>
                   </a:txBody>
-                  <a:tcPr marL="91440" marR="91440" marT="45720" marB="45720">
+                  <a:tcPr marL="36576" marR="36576" marT="27432" marB="27432" anchor="ctr">
                     <a:lnL w="6350" cap="flat" cmpd="sng" algn="ctr">
                       <a:solidFill>
                         <a:srgbClr val="E5E7EB"/>
@@ -2862,17 +5522,24 @@
                         <a:buNone/>
                       </a:pPr>
                       <a:r>
-                        <a:rPr lang="en-US" sz="900" dirty="0">
+                        <a:rPr lang="en-US" sz="1400" dirty="0">
                           <a:solidFill>
-                            <a:srgbClr val="000000"/>
+                            <a:srgbClr val="1F2937"/>
                           </a:solidFill>
+                          <a:latin typeface="Aptos" pitchFamily="34" charset="0"/>
+                          <a:ea typeface="Aptos" pitchFamily="34" charset="-122"/>
+                          <a:cs typeface="Aptos" pitchFamily="34" charset="-120"/>
                         </a:rPr>
-                        <a:t>3</a:t>
+                        <a:t>11</a:t>
                       </a:r>
-                      <a:endParaRPr lang="en-US" sz="900" dirty="0"/>
+                      <a:endParaRPr lang="en-US" sz="1400" dirty="0">
+                        <a:latin typeface="Aptos" charset="0"/>
+                        <a:ea typeface="Aptos" charset="0"/>
+                        <a:cs typeface="Aptos" charset="0"/>
+                      </a:endParaRPr>
                     </a:p>
                   </a:txBody>
-                  <a:tcPr marL="91440" marR="91440" marT="45720" marB="45720">
+                  <a:tcPr marL="36576" marR="36576" marT="27432" marB="27432" anchor="ctr">
                     <a:lnL w="6350" cap="flat" cmpd="sng" algn="ctr">
                       <a:solidFill>
                         <a:srgbClr val="E5E7EB"/>
@@ -2923,17 +5590,24 @@
                         <a:buNone/>
                       </a:pPr>
                       <a:r>
-                        <a:rPr lang="en-US" sz="900" dirty="0">
+                        <a:rPr lang="en-US" sz="1400" dirty="0">
                           <a:solidFill>
-                            <a:srgbClr val="000000"/>
+                            <a:srgbClr val="1F2937"/>
                           </a:solidFill>
+                          <a:latin typeface="Aptos" pitchFamily="34" charset="0"/>
+                          <a:ea typeface="Aptos" pitchFamily="34" charset="-122"/>
+                          <a:cs typeface="Aptos" pitchFamily="34" charset="-120"/>
                         </a:rPr>
-                        <a:t>3</a:t>
+                        <a:t>11</a:t>
                       </a:r>
-                      <a:endParaRPr lang="en-US" sz="900" dirty="0"/>
+                      <a:endParaRPr lang="en-US" sz="1400" dirty="0">
+                        <a:latin typeface="Aptos" charset="0"/>
+                        <a:ea typeface="Aptos" charset="0"/>
+                        <a:cs typeface="Aptos" charset="0"/>
+                      </a:endParaRPr>
                     </a:p>
                   </a:txBody>
-                  <a:tcPr marL="91440" marR="91440" marT="45720" marB="45720">
+                  <a:tcPr marL="36576" marR="36576" marT="27432" marB="27432" anchor="ctr">
                     <a:lnL w="6350" cap="flat" cmpd="sng" algn="ctr">
                       <a:solidFill>
                         <a:srgbClr val="E5E7EB"/>
@@ -2984,17 +5658,24 @@
                         <a:buNone/>
                       </a:pPr>
                       <a:r>
-                        <a:rPr lang="en-US" sz="900" dirty="0">
+                        <a:rPr lang="en-US" sz="1400" dirty="0">
                           <a:solidFill>
-                            <a:srgbClr val="000000"/>
+                            <a:srgbClr val="1F2937"/>
                           </a:solidFill>
+                          <a:latin typeface="Aptos" pitchFamily="34" charset="0"/>
+                          <a:ea typeface="Aptos" pitchFamily="34" charset="-122"/>
+                          <a:cs typeface="Aptos" pitchFamily="34" charset="-120"/>
                         </a:rPr>
-                        <a:t>11</a:t>
+                        <a:t>3</a:t>
                       </a:r>
-                      <a:endParaRPr lang="en-US" sz="900" dirty="0"/>
+                      <a:endParaRPr lang="en-US" sz="1400" dirty="0">
+                        <a:latin typeface="Aptos" charset="0"/>
+                        <a:ea typeface="Aptos" charset="0"/>
+                        <a:cs typeface="Aptos" charset="0"/>
+                      </a:endParaRPr>
                     </a:p>
                   </a:txBody>
-                  <a:tcPr marL="91440" marR="91440" marT="45720" marB="45720">
+                  <a:tcPr marL="36576" marR="36576" marT="27432" marB="27432" anchor="ctr">
                     <a:lnL w="6350" cap="flat" cmpd="sng" algn="ctr">
                       <a:solidFill>
                         <a:srgbClr val="E5E7EB"/>
@@ -3045,17 +5726,24 @@
                         <a:buNone/>
                       </a:pPr>
                       <a:r>
-                        <a:rPr lang="en-US" sz="900" dirty="0">
+                        <a:rPr lang="en-US" sz="1400" dirty="0">
                           <a:solidFill>
-                            <a:srgbClr val="000000"/>
+                            <a:srgbClr val="1F2937"/>
                           </a:solidFill>
+                          <a:latin typeface="Aptos" pitchFamily="34" charset="0"/>
+                          <a:ea typeface="Aptos" pitchFamily="34" charset="-122"/>
+                          <a:cs typeface="Aptos" pitchFamily="34" charset="-120"/>
                         </a:rPr>
-                        <a:t>21.4%</a:t>
+                        <a:t>78.6%</a:t>
                       </a:r>
-                      <a:endParaRPr lang="en-US" sz="900" dirty="0"/>
+                      <a:endParaRPr lang="en-US" sz="1400" dirty="0">
+                        <a:latin typeface="Aptos" charset="0"/>
+                        <a:ea typeface="Aptos" charset="0"/>
+                        <a:cs typeface="Aptos" charset="0"/>
+                      </a:endParaRPr>
                     </a:p>
                   </a:txBody>
-                  <a:tcPr marL="91440" marR="91440" marT="45720" marB="45720">
+                  <a:tcPr marL="36576" marR="36576" marT="27432" marB="27432" anchor="ctr">
                     <a:lnL w="6350" cap="flat" cmpd="sng" algn="ctr">
                       <a:solidFill>
                         <a:srgbClr val="E5E7EB"/>
@@ -3106,17 +5794,24 @@
                         <a:buNone/>
                       </a:pPr>
                       <a:r>
-                        <a:rPr lang="en-US" sz="900" dirty="0">
+                        <a:rPr lang="en-US" sz="1400" dirty="0">
                           <a:solidFill>
-                            <a:srgbClr val="000000"/>
+                            <a:srgbClr val="1F2937"/>
                           </a:solidFill>
+                          <a:latin typeface="Aptos" pitchFamily="34" charset="0"/>
+                          <a:ea typeface="Aptos" pitchFamily="34" charset="-122"/>
+                          <a:cs typeface="Aptos" pitchFamily="34" charset="-120"/>
                         </a:rPr>
-                        <a:t>At Risk</a:t>
+                        <a:t>In Progress</a:t>
                       </a:r>
-                      <a:endParaRPr lang="en-US" sz="900" dirty="0"/>
+                      <a:endParaRPr lang="en-US" sz="1400" dirty="0">
+                        <a:latin typeface="Aptos" charset="0"/>
+                        <a:ea typeface="Aptos" charset="0"/>
+                        <a:cs typeface="Aptos" charset="0"/>
+                      </a:endParaRPr>
                     </a:p>
                   </a:txBody>
-                  <a:tcPr marL="91440" marR="91440" marT="45720" marB="45720">
+                  <a:tcPr marL="36576" marR="36576" marT="27432" marB="27432" anchor="ctr">
                     <a:lnL w="6350" cap="flat" cmpd="sng" algn="ctr">
                       <a:solidFill>
                         <a:srgbClr val="E5E7EB"/>
@@ -3154,12 +5849,12 @@
                       <a:tailEnd type="none" w="med" len="med"/>
                     </a:lnB>
                     <a:solidFill>
-                      <a:srgbClr val="FFFFFF"/>
+                      <a:srgbClr val="FEF3C7"/>
                     </a:solidFill>
                   </a:tcPr>
                 </a:tc>
               </a:tr>
-              <a:tr h="457200">
+              <a:tr h="365760">
                 <a:tc>
                   <a:txBody>
                     <a:bodyPr/>
@@ -3169,17 +5864,24 @@
                         <a:buNone/>
                       </a:pPr>
                       <a:r>
-                        <a:rPr lang="en-US" sz="900" dirty="0">
+                        <a:rPr lang="en-US" sz="1400" dirty="0">
                           <a:solidFill>
-                            <a:srgbClr val="000000"/>
+                            <a:srgbClr val="1F2937"/>
                           </a:solidFill>
+                          <a:latin typeface="Aptos" pitchFamily="34" charset="0"/>
+                          <a:ea typeface="Aptos" pitchFamily="34" charset="-122"/>
+                          <a:cs typeface="Aptos" pitchFamily="34" charset="-120"/>
                         </a:rPr>
-                        <a:t>HTT STP</a:t>
+                        <a:t>EASTBAY PH-2 TP</a:t>
                       </a:r>
-                      <a:endParaRPr lang="en-US" sz="900" dirty="0"/>
+                      <a:endParaRPr lang="en-US" sz="1400" dirty="0">
+                        <a:latin typeface="Aptos" charset="0"/>
+                        <a:ea typeface="Aptos" charset="0"/>
+                        <a:cs typeface="Aptos" charset="0"/>
+                      </a:endParaRPr>
                     </a:p>
                   </a:txBody>
-                  <a:tcPr marL="91440" marR="91440" marT="45720" marB="45720">
+                  <a:tcPr marL="36576" marR="36576" marT="27432" marB="27432" anchor="ctr">
                     <a:lnL w="6350" cap="flat" cmpd="sng" algn="ctr">
                       <a:solidFill>
                         <a:srgbClr val="E5E7EB"/>
@@ -3230,17 +5932,24 @@
                         <a:buNone/>
                       </a:pPr>
                       <a:r>
-                        <a:rPr lang="en-US" sz="900" dirty="0">
+                        <a:rPr lang="en-US" sz="1400" dirty="0">
                           <a:solidFill>
-                            <a:srgbClr val="000000"/>
+                            <a:srgbClr val="1F2937"/>
                           </a:solidFill>
+                          <a:latin typeface="Aptos" pitchFamily="34" charset="0"/>
+                          <a:ea typeface="Aptos" pitchFamily="34" charset="-122"/>
+                          <a:cs typeface="Aptos" pitchFamily="34" charset="-120"/>
                         </a:rPr>
                         <a:t>14</a:t>
                       </a:r>
-                      <a:endParaRPr lang="en-US" sz="900" dirty="0"/>
+                      <a:endParaRPr lang="en-US" sz="1400" dirty="0">
+                        <a:latin typeface="Aptos" charset="0"/>
+                        <a:ea typeface="Aptos" charset="0"/>
+                        <a:cs typeface="Aptos" charset="0"/>
+                      </a:endParaRPr>
                     </a:p>
                   </a:txBody>
-                  <a:tcPr marL="91440" marR="91440" marT="45720" marB="45720">
+                  <a:tcPr marL="36576" marR="36576" marT="27432" marB="27432" anchor="ctr">
                     <a:lnL w="6350" cap="flat" cmpd="sng" algn="ctr">
                       <a:solidFill>
                         <a:srgbClr val="E5E7EB"/>
@@ -3291,17 +6000,24 @@
                         <a:buNone/>
                       </a:pPr>
                       <a:r>
-                        <a:rPr lang="en-US" sz="900" dirty="0">
+                        <a:rPr lang="en-US" sz="1400" dirty="0">
                           <a:solidFill>
-                            <a:srgbClr val="000000"/>
+                            <a:srgbClr val="1F2937"/>
                           </a:solidFill>
+                          <a:latin typeface="Aptos" pitchFamily="34" charset="0"/>
+                          <a:ea typeface="Aptos" pitchFamily="34" charset="-122"/>
+                          <a:cs typeface="Aptos" pitchFamily="34" charset="-120"/>
                         </a:rPr>
-                        <a:t>11</a:t>
+                        <a:t>4</a:t>
                       </a:r>
-                      <a:endParaRPr lang="en-US" sz="900" dirty="0"/>
+                      <a:endParaRPr lang="en-US" sz="1400" dirty="0">
+                        <a:latin typeface="Aptos" charset="0"/>
+                        <a:ea typeface="Aptos" charset="0"/>
+                        <a:cs typeface="Aptos" charset="0"/>
+                      </a:endParaRPr>
                     </a:p>
                   </a:txBody>
-                  <a:tcPr marL="91440" marR="91440" marT="45720" marB="45720">
+                  <a:tcPr marL="36576" marR="36576" marT="27432" marB="27432" anchor="ctr">
                     <a:lnL w="6350" cap="flat" cmpd="sng" algn="ctr">
                       <a:solidFill>
                         <a:srgbClr val="E5E7EB"/>
@@ -3352,17 +6068,24 @@
                         <a:buNone/>
                       </a:pPr>
                       <a:r>
-                        <a:rPr lang="en-US" sz="900" dirty="0">
+                        <a:rPr lang="en-US" sz="1400" dirty="0">
                           <a:solidFill>
-                            <a:srgbClr val="000000"/>
+                            <a:srgbClr val="1F2937"/>
                           </a:solidFill>
+                          <a:latin typeface="Aptos" pitchFamily="34" charset="0"/>
+                          <a:ea typeface="Aptos" pitchFamily="34" charset="-122"/>
+                          <a:cs typeface="Aptos" pitchFamily="34" charset="-120"/>
                         </a:rPr>
-                        <a:t>11</a:t>
+                        <a:t>4</a:t>
                       </a:r>
-                      <a:endParaRPr lang="en-US" sz="900" dirty="0"/>
+                      <a:endParaRPr lang="en-US" sz="1400" dirty="0">
+                        <a:latin typeface="Aptos" charset="0"/>
+                        <a:ea typeface="Aptos" charset="0"/>
+                        <a:cs typeface="Aptos" charset="0"/>
+                      </a:endParaRPr>
                     </a:p>
                   </a:txBody>
-                  <a:tcPr marL="91440" marR="91440" marT="45720" marB="45720">
+                  <a:tcPr marL="36576" marR="36576" marT="27432" marB="27432" anchor="ctr">
                     <a:lnL w="6350" cap="flat" cmpd="sng" algn="ctr">
                       <a:solidFill>
                         <a:srgbClr val="E5E7EB"/>
@@ -3413,17 +6136,24 @@
                         <a:buNone/>
                       </a:pPr>
                       <a:r>
-                        <a:rPr lang="en-US" sz="900" dirty="0">
+                        <a:rPr lang="en-US" sz="1400" dirty="0">
                           <a:solidFill>
-                            <a:srgbClr val="000000"/>
+                            <a:srgbClr val="1F2937"/>
                           </a:solidFill>
+                          <a:latin typeface="Aptos" pitchFamily="34" charset="0"/>
+                          <a:ea typeface="Aptos" pitchFamily="34" charset="-122"/>
+                          <a:cs typeface="Aptos" pitchFamily="34" charset="-120"/>
                         </a:rPr>
-                        <a:t>3</a:t>
+                        <a:t>10</a:t>
                       </a:r>
-                      <a:endParaRPr lang="en-US" sz="900" dirty="0"/>
+                      <a:endParaRPr lang="en-US" sz="1400" dirty="0">
+                        <a:latin typeface="Aptos" charset="0"/>
+                        <a:ea typeface="Aptos" charset="0"/>
+                        <a:cs typeface="Aptos" charset="0"/>
+                      </a:endParaRPr>
                     </a:p>
                   </a:txBody>
-                  <a:tcPr marL="91440" marR="91440" marT="45720" marB="45720">
+                  <a:tcPr marL="36576" marR="36576" marT="27432" marB="27432" anchor="ctr">
                     <a:lnL w="6350" cap="flat" cmpd="sng" algn="ctr">
                       <a:solidFill>
                         <a:srgbClr val="E5E7EB"/>
@@ -3474,17 +6204,24 @@
                         <a:buNone/>
                       </a:pPr>
                       <a:r>
-                        <a:rPr lang="en-US" sz="900" dirty="0">
+                        <a:rPr lang="en-US" sz="1400" dirty="0">
                           <a:solidFill>
-                            <a:srgbClr val="000000"/>
+                            <a:srgbClr val="1F2937"/>
                           </a:solidFill>
+                          <a:latin typeface="Aptos" pitchFamily="34" charset="0"/>
+                          <a:ea typeface="Aptos" pitchFamily="34" charset="-122"/>
+                          <a:cs typeface="Aptos" pitchFamily="34" charset="-120"/>
                         </a:rPr>
-                        <a:t>78.6%</a:t>
+                        <a:t>28.6%</a:t>
                       </a:r>
-                      <a:endParaRPr lang="en-US" sz="900" dirty="0"/>
+                      <a:endParaRPr lang="en-US" sz="1400" dirty="0">
+                        <a:latin typeface="Aptos" charset="0"/>
+                        <a:ea typeface="Aptos" charset="0"/>
+                        <a:cs typeface="Aptos" charset="0"/>
+                      </a:endParaRPr>
                     </a:p>
                   </a:txBody>
-                  <a:tcPr marL="91440" marR="91440" marT="45720" marB="45720">
+                  <a:tcPr marL="36576" marR="36576" marT="27432" marB="27432" anchor="ctr">
                     <a:lnL w="6350" cap="flat" cmpd="sng" algn="ctr">
                       <a:solidFill>
                         <a:srgbClr val="E5E7EB"/>
@@ -3535,17 +6272,24 @@
                         <a:buNone/>
                       </a:pPr>
                       <a:r>
-                        <a:rPr lang="en-US" sz="900" dirty="0">
+                        <a:rPr lang="en-US" sz="1400" dirty="0">
                           <a:solidFill>
-                            <a:srgbClr val="000000"/>
+                            <a:srgbClr val="1F2937"/>
                           </a:solidFill>
+                          <a:latin typeface="Aptos" pitchFamily="34" charset="0"/>
+                          <a:ea typeface="Aptos" pitchFamily="34" charset="-122"/>
+                          <a:cs typeface="Aptos" pitchFamily="34" charset="-120"/>
                         </a:rPr>
-                        <a:t>In Progress</a:t>
+                        <a:t>At Risk</a:t>
                       </a:r>
-                      <a:endParaRPr lang="en-US" sz="900" dirty="0"/>
+                      <a:endParaRPr lang="en-US" sz="1400" dirty="0">
+                        <a:latin typeface="Aptos" charset="0"/>
+                        <a:ea typeface="Aptos" charset="0"/>
+                        <a:cs typeface="Aptos" charset="0"/>
+                      </a:endParaRPr>
                     </a:p>
                   </a:txBody>
-                  <a:tcPr marL="91440" marR="91440" marT="45720" marB="45720">
+                  <a:tcPr marL="36576" marR="36576" marT="27432" marB="27432" anchor="ctr">
                     <a:lnL w="6350" cap="flat" cmpd="sng" algn="ctr">
                       <a:solidFill>
                         <a:srgbClr val="E5E7EB"/>
@@ -3583,12 +6327,12 @@
                       <a:tailEnd type="none" w="med" len="med"/>
                     </a:lnB>
                     <a:solidFill>
-                      <a:srgbClr val="FFFFFF"/>
+                      <a:srgbClr val="FEE2E2"/>
                     </a:solidFill>
                   </a:tcPr>
                 </a:tc>
               </a:tr>
-              <a:tr h="457200">
+              <a:tr h="365760">
                 <a:tc>
                   <a:txBody>
                     <a:bodyPr/>
@@ -3598,17 +6342,24 @@
                         <a:buNone/>
                       </a:pPr>
                       <a:r>
-                        <a:rPr lang="en-US" sz="900" dirty="0">
+                        <a:rPr lang="en-US" sz="1400" dirty="0">
                           <a:solidFill>
-                            <a:srgbClr val="000000"/>
+                            <a:srgbClr val="1F2937"/>
                           </a:solidFill>
+                          <a:latin typeface="Aptos" pitchFamily="34" charset="0"/>
+                          <a:ea typeface="Aptos" pitchFamily="34" charset="-122"/>
+                          <a:cs typeface="Aptos" pitchFamily="34" charset="-120"/>
                         </a:rPr>
-                        <a:t>EASTBAY PH-2 TP</a:t>
+                        <a:t>KAYSAKAT TP</a:t>
                       </a:r>
-                      <a:endParaRPr lang="en-US" sz="900" dirty="0"/>
+                      <a:endParaRPr lang="en-US" sz="1400" dirty="0">
+                        <a:latin typeface="Aptos" charset="0"/>
+                        <a:ea typeface="Aptos" charset="0"/>
+                        <a:cs typeface="Aptos" charset="0"/>
+                      </a:endParaRPr>
                     </a:p>
                   </a:txBody>
-                  <a:tcPr marL="91440" marR="91440" marT="45720" marB="45720">
+                  <a:tcPr marL="36576" marR="36576" marT="27432" marB="27432" anchor="ctr">
                     <a:lnL w="6350" cap="flat" cmpd="sng" algn="ctr">
                       <a:solidFill>
                         <a:srgbClr val="E5E7EB"/>
@@ -3659,17 +6410,24 @@
                         <a:buNone/>
                       </a:pPr>
                       <a:r>
-                        <a:rPr lang="en-US" sz="900" dirty="0">
+                        <a:rPr lang="en-US" sz="1400" dirty="0">
                           <a:solidFill>
-                            <a:srgbClr val="000000"/>
+                            <a:srgbClr val="1F2937"/>
                           </a:solidFill>
+                          <a:latin typeface="Aptos" pitchFamily="34" charset="0"/>
+                          <a:ea typeface="Aptos" pitchFamily="34" charset="-122"/>
+                          <a:cs typeface="Aptos" pitchFamily="34" charset="-120"/>
                         </a:rPr>
                         <a:t>14</a:t>
                       </a:r>
-                      <a:endParaRPr lang="en-US" sz="900" dirty="0"/>
+                      <a:endParaRPr lang="en-US" sz="1400" dirty="0">
+                        <a:latin typeface="Aptos" charset="0"/>
+                        <a:ea typeface="Aptos" charset="0"/>
+                        <a:cs typeface="Aptos" charset="0"/>
+                      </a:endParaRPr>
                     </a:p>
                   </a:txBody>
-                  <a:tcPr marL="91440" marR="91440" marT="45720" marB="45720">
+                  <a:tcPr marL="36576" marR="36576" marT="27432" marB="27432" anchor="ctr">
                     <a:lnL w="6350" cap="flat" cmpd="sng" algn="ctr">
                       <a:solidFill>
                         <a:srgbClr val="E5E7EB"/>
@@ -3720,17 +6478,24 @@
                         <a:buNone/>
                       </a:pPr>
                       <a:r>
-                        <a:rPr lang="en-US" sz="900" dirty="0">
+                        <a:rPr lang="en-US" sz="1400" dirty="0">
                           <a:solidFill>
-                            <a:srgbClr val="000000"/>
+                            <a:srgbClr val="1F2937"/>
                           </a:solidFill>
+                          <a:latin typeface="Aptos" pitchFamily="34" charset="0"/>
+                          <a:ea typeface="Aptos" pitchFamily="34" charset="-122"/>
+                          <a:cs typeface="Aptos" pitchFamily="34" charset="-120"/>
                         </a:rPr>
-                        <a:t>4</a:t>
+                        <a:t>1</a:t>
                       </a:r>
-                      <a:endParaRPr lang="en-US" sz="900" dirty="0"/>
+                      <a:endParaRPr lang="en-US" sz="1400" dirty="0">
+                        <a:latin typeface="Aptos" charset="0"/>
+                        <a:ea typeface="Aptos" charset="0"/>
+                        <a:cs typeface="Aptos" charset="0"/>
+                      </a:endParaRPr>
                     </a:p>
                   </a:txBody>
-                  <a:tcPr marL="91440" marR="91440" marT="45720" marB="45720">
+                  <a:tcPr marL="36576" marR="36576" marT="27432" marB="27432" anchor="ctr">
                     <a:lnL w="6350" cap="flat" cmpd="sng" algn="ctr">
                       <a:solidFill>
                         <a:srgbClr val="E5E7EB"/>
@@ -3781,17 +6546,24 @@
                         <a:buNone/>
                       </a:pPr>
                       <a:r>
-                        <a:rPr lang="en-US" sz="900" dirty="0">
+                        <a:rPr lang="en-US" sz="1400" dirty="0">
                           <a:solidFill>
-                            <a:srgbClr val="000000"/>
+                            <a:srgbClr val="1F2937"/>
                           </a:solidFill>
+                          <a:latin typeface="Aptos" pitchFamily="34" charset="0"/>
+                          <a:ea typeface="Aptos" pitchFamily="34" charset="-122"/>
+                          <a:cs typeface="Aptos" pitchFamily="34" charset="-120"/>
                         </a:rPr>
-                        <a:t>4</a:t>
+                        <a:t>1</a:t>
                       </a:r>
-                      <a:endParaRPr lang="en-US" sz="900" dirty="0"/>
+                      <a:endParaRPr lang="en-US" sz="1400" dirty="0">
+                        <a:latin typeface="Aptos" charset="0"/>
+                        <a:ea typeface="Aptos" charset="0"/>
+                        <a:cs typeface="Aptos" charset="0"/>
+                      </a:endParaRPr>
                     </a:p>
                   </a:txBody>
-                  <a:tcPr marL="91440" marR="91440" marT="45720" marB="45720">
+                  <a:tcPr marL="36576" marR="36576" marT="27432" marB="27432" anchor="ctr">
                     <a:lnL w="6350" cap="flat" cmpd="sng" algn="ctr">
                       <a:solidFill>
                         <a:srgbClr val="E5E7EB"/>
@@ -3842,17 +6614,24 @@
                         <a:buNone/>
                       </a:pPr>
                       <a:r>
-                        <a:rPr lang="en-US" sz="900" dirty="0">
+                        <a:rPr lang="en-US" sz="1400" dirty="0">
                           <a:solidFill>
-                            <a:srgbClr val="000000"/>
+                            <a:srgbClr val="1F2937"/>
                           </a:solidFill>
+                          <a:latin typeface="Aptos" pitchFamily="34" charset="0"/>
+                          <a:ea typeface="Aptos" pitchFamily="34" charset="-122"/>
+                          <a:cs typeface="Aptos" pitchFamily="34" charset="-120"/>
                         </a:rPr>
-                        <a:t>10</a:t>
+                        <a:t>13</a:t>
                       </a:r>
-                      <a:endParaRPr lang="en-US" sz="900" dirty="0"/>
+                      <a:endParaRPr lang="en-US" sz="1400" dirty="0">
+                        <a:latin typeface="Aptos" charset="0"/>
+                        <a:ea typeface="Aptos" charset="0"/>
+                        <a:cs typeface="Aptos" charset="0"/>
+                      </a:endParaRPr>
                     </a:p>
                   </a:txBody>
-                  <a:tcPr marL="91440" marR="91440" marT="45720" marB="45720">
+                  <a:tcPr marL="36576" marR="36576" marT="27432" marB="27432" anchor="ctr">
                     <a:lnL w="6350" cap="flat" cmpd="sng" algn="ctr">
                       <a:solidFill>
                         <a:srgbClr val="E5E7EB"/>
@@ -3903,17 +6682,24 @@
                         <a:buNone/>
                       </a:pPr>
                       <a:r>
-                        <a:rPr lang="en-US" sz="900" dirty="0">
+                        <a:rPr lang="en-US" sz="1400" dirty="0">
                           <a:solidFill>
-                            <a:srgbClr val="000000"/>
+                            <a:srgbClr val="1F2937"/>
                           </a:solidFill>
+                          <a:latin typeface="Aptos" pitchFamily="34" charset="0"/>
+                          <a:ea typeface="Aptos" pitchFamily="34" charset="-122"/>
+                          <a:cs typeface="Aptos" pitchFamily="34" charset="-120"/>
                         </a:rPr>
-                        <a:t>28.6%</a:t>
+                        <a:t>7.1%</a:t>
                       </a:r>
-                      <a:endParaRPr lang="en-US" sz="900" dirty="0"/>
+                      <a:endParaRPr lang="en-US" sz="1400" dirty="0">
+                        <a:latin typeface="Aptos" charset="0"/>
+                        <a:ea typeface="Aptos" charset="0"/>
+                        <a:cs typeface="Aptos" charset="0"/>
+                      </a:endParaRPr>
                     </a:p>
                   </a:txBody>
-                  <a:tcPr marL="91440" marR="91440" marT="45720" marB="45720">
+                  <a:tcPr marL="36576" marR="36576" marT="27432" marB="27432" anchor="ctr">
                     <a:lnL w="6350" cap="flat" cmpd="sng" algn="ctr">
                       <a:solidFill>
                         <a:srgbClr val="E5E7EB"/>
@@ -3964,17 +6750,24 @@
                         <a:buNone/>
                       </a:pPr>
                       <a:r>
-                        <a:rPr lang="en-US" sz="900" dirty="0">
+                        <a:rPr lang="en-US" sz="1400" dirty="0">
                           <a:solidFill>
-                            <a:srgbClr val="000000"/>
+                            <a:srgbClr val="1F2937"/>
                           </a:solidFill>
+                          <a:latin typeface="Aptos" pitchFamily="34" charset="0"/>
+                          <a:ea typeface="Aptos" pitchFamily="34" charset="-122"/>
+                          <a:cs typeface="Aptos" pitchFamily="34" charset="-120"/>
                         </a:rPr>
                         <a:t>At Risk</a:t>
                       </a:r>
-                      <a:endParaRPr lang="en-US" sz="900" dirty="0"/>
+                      <a:endParaRPr lang="en-US" sz="1400" dirty="0">
+                        <a:latin typeface="Aptos" charset="0"/>
+                        <a:ea typeface="Aptos" charset="0"/>
+                        <a:cs typeface="Aptos" charset="0"/>
+                      </a:endParaRPr>
                     </a:p>
                   </a:txBody>
-                  <a:tcPr marL="91440" marR="91440" marT="45720" marB="45720">
+                  <a:tcPr marL="36576" marR="36576" marT="27432" marB="27432" anchor="ctr">
                     <a:lnL w="6350" cap="flat" cmpd="sng" algn="ctr">
                       <a:solidFill>
                         <a:srgbClr val="E5E7EB"/>
@@ -4012,436 +6805,7 @@
                       <a:tailEnd type="none" w="med" len="med"/>
                     </a:lnB>
                     <a:solidFill>
-                      <a:srgbClr val="FFFFFF"/>
-                    </a:solidFill>
-                  </a:tcPr>
-                </a:tc>
-              </a:tr>
-              <a:tr h="457200">
-                <a:tc>
-                  <a:txBody>
-                    <a:bodyPr/>
-                    <a:lstStyle/>
-                    <a:p>
-                      <a:pPr indent="0" marL="0">
-                        <a:buNone/>
-                      </a:pPr>
-                      <a:r>
-                        <a:rPr lang="en-US" sz="900" dirty="0">
-                          <a:solidFill>
-                            <a:srgbClr val="000000"/>
-                          </a:solidFill>
-                        </a:rPr>
-                        <a:t>KAYSAKAT TP</a:t>
-                      </a:r>
-                      <a:endParaRPr lang="en-US" sz="900" dirty="0"/>
-                    </a:p>
-                  </a:txBody>
-                  <a:tcPr marL="91440" marR="91440" marT="45720" marB="45720">
-                    <a:lnL w="6350" cap="flat" cmpd="sng" algn="ctr">
-                      <a:solidFill>
-                        <a:srgbClr val="E5E7EB"/>
-                      </a:solidFill>
-                      <a:prstDash val="solid"/>
-                      <a:round/>
-                      <a:headEnd type="none" w="med" len="med"/>
-                      <a:tailEnd type="none" w="med" len="med"/>
-                    </a:lnL>
-                    <a:lnR w="6350" cap="flat" cmpd="sng" algn="ctr">
-                      <a:solidFill>
-                        <a:srgbClr val="E5E7EB"/>
-                      </a:solidFill>
-                      <a:prstDash val="solid"/>
-                      <a:round/>
-                      <a:headEnd type="none" w="med" len="med"/>
-                      <a:tailEnd type="none" w="med" len="med"/>
-                    </a:lnR>
-                    <a:lnT w="6350" cap="flat" cmpd="sng" algn="ctr">
-                      <a:solidFill>
-                        <a:srgbClr val="E5E7EB"/>
-                      </a:solidFill>
-                      <a:prstDash val="solid"/>
-                      <a:round/>
-                      <a:headEnd type="none" w="med" len="med"/>
-                      <a:tailEnd type="none" w="med" len="med"/>
-                    </a:lnT>
-                    <a:lnB w="6350" cap="flat" cmpd="sng" algn="ctr">
-                      <a:solidFill>
-                        <a:srgbClr val="E5E7EB"/>
-                      </a:solidFill>
-                      <a:prstDash val="solid"/>
-                      <a:round/>
-                      <a:headEnd type="none" w="med" len="med"/>
-                      <a:tailEnd type="none" w="med" len="med"/>
-                    </a:lnB>
-                    <a:solidFill>
-                      <a:srgbClr val="FFFFFF"/>
-                    </a:solidFill>
-                  </a:tcPr>
-                </a:tc>
-                <a:tc>
-                  <a:txBody>
-                    <a:bodyPr/>
-                    <a:lstStyle/>
-                    <a:p>
-                      <a:pPr indent="0" marL="0">
-                        <a:buNone/>
-                      </a:pPr>
-                      <a:r>
-                        <a:rPr lang="en-US" sz="900" dirty="0">
-                          <a:solidFill>
-                            <a:srgbClr val="000000"/>
-                          </a:solidFill>
-                        </a:rPr>
-                        <a:t>14</a:t>
-                      </a:r>
-                      <a:endParaRPr lang="en-US" sz="900" dirty="0"/>
-                    </a:p>
-                  </a:txBody>
-                  <a:tcPr marL="91440" marR="91440" marT="45720" marB="45720">
-                    <a:lnL w="6350" cap="flat" cmpd="sng" algn="ctr">
-                      <a:solidFill>
-                        <a:srgbClr val="E5E7EB"/>
-                      </a:solidFill>
-                      <a:prstDash val="solid"/>
-                      <a:round/>
-                      <a:headEnd type="none" w="med" len="med"/>
-                      <a:tailEnd type="none" w="med" len="med"/>
-                    </a:lnL>
-                    <a:lnR w="6350" cap="flat" cmpd="sng" algn="ctr">
-                      <a:solidFill>
-                        <a:srgbClr val="E5E7EB"/>
-                      </a:solidFill>
-                      <a:prstDash val="solid"/>
-                      <a:round/>
-                      <a:headEnd type="none" w="med" len="med"/>
-                      <a:tailEnd type="none" w="med" len="med"/>
-                    </a:lnR>
-                    <a:lnT w="6350" cap="flat" cmpd="sng" algn="ctr">
-                      <a:solidFill>
-                        <a:srgbClr val="E5E7EB"/>
-                      </a:solidFill>
-                      <a:prstDash val="solid"/>
-                      <a:round/>
-                      <a:headEnd type="none" w="med" len="med"/>
-                      <a:tailEnd type="none" w="med" len="med"/>
-                    </a:lnT>
-                    <a:lnB w="6350" cap="flat" cmpd="sng" algn="ctr">
-                      <a:solidFill>
-                        <a:srgbClr val="E5E7EB"/>
-                      </a:solidFill>
-                      <a:prstDash val="solid"/>
-                      <a:round/>
-                      <a:headEnd type="none" w="med" len="med"/>
-                      <a:tailEnd type="none" w="med" len="med"/>
-                    </a:lnB>
-                    <a:solidFill>
-                      <a:srgbClr val="FFFFFF"/>
-                    </a:solidFill>
-                  </a:tcPr>
-                </a:tc>
-                <a:tc>
-                  <a:txBody>
-                    <a:bodyPr/>
-                    <a:lstStyle/>
-                    <a:p>
-                      <a:pPr indent="0" marL="0">
-                        <a:buNone/>
-                      </a:pPr>
-                      <a:r>
-                        <a:rPr lang="en-US" sz="900" dirty="0">
-                          <a:solidFill>
-                            <a:srgbClr val="000000"/>
-                          </a:solidFill>
-                        </a:rPr>
-                        <a:t>1</a:t>
-                      </a:r>
-                      <a:endParaRPr lang="en-US" sz="900" dirty="0"/>
-                    </a:p>
-                  </a:txBody>
-                  <a:tcPr marL="91440" marR="91440" marT="45720" marB="45720">
-                    <a:lnL w="6350" cap="flat" cmpd="sng" algn="ctr">
-                      <a:solidFill>
-                        <a:srgbClr val="E5E7EB"/>
-                      </a:solidFill>
-                      <a:prstDash val="solid"/>
-                      <a:round/>
-                      <a:headEnd type="none" w="med" len="med"/>
-                      <a:tailEnd type="none" w="med" len="med"/>
-                    </a:lnL>
-                    <a:lnR w="6350" cap="flat" cmpd="sng" algn="ctr">
-                      <a:solidFill>
-                        <a:srgbClr val="E5E7EB"/>
-                      </a:solidFill>
-                      <a:prstDash val="solid"/>
-                      <a:round/>
-                      <a:headEnd type="none" w="med" len="med"/>
-                      <a:tailEnd type="none" w="med" len="med"/>
-                    </a:lnR>
-                    <a:lnT w="6350" cap="flat" cmpd="sng" algn="ctr">
-                      <a:solidFill>
-                        <a:srgbClr val="E5E7EB"/>
-                      </a:solidFill>
-                      <a:prstDash val="solid"/>
-                      <a:round/>
-                      <a:headEnd type="none" w="med" len="med"/>
-                      <a:tailEnd type="none" w="med" len="med"/>
-                    </a:lnT>
-                    <a:lnB w="6350" cap="flat" cmpd="sng" algn="ctr">
-                      <a:solidFill>
-                        <a:srgbClr val="E5E7EB"/>
-                      </a:solidFill>
-                      <a:prstDash val="solid"/>
-                      <a:round/>
-                      <a:headEnd type="none" w="med" len="med"/>
-                      <a:tailEnd type="none" w="med" len="med"/>
-                    </a:lnB>
-                    <a:solidFill>
-                      <a:srgbClr val="FFFFFF"/>
-                    </a:solidFill>
-                  </a:tcPr>
-                </a:tc>
-                <a:tc>
-                  <a:txBody>
-                    <a:bodyPr/>
-                    <a:lstStyle/>
-                    <a:p>
-                      <a:pPr indent="0" marL="0">
-                        <a:buNone/>
-                      </a:pPr>
-                      <a:r>
-                        <a:rPr lang="en-US" sz="900" dirty="0">
-                          <a:solidFill>
-                            <a:srgbClr val="000000"/>
-                          </a:solidFill>
-                        </a:rPr>
-                        <a:t>1</a:t>
-                      </a:r>
-                      <a:endParaRPr lang="en-US" sz="900" dirty="0"/>
-                    </a:p>
-                  </a:txBody>
-                  <a:tcPr marL="91440" marR="91440" marT="45720" marB="45720">
-                    <a:lnL w="6350" cap="flat" cmpd="sng" algn="ctr">
-                      <a:solidFill>
-                        <a:srgbClr val="E5E7EB"/>
-                      </a:solidFill>
-                      <a:prstDash val="solid"/>
-                      <a:round/>
-                      <a:headEnd type="none" w="med" len="med"/>
-                      <a:tailEnd type="none" w="med" len="med"/>
-                    </a:lnL>
-                    <a:lnR w="6350" cap="flat" cmpd="sng" algn="ctr">
-                      <a:solidFill>
-                        <a:srgbClr val="E5E7EB"/>
-                      </a:solidFill>
-                      <a:prstDash val="solid"/>
-                      <a:round/>
-                      <a:headEnd type="none" w="med" len="med"/>
-                      <a:tailEnd type="none" w="med" len="med"/>
-                    </a:lnR>
-                    <a:lnT w="6350" cap="flat" cmpd="sng" algn="ctr">
-                      <a:solidFill>
-                        <a:srgbClr val="E5E7EB"/>
-                      </a:solidFill>
-                      <a:prstDash val="solid"/>
-                      <a:round/>
-                      <a:headEnd type="none" w="med" len="med"/>
-                      <a:tailEnd type="none" w="med" len="med"/>
-                    </a:lnT>
-                    <a:lnB w="6350" cap="flat" cmpd="sng" algn="ctr">
-                      <a:solidFill>
-                        <a:srgbClr val="E5E7EB"/>
-                      </a:solidFill>
-                      <a:prstDash val="solid"/>
-                      <a:round/>
-                      <a:headEnd type="none" w="med" len="med"/>
-                      <a:tailEnd type="none" w="med" len="med"/>
-                    </a:lnB>
-                    <a:solidFill>
-                      <a:srgbClr val="FFFFFF"/>
-                    </a:solidFill>
-                  </a:tcPr>
-                </a:tc>
-                <a:tc>
-                  <a:txBody>
-                    <a:bodyPr/>
-                    <a:lstStyle/>
-                    <a:p>
-                      <a:pPr indent="0" marL="0">
-                        <a:buNone/>
-                      </a:pPr>
-                      <a:r>
-                        <a:rPr lang="en-US" sz="900" dirty="0">
-                          <a:solidFill>
-                            <a:srgbClr val="000000"/>
-                          </a:solidFill>
-                        </a:rPr>
-                        <a:t>13</a:t>
-                      </a:r>
-                      <a:endParaRPr lang="en-US" sz="900" dirty="0"/>
-                    </a:p>
-                  </a:txBody>
-                  <a:tcPr marL="91440" marR="91440" marT="45720" marB="45720">
-                    <a:lnL w="6350" cap="flat" cmpd="sng" algn="ctr">
-                      <a:solidFill>
-                        <a:srgbClr val="E5E7EB"/>
-                      </a:solidFill>
-                      <a:prstDash val="solid"/>
-                      <a:round/>
-                      <a:headEnd type="none" w="med" len="med"/>
-                      <a:tailEnd type="none" w="med" len="med"/>
-                    </a:lnL>
-                    <a:lnR w="6350" cap="flat" cmpd="sng" algn="ctr">
-                      <a:solidFill>
-                        <a:srgbClr val="E5E7EB"/>
-                      </a:solidFill>
-                      <a:prstDash val="solid"/>
-                      <a:round/>
-                      <a:headEnd type="none" w="med" len="med"/>
-                      <a:tailEnd type="none" w="med" len="med"/>
-                    </a:lnR>
-                    <a:lnT w="6350" cap="flat" cmpd="sng" algn="ctr">
-                      <a:solidFill>
-                        <a:srgbClr val="E5E7EB"/>
-                      </a:solidFill>
-                      <a:prstDash val="solid"/>
-                      <a:round/>
-                      <a:headEnd type="none" w="med" len="med"/>
-                      <a:tailEnd type="none" w="med" len="med"/>
-                    </a:lnT>
-                    <a:lnB w="6350" cap="flat" cmpd="sng" algn="ctr">
-                      <a:solidFill>
-                        <a:srgbClr val="E5E7EB"/>
-                      </a:solidFill>
-                      <a:prstDash val="solid"/>
-                      <a:round/>
-                      <a:headEnd type="none" w="med" len="med"/>
-                      <a:tailEnd type="none" w="med" len="med"/>
-                    </a:lnB>
-                    <a:solidFill>
-                      <a:srgbClr val="FFFFFF"/>
-                    </a:solidFill>
-                  </a:tcPr>
-                </a:tc>
-                <a:tc>
-                  <a:txBody>
-                    <a:bodyPr/>
-                    <a:lstStyle/>
-                    <a:p>
-                      <a:pPr indent="0" marL="0">
-                        <a:buNone/>
-                      </a:pPr>
-                      <a:r>
-                        <a:rPr lang="en-US" sz="900" dirty="0">
-                          <a:solidFill>
-                            <a:srgbClr val="000000"/>
-                          </a:solidFill>
-                        </a:rPr>
-                        <a:t>7.1%</a:t>
-                      </a:r>
-                      <a:endParaRPr lang="en-US" sz="900" dirty="0"/>
-                    </a:p>
-                  </a:txBody>
-                  <a:tcPr marL="91440" marR="91440" marT="45720" marB="45720">
-                    <a:lnL w="6350" cap="flat" cmpd="sng" algn="ctr">
-                      <a:solidFill>
-                        <a:srgbClr val="E5E7EB"/>
-                      </a:solidFill>
-                      <a:prstDash val="solid"/>
-                      <a:round/>
-                      <a:headEnd type="none" w="med" len="med"/>
-                      <a:tailEnd type="none" w="med" len="med"/>
-                    </a:lnL>
-                    <a:lnR w="6350" cap="flat" cmpd="sng" algn="ctr">
-                      <a:solidFill>
-                        <a:srgbClr val="E5E7EB"/>
-                      </a:solidFill>
-                      <a:prstDash val="solid"/>
-                      <a:round/>
-                      <a:headEnd type="none" w="med" len="med"/>
-                      <a:tailEnd type="none" w="med" len="med"/>
-                    </a:lnR>
-                    <a:lnT w="6350" cap="flat" cmpd="sng" algn="ctr">
-                      <a:solidFill>
-                        <a:srgbClr val="E5E7EB"/>
-                      </a:solidFill>
-                      <a:prstDash val="solid"/>
-                      <a:round/>
-                      <a:headEnd type="none" w="med" len="med"/>
-                      <a:tailEnd type="none" w="med" len="med"/>
-                    </a:lnT>
-                    <a:lnB w="6350" cap="flat" cmpd="sng" algn="ctr">
-                      <a:solidFill>
-                        <a:srgbClr val="E5E7EB"/>
-                      </a:solidFill>
-                      <a:prstDash val="solid"/>
-                      <a:round/>
-                      <a:headEnd type="none" w="med" len="med"/>
-                      <a:tailEnd type="none" w="med" len="med"/>
-                    </a:lnB>
-                    <a:solidFill>
-                      <a:srgbClr val="FFFFFF"/>
-                    </a:solidFill>
-                  </a:tcPr>
-                </a:tc>
-                <a:tc>
-                  <a:txBody>
-                    <a:bodyPr/>
-                    <a:lstStyle/>
-                    <a:p>
-                      <a:pPr indent="0" marL="0">
-                        <a:buNone/>
-                      </a:pPr>
-                      <a:r>
-                        <a:rPr lang="en-US" sz="900" dirty="0">
-                          <a:solidFill>
-                            <a:srgbClr val="000000"/>
-                          </a:solidFill>
-                        </a:rPr>
-                        <a:t>At Risk</a:t>
-                      </a:r>
-                      <a:endParaRPr lang="en-US" sz="900" dirty="0"/>
-                    </a:p>
-                  </a:txBody>
-                  <a:tcPr marL="91440" marR="91440" marT="45720" marB="45720">
-                    <a:lnL w="6350" cap="flat" cmpd="sng" algn="ctr">
-                      <a:solidFill>
-                        <a:srgbClr val="E5E7EB"/>
-                      </a:solidFill>
-                      <a:prstDash val="solid"/>
-                      <a:round/>
-                      <a:headEnd type="none" w="med" len="med"/>
-                      <a:tailEnd type="none" w="med" len="med"/>
-                    </a:lnL>
-                    <a:lnR w="6350" cap="flat" cmpd="sng" algn="ctr">
-                      <a:solidFill>
-                        <a:srgbClr val="E5E7EB"/>
-                      </a:solidFill>
-                      <a:prstDash val="solid"/>
-                      <a:round/>
-                      <a:headEnd type="none" w="med" len="med"/>
-                      <a:tailEnd type="none" w="med" len="med"/>
-                    </a:lnR>
-                    <a:lnT w="6350" cap="flat" cmpd="sng" algn="ctr">
-                      <a:solidFill>
-                        <a:srgbClr val="E5E7EB"/>
-                      </a:solidFill>
-                      <a:prstDash val="solid"/>
-                      <a:round/>
-                      <a:headEnd type="none" w="med" len="med"/>
-                      <a:tailEnd type="none" w="med" len="med"/>
-                    </a:lnT>
-                    <a:lnB w="6350" cap="flat" cmpd="sng" algn="ctr">
-                      <a:solidFill>
-                        <a:srgbClr val="E5E7EB"/>
-                      </a:solidFill>
-                      <a:prstDash val="solid"/>
-                      <a:round/>
-                      <a:headEnd type="none" w="med" len="med"/>
-                      <a:tailEnd type="none" w="med" len="med"/>
-                    </a:lnB>
-                    <a:solidFill>
-                      <a:srgbClr val="FFFFFF"/>
+                      <a:srgbClr val="FEE2E2"/>
                     </a:solidFill>
                   </a:tcPr>
                 </a:tc>
@@ -4453,72 +6817,98 @@
       <p:sp>
         <p:nvSpPr>
           <p:cNvPr id="6" name="Text 3"/>
-          <p:cNvSpPr/>
+          <p:cNvSpPr txBox="1"/>
           <p:nvPr/>
         </p:nvSpPr>
         <p:spPr>
           <a:xfrm>
-            <a:off x="576072" y="6217920"/>
-            <a:ext cx="9144000" cy="365760"/>
+            <a:off x="576072" y="6574536"/>
+            <a:ext cx="9144000" cy="192024"/>
           </a:xfrm>
           <a:prstGeom prst="rect">
             <a:avLst/>
           </a:prstGeom>
-          <a:noFill/>
-          <a:ln/>
+          <a:solidFill>
+            <a:srgbClr val="FFFFFF">
+              <a:alpha val="0"/>
+            </a:srgbClr>
+          </a:solidFill>
+          <a:ln>
+            <a:solidFill>
+              <a:srgbClr val="FFFFFF">
+                <a:alpha val="0"/>
+              </a:srgbClr>
+            </a:solidFill>
+          </a:ln>
         </p:spPr>
         <p:txBody>
-          <a:bodyPr wrap="square" rtlCol="0" anchor="ctr"/>
+          <a:bodyPr wrap="square" lIns="44450" tIns="63500" rIns="63500" bIns="44450" rtlCol="0" anchor="t"/>
           <a:lstStyle/>
           <a:p>
-            <a:pPr indent="0" marL="0">
+            <a:pPr algn="l" indent="0" marL="0">
               <a:buNone/>
             </a:pPr>
             <a:r>
-              <a:rPr lang="en-US" sz="900" dirty="0">
+              <a:rPr lang="en-US" sz="1400" dirty="0">
                 <a:solidFill>
-                  <a:srgbClr val="666666"/>
+                  <a:srgbClr val="595959"/>
                 </a:solidFill>
+                <a:latin typeface="Aptos" pitchFamily="34" charset="0"/>
+                <a:ea typeface="Aptos" pitchFamily="34" charset="-122"/>
+                <a:cs typeface="Aptos" pitchFamily="34" charset="-120"/>
               </a:rPr>
               <a:t>Source: O&amp;M Manual Governance module • July 25, 2026</a:t>
             </a:r>
-            <a:endParaRPr lang="en-US" sz="900" dirty="0"/>
+            <a:endParaRPr lang="en-US" sz="1400" dirty="0"/>
           </a:p>
         </p:txBody>
       </p:sp>
       <p:sp>
         <p:nvSpPr>
           <p:cNvPr id="7" name="Text 4"/>
-          <p:cNvSpPr/>
+          <p:cNvSpPr txBox="1"/>
           <p:nvPr/>
         </p:nvSpPr>
         <p:spPr>
           <a:xfrm>
-            <a:off x="10972800" y="6217920"/>
-            <a:ext cx="731520" cy="365760"/>
+            <a:off x="11430000" y="6574536"/>
+            <a:ext cx="731520" cy="192024"/>
           </a:xfrm>
           <a:prstGeom prst="rect">
             <a:avLst/>
           </a:prstGeom>
-          <a:noFill/>
-          <a:ln/>
+          <a:solidFill>
+            <a:srgbClr val="FFFFFF">
+              <a:alpha val="0"/>
+            </a:srgbClr>
+          </a:solidFill>
+          <a:ln>
+            <a:solidFill>
+              <a:srgbClr val="FFFFFF">
+                <a:alpha val="0"/>
+              </a:srgbClr>
+            </a:solidFill>
+          </a:ln>
         </p:spPr>
         <p:txBody>
-          <a:bodyPr wrap="square" rtlCol="0" anchor="ctr"/>
+          <a:bodyPr wrap="square" lIns="44450" tIns="63500" rIns="63500" bIns="44450" rtlCol="0" anchor="t"/>
           <a:lstStyle/>
           <a:p>
             <a:pPr algn="r" indent="0" marL="0">
               <a:buNone/>
             </a:pPr>
             <a:r>
-              <a:rPr lang="en-US" sz="900" dirty="0">
+              <a:rPr lang="en-US" sz="1400" dirty="0">
                 <a:solidFill>
-                  <a:srgbClr val="666666"/>
+                  <a:srgbClr val="595959"/>
                 </a:solidFill>
+                <a:latin typeface="Aptos" pitchFamily="34" charset="0"/>
+                <a:ea typeface="Aptos" pitchFamily="34" charset="-122"/>
+                <a:cs typeface="Aptos" pitchFamily="34" charset="-120"/>
               </a:rPr>
               <a:t>4 / 4</a:t>
             </a:r>
-            <a:endParaRPr lang="en-US" sz="900" dirty="0"/>
+            <a:endParaRPr lang="en-US" sz="1400" dirty="0"/>
           </a:p>
         </p:txBody>
       </p:sp>
@@ -4573,7 +6963,7 @@
     </a:clrScheme>
     <a:fontScheme name="Office">
       <a:majorFont>
-        <a:latin typeface="Calibri Light" panose="020F0302020204030204"/>
+        <a:latin typeface="Aptos Display"/>
         <a:ea typeface=""/>
         <a:cs typeface=""/>
         <a:font script="Jpan" typeface="游ゴシック Light"/>
@@ -4625,7 +7015,7 @@
         <a:font script="Tfng" typeface="Ebrima"/>
       </a:majorFont>
       <a:minorFont>
-        <a:latin typeface="Calibri" panose="020F0502020204030204"/>
+        <a:latin typeface="Aptos"/>
         <a:ea typeface=""/>
         <a:cs typeface=""/>
         <a:font script="Jpan" typeface="游ゴシック"/>
